--- a/paper/slides/GAC-seminar.pptx
+++ b/paper/slides/GAC-seminar.pptx
@@ -24,12 +24,13 @@
     <p:sldId id="269" r:id="rId15"/>
     <p:sldId id="270" r:id="rId16"/>
     <p:sldId id="271" r:id="rId17"/>
-    <p:sldId id="272" r:id="rId18"/>
+    <p:sldId id="276" r:id="rId22"/>
     <p:sldId id="273" r:id="rId19"/>
     <p:sldId id="274" r:id="rId20"/>
     <p:sldId id="275" r:id="rId21"/>
-    <p:sldId id="276" r:id="rId22"/>
-    <p:sldId id="277" r:id="rId23"/>
+    <p:sldId id="281" r:id="rIdGac26"/>
+    <p:sldId id="272" r:id="rId18"/>
+    <p:sldId id="282" r:id="rIdGac27"/>
     <p:sldId id="278" r:id="rId24"/>
     <p:sldId id="279" r:id="rId25"/>
     <p:sldId id="280" r:id="rId26"/>
@@ -700,7 +701,7 @@
               <c:strCache>
                 <c:ptCount val="1"/>
                 <c:pt idx="0">
-                  <c:v>Hand-written macro</c:v>
+                  <c:v>Hand-written program</c:v>
                 </c:pt>
               </c:strCache>
             </c:strRef>
@@ -979,7 +980,7 @@
                 </a:solidFill>
                 <a:latin typeface="Calibri"/>
               </a:rPr>
-              <a:t>Saving versus baseline per demonstration condition (%)</a:t>
+              <a:t>Saving versus the unchanged agent, per repository (%)</a:t>
             </a:r>
           </a:p>
         </c:rich>
@@ -1002,7 +1003,7 @@
               <c:strCache>
                 <c:ptCount val="1"/>
                 <c:pt idx="0">
-                  <c:v>Tokens saved</c:v>
+                  <c:v>Requests saved</c:v>
                 </c:pt>
               </c:strCache>
             </c:strRef>
@@ -1053,53 +1054,66 @@
           </c:dLbls>
           <c:cat>
             <c:strRef>
-              <c:f>Sheet1!$A$2:$A$7</c:f>
+              <c:f>Sheet1!$A$2:$A$8</c:f>
               <c:strCache>
-                <c:ptCount val="6"/>
+                <c:ptCount val="7"/>
                 <c:pt idx="0">
-                  <c:v>A  linear read prefix</c:v>
+                  <c:v>datasets
+core</c:v>
                 </c:pt>
                 <c:pt idx="1">
-                  <c:v>B  ACL + index guard</c:v>
+                  <c:v>pandas
+core</c:v>
                 </c:pt>
                 <c:pt idx="2">
-                  <c:v>C  handoff barrier</c:v>
+                  <c:v>requests
+core</c:v>
                 </c:pt>
                 <c:pt idx="3">
-                  <c:v>E  branch + write</c:v>
+                  <c:v>streamlit
+core</c:v>
                 </c:pt>
                 <c:pt idx="4">
-                  <c:v>F  route specialization</c:v>
+                  <c:v>pandas
+balanced</c:v>
                 </c:pt>
                 <c:pt idx="5">
-                  <c:v>E′  refused (control)</c:v>
+                  <c:v>requests
+balanced</c:v>
+                </c:pt>
+                <c:pt idx="6">
+                  <c:v>pytorch
+balanced</c:v>
                 </c:pt>
               </c:strCache>
             </c:strRef>
           </c:cat>
           <c:val>
             <c:numRef>
-              <c:f>Sheet1!$B$2:$B$7</c:f>
+              <c:f>Sheet1!$B$2:$B$8</c:f>
               <c:numCache>
                 <c:formatCode>General</c:formatCode>
-                <c:ptCount val="6"/>
+                <c:ptCount val="7"/>
                 <c:pt idx="0">
-                  <c:v>79.599999999999994</c:v>
+                  <c:v>44.4</c:v>
                 </c:pt>
                 <c:pt idx="1">
-                  <c:v>76.3</c:v>
+                  <c:v>44.4</c:v>
                 </c:pt>
                 <c:pt idx="2">
-                  <c:v>73.8</c:v>
+                  <c:v>44.4</c:v>
                 </c:pt>
                 <c:pt idx="3">
-                  <c:v>66.400000000000006</c:v>
+                  <c:v>44.4</c:v>
                 </c:pt>
                 <c:pt idx="4">
-                  <c:v>16.8</c:v>
+                  <c:v>66.7</c:v>
                 </c:pt>
                 <c:pt idx="5">
-                  <c:v>-0.2</c:v>
+                  <c:v>66.7</c:v>
+                </c:pt>
+                <c:pt idx="6">
+                  <c:v>66.7</c:v>
                 </c:pt>
               </c:numCache>
             </c:numRef>
@@ -1119,7 +1133,7 @@
               <c:strCache>
                 <c:ptCount val="1"/>
                 <c:pt idx="0">
-                  <c:v>Cost saved</c:v>
+                  <c:v>Tokens saved</c:v>
                 </c:pt>
               </c:strCache>
             </c:strRef>
@@ -1170,53 +1184,66 @@
           </c:dLbls>
           <c:cat>
             <c:strRef>
-              <c:f>Sheet1!$A$2:$A$7</c:f>
+              <c:f>Sheet1!$A$2:$A$8</c:f>
               <c:strCache>
-                <c:ptCount val="6"/>
+                <c:ptCount val="7"/>
                 <c:pt idx="0">
-                  <c:v>A  linear read prefix</c:v>
+                  <c:v>datasets
+core</c:v>
                 </c:pt>
                 <c:pt idx="1">
-                  <c:v>B  ACL + index guard</c:v>
+                  <c:v>pandas
+core</c:v>
                 </c:pt>
                 <c:pt idx="2">
-                  <c:v>C  handoff barrier</c:v>
+                  <c:v>requests
+core</c:v>
                 </c:pt>
                 <c:pt idx="3">
-                  <c:v>E  branch + write</c:v>
+                  <c:v>streamlit
+core</c:v>
                 </c:pt>
                 <c:pt idx="4">
-                  <c:v>F  route specialization</c:v>
+                  <c:v>pandas
+balanced</c:v>
                 </c:pt>
                 <c:pt idx="5">
-                  <c:v>E′  refused (control)</c:v>
+                  <c:v>requests
+balanced</c:v>
+                </c:pt>
+                <c:pt idx="6">
+                  <c:v>pytorch
+balanced</c:v>
                 </c:pt>
               </c:strCache>
             </c:strRef>
           </c:cat>
           <c:val>
             <c:numRef>
-              <c:f>Sheet1!$C$2:$C$7</c:f>
+              <c:f>Sheet1!$C$2:$C$8</c:f>
               <c:numCache>
                 <c:formatCode>General</c:formatCode>
-                <c:ptCount val="6"/>
+                <c:ptCount val="7"/>
                 <c:pt idx="0">
-                  <c:v>73.599999999999994</c:v>
+                  <c:v>52.2</c:v>
                 </c:pt>
                 <c:pt idx="1">
-                  <c:v>68.7</c:v>
+                  <c:v>52.5</c:v>
                 </c:pt>
                 <c:pt idx="2">
-                  <c:v>75.5</c:v>
+                  <c:v>52.3</c:v>
                 </c:pt>
                 <c:pt idx="3">
-                  <c:v>-8.3000000000000007</c:v>
+                  <c:v>52.7</c:v>
                 </c:pt>
                 <c:pt idx="4">
-                  <c:v>-123</c:v>
+                  <c:v>78.6</c:v>
                 </c:pt>
                 <c:pt idx="5">
-                  <c:v>-55.4</c:v>
+                  <c:v>78.7</c:v>
+                </c:pt>
+                <c:pt idx="6">
+                  <c:v>78</c:v>
                 </c:pt>
               </c:numCache>
             </c:numRef>
@@ -1284,7 +1311,7 @@
         <c:scaling>
           <c:orientation val="minMax"/>
           <c:max val="100"/>
-          <c:min val="-150"/>
+          <c:min val="0"/>
         </c:scaling>
         <c:delete val="0"/>
         <c:axPos val="l"/>
@@ -1328,7 +1355,7 @@
         <c:crossAx val="2094734554"/>
         <c:crosses val="autoZero"/>
         <c:crossBetween val="between"/>
-        <c:majorUnit val="50"/>
+        <c:majorUnit val="20"/>
       </c:valAx>
       <c:spPr>
         <a:noFill/>
@@ -1358,295 +1385,6 @@
         </a:p>
       </c:txPr>
     </c:legend>
-    <c:plotVisOnly val="1"/>
-    <c:dispBlanksAs val="span"/>
-    <c:showDLblsOverMax val="1"/>
-  </c:chart>
-  <c:spPr>
-    <a:noFill/>
-    <a:ln>
-      <a:noFill/>
-    </a:ln>
-    <a:effectLst/>
-  </c:spPr>
-  <c:externalData r:id="rId1">
-    <c:autoUpdate val="0"/>
-  </c:externalData>
-</c:chartSpace>
-</file>
-
-<file path=ppt/charts/chart4.xml><?xml version="1.0" encoding="utf-8"?>
-<c:chartSpace xmlns:c="http://schemas.openxmlformats.org/drawingml/2006/chart" xmlns:a="http://schemas.openxmlformats.org/drawingml/2006/main" xmlns:r="http://schemas.openxmlformats.org/officeDocument/2006/relationships" xmlns:c16r2="http://schemas.microsoft.com/office/drawing/2015/06/chart">
-  <c:date1904 val="0"/>
-  <c:lang val="en-US"/>
-  <c:roundedCorners val="1"/>
-  <c:style val="2"/>
-  <c:chart>
-    <c:title>
-      <c:tx>
-        <c:rich>
-          <a:bodyPr/>
-          <a:lstStyle/>
-          <a:p>
-            <a:pPr algn="l">
-              <a:defRPr sz="1050" b="0" i="0" u="none" strike="noStrike">
-                <a:solidFill>
-                  <a:srgbClr val="5A6B84"/>
-                </a:solidFill>
-                <a:latin typeface="Calibri"/>
-              </a:defRPr>
-            </a:pPr>
-            <a:r>
-              <a:rPr lang="en-US" sz="1050" b="0" i="0" u="none" strike="noStrike">
-                <a:solidFill>
-                  <a:srgbClr val="5A6B84"/>
-                </a:solidFill>
-                <a:latin typeface="Calibri"/>
-              </a:rPr>
-              <a:t>Mean paired utility on 30 frozen calibration groups (pp)</a:t>
-            </a:r>
-          </a:p>
-        </c:rich>
-      </c:tx>
-      <c:overlay val="0"/>
-    </c:title>
-    <c:autoTitleDeleted val="0"/>
-    <c:plotArea>
-      <c:layout/>
-      <c:barChart>
-        <c:barDir val="bar"/>
-        <c:grouping val="clustered"/>
-        <c:varyColors val="0"/>
-        <c:ser>
-          <c:idx val="0"/>
-          <c:order val="0"/>
-          <c:tx>
-            <c:strRef>
-              <c:f>Sheet1!$B$1</c:f>
-              <c:strCache>
-                <c:ptCount val="1"/>
-                <c:pt idx="0">
-                  <c:v>Mean paired utility</c:v>
-                </c:pt>
-              </c:strCache>
-            </c:strRef>
-          </c:tx>
-          <c:spPr>
-            <a:solidFill>
-              <a:srgbClr val="A93B2B"/>
-            </a:solidFill>
-            <a:effectLst/>
-          </c:spPr>
-          <c:invertIfNegative val="0"/>
-          <c:dPt>
-            <c:idx val="0"/>
-            <c:invertIfNegative val="0"/>
-            <c:bubble3D val="0"/>
-            <c:extLst>
-              <c:ext xmlns:c16="http://schemas.microsoft.com/office/drawing/2014/chart" uri="{C3380CC4-5D6E-409C-BE32-E72D297353CC}">
-                <c16:uniqueId val="{00000001-F5D2-7443-8535-59206EE55043}"/>
-              </c:ext>
-            </c:extLst>
-          </c:dPt>
-          <c:dPt>
-            <c:idx val="1"/>
-            <c:invertIfNegative val="0"/>
-            <c:bubble3D val="0"/>
-            <c:spPr>
-              <a:solidFill>
-                <a:srgbClr val="1F8A99"/>
-              </a:solidFill>
-              <a:effectLst/>
-            </c:spPr>
-            <c:extLst>
-              <c:ext xmlns:c16="http://schemas.microsoft.com/office/drawing/2014/chart" uri="{C3380CC4-5D6E-409C-BE32-E72D297353CC}">
-                <c16:uniqueId val="{00000003-F5D2-7443-8535-59206EE55043}"/>
-              </c:ext>
-            </c:extLst>
-          </c:dPt>
-          <c:dLbls>
-            <c:numFmt formatCode="0.0" sourceLinked="0"/>
-            <c:spPr>
-              <a:noFill/>
-              <a:ln>
-                <a:noFill/>
-              </a:ln>
-              <a:effectLst/>
-            </c:spPr>
-            <c:txPr>
-              <a:bodyPr/>
-              <a:lstStyle/>
-              <a:p>
-                <a:pPr>
-                  <a:defRPr sz="1200" b="1" i="0" u="none" strike="noStrike">
-                    <a:solidFill>
-                      <a:srgbClr val="24354F"/>
-                    </a:solidFill>
-                    <a:latin typeface="Calibri"/>
-                  </a:defRPr>
-                </a:pPr>
-                <a:endParaRPr lang="en-US"/>
-              </a:p>
-            </c:txPr>
-            <c:showLegendKey val="0"/>
-            <c:showVal val="1"/>
-            <c:showCatName val="0"/>
-            <c:showSerName val="0"/>
-            <c:showPercent val="0"/>
-            <c:showBubbleSize val="0"/>
-            <c:showLeaderLines val="0"/>
-            <c:extLst>
-              <c:ext xmlns:c15="http://schemas.microsoft.com/office/drawing/2012/chart" uri="{CE6537A1-D6FC-4f65-9D91-7224C49458BB}">
-                <c15:showLeaderLines val="0"/>
-              </c:ext>
-            </c:extLst>
-          </c:dLbls>
-          <c:cat>
-            <c:strRef>
-              <c:f>Sheet1!$A$2:$A$3</c:f>
-              <c:strCache>
-                <c:ptCount val="2"/>
-                <c:pt idx="0">
-                  <c:v>Hand-written macro</c:v>
-                </c:pt>
-                <c:pt idx="1">
-                  <c:v>Learned compiler</c:v>
-                </c:pt>
-              </c:strCache>
-            </c:strRef>
-          </c:cat>
-          <c:val>
-            <c:numRef>
-              <c:f>Sheet1!$B$2:$B$3</c:f>
-              <c:numCache>
-                <c:formatCode>General</c:formatCode>
-                <c:ptCount val="2"/>
-                <c:pt idx="0">
-                  <c:v>48.9</c:v>
-                </c:pt>
-                <c:pt idx="1">
-                  <c:v>32.700000000000003</c:v>
-                </c:pt>
-              </c:numCache>
-            </c:numRef>
-          </c:val>
-          <c:extLst>
-            <c:ext xmlns:c16="http://schemas.microsoft.com/office/drawing/2014/chart" uri="{C3380CC4-5D6E-409C-BE32-E72D297353CC}">
-              <c16:uniqueId val="{00000004-F5D2-7443-8535-59206EE55043}"/>
-            </c:ext>
-          </c:extLst>
-        </c:ser>
-        <c:dLbls>
-          <c:showLegendKey val="0"/>
-          <c:showVal val="1"/>
-          <c:showCatName val="0"/>
-          <c:showSerName val="0"/>
-          <c:showPercent val="0"/>
-          <c:showBubbleSize val="0"/>
-        </c:dLbls>
-        <c:gapWidth val="60"/>
-        <c:axId val="2094734554"/>
-        <c:axId val="2094734552"/>
-      </c:barChart>
-      <c:catAx>
-        <c:axId val="2094734554"/>
-        <c:scaling>
-          <c:orientation val="minMax"/>
-        </c:scaling>
-        <c:delete val="0"/>
-        <c:axPos val="l"/>
-        <c:numFmt formatCode="General" sourceLinked="1"/>
-        <c:majorTickMark val="out"/>
-        <c:minorTickMark val="none"/>
-        <c:tickLblPos val="nextTo"/>
-        <c:spPr>
-          <a:ln w="12700" cap="flat">
-            <a:noFill/>
-            <a:prstDash val="solid"/>
-            <a:round/>
-          </a:ln>
-        </c:spPr>
-        <c:txPr>
-          <a:bodyPr/>
-          <a:lstStyle/>
-          <a:p>
-            <a:pPr>
-              <a:defRPr sz="1050" b="0" i="0" u="none" strike="noStrike">
-                <a:solidFill>
-                  <a:srgbClr val="5A6B84"/>
-                </a:solidFill>
-                <a:latin typeface="Calibri"/>
-              </a:defRPr>
-            </a:pPr>
-            <a:endParaRPr lang="en-US"/>
-          </a:p>
-        </c:txPr>
-        <c:crossAx val="2094734552"/>
-        <c:crosses val="autoZero"/>
-        <c:auto val="1"/>
-        <c:lblAlgn val="ctr"/>
-        <c:lblOffset val="100"/>
-        <c:noMultiLvlLbl val="1"/>
-      </c:catAx>
-      <c:valAx>
-        <c:axId val="2094734552"/>
-        <c:scaling>
-          <c:orientation val="minMax"/>
-          <c:max val="60"/>
-          <c:min val="0"/>
-        </c:scaling>
-        <c:delete val="0"/>
-        <c:axPos val="b"/>
-        <c:majorGridlines>
-          <c:spPr>
-            <a:ln w="9525" cap="flat">
-              <a:solidFill>
-                <a:srgbClr val="E7EDF3"/>
-              </a:solidFill>
-              <a:prstDash val="solid"/>
-              <a:round/>
-            </a:ln>
-          </c:spPr>
-        </c:majorGridlines>
-        <c:numFmt formatCode="General" sourceLinked="0"/>
-        <c:majorTickMark val="out"/>
-        <c:minorTickMark val="none"/>
-        <c:tickLblPos val="low"/>
-        <c:spPr>
-          <a:ln w="12700" cap="flat">
-            <a:noFill/>
-            <a:prstDash val="solid"/>
-            <a:round/>
-          </a:ln>
-        </c:spPr>
-        <c:txPr>
-          <a:bodyPr/>
-          <a:lstStyle/>
-          <a:p>
-            <a:pPr>
-              <a:defRPr sz="1000" b="0" i="0" u="none" strike="noStrike">
-                <a:solidFill>
-                  <a:srgbClr val="5A6B84"/>
-                </a:solidFill>
-                <a:latin typeface="Calibri"/>
-              </a:defRPr>
-            </a:pPr>
-            <a:endParaRPr lang="en-US"/>
-          </a:p>
-        </c:txPr>
-        <c:crossAx val="2094734554"/>
-        <c:crosses val="autoZero"/>
-        <c:crossBetween val="between"/>
-        <c:majorUnit val="20"/>
-      </c:valAx>
-      <c:spPr>
-        <a:noFill/>
-        <a:ln>
-          <a:noFill/>
-        </a:ln>
-        <a:effectLst/>
-      </c:spPr>
-    </c:plotArea>
     <c:plotVisOnly val="1"/>
     <c:dispBlanksAs val="span"/>
     <c:showDLblsOverMax val="1"/>
@@ -1835,7 +1573,7 @@
           <a:p>
             <a:r>
               <a:rPr lang="en-US" dirty="0"/>
-              <a:t>Two framing sentences: the engineering result is that a naturally recurring read prefix can be compiled away with quality preserved on a sealed sample. The scientific result is that almost no recurrent family in a public benchmark can be certified at all under the configured gate. The paper is organized so that the second is as visible as the first.</a:t>
+              <a:t>Two framing sentences. The engineering result is that recurring read-only openings can be compiled into guarded programs: two-thirds fewer model calls on three GitHub workflows with 90/90 contracts kept, and 45–50% fewer on BIRD with no detected loss. The scientific result is that the compiler must refuse where evidence is thin or the opening is a per-question choice, and that its certificates mostly confirm sample size.</a:t>
             </a:r>
           </a:p>
         </p:txBody>
@@ -1922,7 +1660,7 @@
           <a:p>
             <a:r>
               <a:rPr lang="en-US" dirty="0"/>
-              <a:t>If asked why recall cannot fall below the groundability rate: it is insensitive to ranking quality by construction. The load-bearing number for synthesis is the 80.7% unique-resolution rate. Also note the counters are not mutually exclusive — the miner enumerates multiple candidate spans, so the per-episode window failures and the per-slot counts have different denominators, and both are reported.</a:t>
+              <a:t>The worked example is the paper's Figure 2. One varying literal is enough to retire the three-read region; the compiler emits the maximal justified prefix and leaves the rest to the agent.</a:t>
             </a:r>
           </a:p>
         </p:txBody>
@@ -2009,7 +1747,7 @@
           <a:p>
             <a:r>
               <a:rPr lang="en-US" dirty="0"/>
-              <a:t>Making the two coarse terms faithful would reorder candidates and therefore require re-running the offline study, so the paper lists it as future work instead of describing semantics the code does not enforce. That is the kind of disclosure worth pointing at in a seminar.</a:t>
+              <a:t>The two coarse terms affect ranking only, never admission. The worked example uses the PR-outcome audit, where the measured 75.0% equals the ceiling.</a:t>
             </a:r>
           </a:p>
         </p:txBody>
@@ -2096,7 +1834,7 @@
           <a:p>
             <a:r>
               <a:rPr lang="en-US" dirty="0"/>
-              <a:t>This is one of the two places a reviewer will push hardest. The strongest live result was never adversarially challenged; it passed replay, not perturbation.</a:t>
+              <a:t>This is where a reviewer pushes hardest. The guards are candidate invariants, and under tool-layer corruption their measured protective value was null or adverse.</a:t>
             </a:r>
           </a:p>
         </p:txBody>
@@ -2183,7 +1921,7 @@
           <a:p>
             <a:r>
               <a:rPr lang="en-US" dirty="0"/>
-              <a:t>Say the sharp version out loud: zero violations in 92 groups should be read as self-consistency, not as correctness. Algorithm 3's alpha bounds contract violation, never bounding error.</a:t>
+              <a:t>Say the sharp version out loud: on 92-group pools the gate can certify only full coverage, so these certificates are support-sufficiency statements. One post-cutoff cohort carries an end-to-end certificate.</a:t>
             </a:r>
           </a:p>
         </p:txBody>
@@ -2357,7 +2095,7 @@
           <a:p>
             <a:r>
               <a:rPr lang="en-US" dirty="0"/>
-              <a:t>Sections 4 and 5. The hypotheses were fixed internally before the sealed test was scored, but the study was not externally preregistered — state that plainly.</a:t>
+              <a:t>Sections 4 and 5. The evidence is three GitHub families on one snapshot, newer records, one fresh cohort, and three public benchmarks, two of which show no measured benefit.</a:t>
             </a:r>
           </a:p>
         </p:txBody>
@@ -2444,7 +2182,7 @@
           <a:p>
             <a:r>
               <a:rPr lang="en-US" dirty="0"/>
-              <a:t>Tier separation is the methodological point: no tier is asked to license a claim it cannot support. Tier 1 cannot speak to live efficiency; Tier 3 cannot speak to real-world data; only Tier 2 does both, on one domain.</a:t>
+              <a:t>Every comparison is paired on the same records, model, and grader. The hand-written program is the pessimistic comparator: it is written by someone who already knows the workflow.</a:t>
             </a:r>
           </a:p>
         </p:txBody>
@@ -2531,7 +2269,7 @@
           <a:p>
             <a:r>
               <a:rPr lang="en-US" dirty="0"/>
-              <a:t>Two properties bound how far this path generalizes: the split tests held-out windows rather than robustness to a shifted distribution, and the development partition it allocates is reported but not consumed. It is an executable structural benchmark, not end-to-end validation of the deployed gate.</a:t>
+              <a:t>Two different reasons for no benefit. NESTFUL is a corpus-size fact: no family reaches the floor. AppWorld is a dispatch fact: the admitted program sits behind a documentation read that most agent designs make first.</a:t>
             </a:r>
           </a:p>
         </p:txBody>
@@ -2618,7 +2356,7 @@
           <a:p>
             <a:r>
               <a:rPr lang="en-US" dirty="0"/>
-              <a:t>The tool-call bar is the honest one: the compiler keeps all three reads. It removes model-mediated decisions, not evidence acquisition. The macro removes reads because a human redesigned the application interface.</a:t>
+              <a:t>The tool-call bar is the honest one: the compiler keeps all three reads in this family and removes model decisions, not evidence acquisition. The hand-written program removes reads because a human designed it.</a:t>
             </a:r>
           </a:p>
         </p:txBody>
@@ -2705,7 +2443,7 @@
           <a:p>
             <a:r>
               <a:rPr lang="en-US" dirty="0"/>
-              <a:t>Both audited oracle corrections are retained in the artifact. In the earlier run the corrected eligibility rule would swap one discovery trace, but the evaluated artifact remains the one actually executed — they do not retrain post hoc and do not assume the two artifacts are equivalent.</a:t>
+              <a:t>This is the paper's introduction in one slide. Recurrence alone would have shipped the three-read program; groundability retires it, and the earlier study shows why: clean replays do not certify the answer.</a:t>
             </a:r>
           </a:p>
         </p:txBody>
@@ -2879,7 +2617,7 @@
           <a:p>
             <a:r>
               <a:rPr lang="en-US" dirty="0"/>
-              <a:t>Consistent with the prompt-caching literature rather than a new discovery. What is new here is the same effect arising from turn removal and route fragmentation rather than from compression — and the consequence that a workflow optimizer's objective must price prefix reuse.</a:t>
+              <a:t>The open-class abstentions are the verifier working as designed on an unseen class, not a failure. The post-cutoff cohort is the only place the paper certifies the end-to-end event.</a:t>
             </a:r>
           </a:p>
         </p:txBody>
@@ -2966,7 +2704,7 @@
           <a:p>
             <a:r>
               <a:rPr lang="en-US" dirty="0"/>
-              <a:t>The paper does not claim GAC dominates ordinary engineering. It establishes the structural facts behind the hypothesis but does not measure engineering effort, drift response, or the cross-workflow break-even. AWO, AWM, LLMCompiler, FlowCompile and plan caching were not re-implemented.</a:t>
+              <a:t>The paper does not claim GAC dominates ordinary engineering. Hand-written programs written with full knowledge tie or win on most axes; GAC's value claim is discovering and admitting such programs automatically.</a:t>
             </a:r>
           </a:p>
         </p:txBody>
@@ -2989,93 +2727,6 @@
             <a:fld id="{F7021451-1387-4CA6-816F-3879F97B5CBC}" type="slidenum">
               <a:rPr lang="en-US"/>
               <a:t>21</a:t>
-            </a:fld>
-            <a:endParaRPr lang="en-US"/>
-          </a:p>
-        </p:txBody>
-      </p:sp>
-    </p:spTree>
-    <p:extLst>
-      <p:ext uri="{BB962C8B-B14F-4D97-AF65-F5344CB8AC3E}">
-        <p14:creationId xmlns:p14="http://schemas.microsoft.com/office/powerpoint/2010/main" val="1024086991"/>
-      </p:ext>
-    </p:extLst>
-  </p:cSld>
-  <p:clrMapOvr>
-    <a:masterClrMapping/>
-  </p:clrMapOvr>
-</p:notes>
-</file>
-
-<file path=ppt/notesSlides/notesSlide22.xml><?xml version="1.0" encoding="utf-8"?>
-<p:notes xmlns:a="http://schemas.openxmlformats.org/drawingml/2006/main" xmlns:r="http://schemas.openxmlformats.org/officeDocument/2006/relationships" xmlns:p="http://schemas.openxmlformats.org/presentationml/2006/main">
-  <p:cSld>
-    <p:spTree>
-      <p:nvGrpSpPr>
-        <p:cNvPr id="1" name=""/>
-        <p:cNvGrpSpPr/>
-        <p:nvPr/>
-      </p:nvGrpSpPr>
-      <p:grpSpPr>
-        <a:xfrm>
-          <a:off x="0" y="0"/>
-          <a:ext cx="0" cy="0"/>
-          <a:chOff x="0" y="0"/>
-          <a:chExt cx="0" cy="0"/>
-        </a:xfrm>
-      </p:grpSpPr>
-      <p:sp>
-        <p:nvSpPr>
-          <p:cNvPr id="2" name="Slide Image Placeholder 1"/>
-          <p:cNvSpPr>
-            <a:spLocks noGrp="1" noRot="1" noChangeAspect="1"/>
-          </p:cNvSpPr>
-          <p:nvPr>
-            <p:ph type="sldImg"/>
-          </p:nvPr>
-        </p:nvSpPr>
-        <p:spPr/>
-      </p:sp>
-      <p:sp>
-        <p:nvSpPr>
-          <p:cNvPr id="3" name="Notes Placeholder 2"/>
-          <p:cNvSpPr>
-            <a:spLocks noGrp="1"/>
-          </p:cNvSpPr>
-          <p:nvPr>
-            <p:ph type="body" idx="1"/>
-          </p:nvPr>
-        </p:nvSpPr>
-        <p:spPr/>
-        <p:txBody>
-          <a:bodyPr/>
-          <a:lstStyle/>
-          <a:p>
-            <a:r>
-              <a:rPr lang="en-US" dirty="0"/>
-              <a:t>The design's value is its ordering: store the decision, hash the calibration file, then draw the twelve previously unused issues. Paired Wilcoxon p = 0.000488 for tokens, latency and cost. But one family cannot distinguish the selection rule from always choosing its macro.</a:t>
-            </a:r>
-          </a:p>
-        </p:txBody>
-      </p:sp>
-      <p:sp>
-        <p:nvSpPr>
-          <p:cNvPr id="4" name="Slide Number Placeholder 3"/>
-          <p:cNvSpPr>
-            <a:spLocks noGrp="1"/>
-          </p:cNvSpPr>
-          <p:nvPr>
-            <p:ph type="sldNum" sz="quarter" idx="10"/>
-          </p:nvPr>
-        </p:nvSpPr>
-        <p:spPr/>
-        <p:txBody>
-          <a:bodyPr/>
-          <a:lstStyle/>
-          <a:p>
-            <a:fld id="{F7021451-1387-4CA6-816F-3879F97B5CBC}" type="slidenum">
-              <a:rPr lang="en-US"/>
-              <a:t>22</a:t>
             </a:fld>
             <a:endParaRPr lang="en-US"/>
           </a:p>
@@ -3140,7 +2791,7 @@
           <a:p>
             <a:r>
               <a:rPr lang="en-US" dirty="0"/>
-              <a:t>Two honest routes out of the gate problem, both named in the paper: build a development set containing genuine unproductive outcomes and publish a risk–coverage curve at several alpha, or replace the learned score with an explicitly one-class construction — distance-to-hull, or a conformal nonconformity measure over entry features — and describe it as such.</a:t>
+              <a:t>Read the gate result carefully: the step at 0.14 is the sample-size floor, not a learned risk ranking. The amended 184-group study was the attempt to buy a frontier, and it retired.</a:t>
             </a:r>
           </a:p>
         </p:txBody>
@@ -3227,7 +2878,7 @@
           <a:p>
             <a:r>
               <a:rPr lang="en-US" dirty="0"/>
-              <a:t>If a reviewer wants one slide to judge the paper's honesty, this is it. Two distinctions the paper is careful about and this table preserves: C8 is not evaluated rather than refuted — the extractive oracle simply cannot see fabrication — and C12 is a capability the shipped API does not have rather than a claim that failed. C10 and C11 are verified but scoped: one is a provider-free counterfactual, the other holds on a single workflow family.</a:t>
+              <a:t>If a reviewer wants one slide to judge the paper's honesty, this is it. Every supported claim carries its scope, and the five unsupported claims stay in the register.</a:t>
             </a:r>
           </a:p>
         </p:txBody>
@@ -3314,7 +2965,7 @@
           <a:p>
             <a:r>
               <a:rPr lang="en-US" dirty="0"/>
-              <a:t>Closing line from the paper: together with the failed suffix pilot, the evidence argues for a specific design principle — an agent optimizer should be judged not only by what it compresses, but by whether it can explain and enforce when it must not compile.</a:t>
+              <a:t>Closing line from the paper: compile only what is justified, and keep the model's reasoning everywhere else. Judge such optimizers by evidence, refusals, and fallback, not by turns removed.</a:t>
             </a:r>
           </a:p>
         </p:txBody>
@@ -3337,6 +2988,180 @@
             <a:fld id="{F7021451-1387-4CA6-816F-3879F97B5CBC}" type="slidenum">
               <a:rPr lang="en-US"/>
               <a:t>25</a:t>
+            </a:fld>
+            <a:endParaRPr lang="en-US"/>
+          </a:p>
+        </p:txBody>
+      </p:sp>
+    </p:spTree>
+    <p:extLst>
+      <p:ext uri="{BB962C8B-B14F-4D97-AF65-F5344CB8AC3E}">
+        <p14:creationId xmlns:p14="http://schemas.microsoft.com/office/powerpoint/2010/main" val="1024086991"/>
+      </p:ext>
+    </p:extLst>
+  </p:cSld>
+  <p:clrMapOvr>
+    <a:masterClrMapping/>
+  </p:clrMapOvr>
+</p:notes>
+</file>
+
+<file path=ppt/notesSlides/notesSlide26.xml><?xml version="1.0" encoding="utf-8"?>
+<p:notes xmlns:a="http://schemas.openxmlformats.org/drawingml/2006/main" xmlns:r="http://schemas.openxmlformats.org/officeDocument/2006/relationships" xmlns:p="http://schemas.openxmlformats.org/presentationml/2006/main">
+  <p:cSld>
+    <p:spTree>
+      <p:nvGrpSpPr>
+        <p:cNvPr id="1" name=""/>
+        <p:cNvGrpSpPr/>
+        <p:nvPr/>
+      </p:nvGrpSpPr>
+      <p:grpSpPr>
+        <a:xfrm>
+          <a:off x="0" y="0"/>
+          <a:ext cx="0" cy="0"/>
+          <a:chOff x="0" y="0"/>
+          <a:chExt cx="0" cy="0"/>
+        </a:xfrm>
+      </p:grpSpPr>
+      <p:sp>
+        <p:nvSpPr>
+          <p:cNvPr id="2" name="Slide Image Placeholder 1"/>
+          <p:cNvSpPr>
+            <a:spLocks noGrp="1" noRot="1" noChangeAspect="1"/>
+          </p:cNvSpPr>
+          <p:nvPr>
+            <p:ph type="sldImg"/>
+          </p:nvPr>
+        </p:nvSpPr>
+        <p:spPr/>
+      </p:sp>
+      <p:sp>
+        <p:nvSpPr>
+          <p:cNvPr id="3" name="Notes Placeholder 2"/>
+          <p:cNvSpPr>
+            <a:spLocks noGrp="1"/>
+          </p:cNvSpPr>
+          <p:nvPr>
+            <p:ph type="body" idx="1"/>
+          </p:nvPr>
+        </p:nvSpPr>
+        <p:spPr/>
+        <p:txBody>
+          <a:bodyPr/>
+          <a:lstStyle/>
+          <a:p>
+            <a:r>
+              <a:rPr lang="en-US" dirty="0"/>
+              <a:t>BIRD is the public-benchmark result. The same compiler that refuses the standard agent compiles the schema-first one, because only the latter runs a fixed opening. Quality differences are inside the interval; the paper claims no detected loss, not equivalence.</a:t>
+            </a:r>
+          </a:p>
+        </p:txBody>
+      </p:sp>
+      <p:sp>
+        <p:nvSpPr>
+          <p:cNvPr id="4" name="Slide Number Placeholder 3"/>
+          <p:cNvSpPr>
+            <a:spLocks noGrp="1"/>
+          </p:cNvSpPr>
+          <p:nvPr>
+            <p:ph type="sldNum" sz="quarter" idx="10"/>
+          </p:nvPr>
+        </p:nvSpPr>
+        <p:spPr/>
+        <p:txBody>
+          <a:bodyPr/>
+          <a:lstStyle/>
+          <a:p>
+            <a:fld id="{F7021451-1387-4CA6-816F-3879F97B5CBC}" type="slidenum">
+              <a:rPr lang="en-US"/>
+              <a:t>19</a:t>
+            </a:fld>
+            <a:endParaRPr lang="en-US"/>
+          </a:p>
+        </p:txBody>
+      </p:sp>
+    </p:spTree>
+    <p:extLst>
+      <p:ext uri="{BB962C8B-B14F-4D97-AF65-F5344CB8AC3E}">
+        <p14:creationId xmlns:p14="http://schemas.microsoft.com/office/powerpoint/2010/main" val="1024086991"/>
+      </p:ext>
+    </p:extLst>
+  </p:cSld>
+  <p:clrMapOvr>
+    <a:masterClrMapping/>
+  </p:clrMapOvr>
+</p:notes>
+</file>
+
+<file path=ppt/notesSlides/notesSlide27.xml><?xml version="1.0" encoding="utf-8"?>
+<p:notes xmlns:a="http://schemas.openxmlformats.org/drawingml/2006/main" xmlns:r="http://schemas.openxmlformats.org/officeDocument/2006/relationships" xmlns:p="http://schemas.openxmlformats.org/presentationml/2006/main">
+  <p:cSld>
+    <p:spTree>
+      <p:nvGrpSpPr>
+        <p:cNvPr id="1" name=""/>
+        <p:cNvGrpSpPr/>
+        <p:nvPr/>
+      </p:nvGrpSpPr>
+      <p:grpSpPr>
+        <a:xfrm>
+          <a:off x="0" y="0"/>
+          <a:ext cx="0" cy="0"/>
+          <a:chOff x="0" y="0"/>
+          <a:chExt cx="0" cy="0"/>
+        </a:xfrm>
+      </p:grpSpPr>
+      <p:sp>
+        <p:nvSpPr>
+          <p:cNvPr id="2" name="Slide Image Placeholder 1"/>
+          <p:cNvSpPr>
+            <a:spLocks noGrp="1" noRot="1" noChangeAspect="1"/>
+          </p:cNvSpPr>
+          <p:nvPr>
+            <p:ph type="sldImg"/>
+          </p:nvPr>
+        </p:nvSpPr>
+        <p:spPr/>
+      </p:sp>
+      <p:sp>
+        <p:nvSpPr>
+          <p:cNvPr id="3" name="Notes Placeholder 2"/>
+          <p:cNvSpPr>
+            <a:spLocks noGrp="1"/>
+          </p:cNvSpPr>
+          <p:nvPr>
+            <p:ph type="body" idx="1"/>
+          </p:nvPr>
+        </p:nvSpPr>
+        <p:spPr/>
+        <p:txBody>
+          <a:bodyPr/>
+          <a:lstStyle/>
+          <a:p>
+            <a:r>
+              <a:rPr lang="en-US" dirty="0"/>
+              <a:t>Separate the two certificate kinds. The primary ones confirm enough examples on an event without support; the post-cutoff one bounds the end-to-end task contract for one family and two pull-request classes.</a:t>
+            </a:r>
+          </a:p>
+        </p:txBody>
+      </p:sp>
+      <p:sp>
+        <p:nvSpPr>
+          <p:cNvPr id="4" name="Slide Number Placeholder 3"/>
+          <p:cNvSpPr>
+            <a:spLocks noGrp="1"/>
+          </p:cNvSpPr>
+          <p:nvPr>
+            <p:ph type="sldNum" sz="quarter" idx="10"/>
+          </p:nvPr>
+        </p:nvSpPr>
+        <p:spPr/>
+        <p:txBody>
+          <a:bodyPr/>
+          <a:lstStyle/>
+          <a:p>
+            <a:fld id="{F7021451-1387-4CA6-816F-3879F97B5CBC}" type="slidenum">
+              <a:rPr lang="en-US"/>
+              <a:t>19</a:t>
             </a:fld>
             <a:endParaRPr lang="en-US"/>
           </a:p>
@@ -3488,7 +3313,7 @@
           <a:p>
             <a:r>
               <a:rPr lang="en-US" dirty="0"/>
-              <a:t>RQ3 and RQ4 are the unusual questions. Most workflow-optimization papers report what their system compresses; this one also asks what it must decline and what remains broken afterwards.</a:t>
+              <a:t>Q4 and Q5 are the unusual questions. Most workflow-optimization papers report what their system compresses; this one also asks what it must decline, and what its guarantees actually cover.</a:t>
             </a:r>
           </a:p>
         </p:txBody>
@@ -3662,7 +3487,7 @@
           <a:p>
             <a:r>
               <a:rPr lang="en-US" dirty="0"/>
-              <a:t>The first live pilot compiled suffix-only regions even though the runtime resolves only at entry. It dispatched label and comment reads before their intended position, duplicated or reordered tools, and achieved 16.7% task and tool-contract validity while still reducing requests. The pilot is archived rather than deleted, and a golden-trace regression test now rejects an otherwise eligible suffix.</a:t>
+              <a:t>The archived pilot compiled suffix-only regions even though the runtime resolves only at entry. It dispatched label and comment reads before their intended position and duplicated or reordered tools. It is kept as the empirical case for the position invariant. Note the grounding rule now admits invariant literals, which is how the limit=3 slots of two artifacts are bound.</a:t>
             </a:r>
           </a:p>
         </p:txBody>
@@ -3749,7 +3574,7 @@
           <a:p>
             <a:r>
               <a:rPr lang="en-US" dirty="0"/>
-              <a:t>Worth stating plainly in a seminar: the paper marks its own optimality gap. Reading the effect exposure from the catalog rather than from a naming convention, and evaluating all admissible families before selecting, are both listed as future work rather than described as implemented semantics.</a:t>
+              <a:t>Worth stating plainly: the paper marks its own optimality gap. Equation (4) is a target; the implementation calibrates a bounded ranked set. And only one certificate in the paper bounds the end-to-end event.</a:t>
             </a:r>
           </a:p>
         </p:txBody>
@@ -4470,7 +4295,7 @@
               <a:buNone/>
             </a:pPr>
             <a:r>
-              <a:rPr lang="en-US" sz="3600" b="1" dirty="0">
+              <a:rPr lang="en-US" sz="3000" b="1" dirty="0">
                 <a:solidFill>
                   <a:srgbClr val="FFFFFF"/>
                 </a:solidFill>
@@ -4478,9 +4303,9 @@
                 <a:ea typeface="Cambria" pitchFamily="34" charset="-122"/>
                 <a:cs typeface="Cambria" pitchFamily="34" charset="-120"/>
               </a:rPr>
-              <a:t>Compiling Recurrent Agent Workflows into Guarded Programs</a:t>
-            </a:r>
-            <a:endParaRPr lang="en-US" sz="3600" dirty="0"/>
+              <a:t>From Traces to Guarded Programs: Evidence-Gated Compilation of Recurrent Agent Workflows</a:t>
+            </a:r>
+            <a:endParaRPr lang="en-US" sz="3000" dirty="0"/>
           </a:p>
         </p:txBody>
       </p:sp>
@@ -4520,7 +4345,7 @@
                 <a:ea typeface="Calibri" pitchFamily="34" charset="-122"/>
                 <a:cs typeface="Calibri" pitchFamily="34" charset="-120"/>
               </a:rPr>
-              <a:t>Guarded agentic compaction. </a:t>
+              <a:t>Guarded agentic compaction.</a:t>
             </a:r>
             <a:r>
               <a:rPr lang="en-US" sz="1450" dirty="0">
@@ -4531,7 +4356,7 @@
                 <a:ea typeface="Calibri" pitchFamily="34" charset="-122"/>
                 <a:cs typeface="Calibri" pitchFamily="34" charset="-120"/>
               </a:rPr>
-              <a:t>Traces establish recurrence, not admissibility. We specify the evidence a compiler needs, the barriers it must respect, and four negative results.</a:t>
+              <a:t> Recurrence proposes a candidate; evidence decides whether it compiles. Every stage can refuse, and the default output is the unchanged agent.</a:t>
             </a:r>
             <a:endParaRPr lang="en-US" sz="1450" dirty="0"/>
           </a:p>
@@ -4600,7 +4425,7 @@
                 <a:ea typeface="Cambria" pitchFamily="34" charset="-122"/>
                 <a:cs typeface="Cambria" pitchFamily="34" charset="-120"/>
               </a:rPr>
-              <a:t>NESTFUL</a:t>
+              <a:t>GitHub</a:t>
             </a:r>
             <a:endParaRPr lang="en-US" sz="1300" dirty="0"/>
           </a:p>
@@ -4642,7 +4467,7 @@
                 <a:ea typeface="Calibri" pitchFamily="34" charset="-122"/>
                 <a:cs typeface="Calibri" pitchFamily="34" charset="-120"/>
               </a:rPr>
-              <a:t>1,415 executable episodes</a:t>
+              <a:t>3 workflow families,</a:t>
             </a:r>
             <a:endParaRPr lang="en-US" sz="1050" dirty="0"/>
           </a:p>
@@ -4662,7 +4487,7 @@
                 <a:ea typeface="Calibri" pitchFamily="34" charset="-122"/>
                 <a:cs typeface="Calibri" pitchFamily="34" charset="-120"/>
               </a:rPr>
-              <a:t>provider-free</a:t>
+              <a:t>90/90 held-out contracts</a:t>
             </a:r>
             <a:endParaRPr lang="en-US" sz="1050" dirty="0"/>
           </a:p>
@@ -4701,7 +4526,7 @@
                 <a:ea typeface="Cambria" pitchFamily="34" charset="-122"/>
                 <a:cs typeface="Cambria" pitchFamily="34" charset="-120"/>
               </a:rPr>
-              <a:t>GitHub</a:t>
+              <a:t>BIRD</a:t>
             </a:r>
             <a:endParaRPr lang="en-US" sz="1300" dirty="0"/>
           </a:p>
@@ -4743,7 +4568,7 @@
                 <a:ea typeface="Calibri" pitchFamily="34" charset="-122"/>
                 <a:cs typeface="Calibri" pitchFamily="34" charset="-120"/>
               </a:rPr>
-              <a:t>4 live protocols on a</a:t>
+              <a:t>26 of 31 databases compiled,</a:t>
             </a:r>
             <a:endParaRPr lang="en-US" sz="1050" dirty="0"/>
           </a:p>
@@ -4763,7 +4588,7 @@
                 <a:ea typeface="Calibri" pitchFamily="34" charset="-122"/>
                 <a:cs typeface="Calibri" pitchFamily="34" charset="-120"/>
               </a:rPr>
-              <a:t>pinned public snapshot</a:t>
+              <a:t>45–50% fewer model calls</a:t>
             </a:r>
             <a:endParaRPr lang="en-US" sz="1050" dirty="0"/>
           </a:p>
@@ -4802,7 +4627,7 @@
                 <a:ea typeface="Cambria" pitchFamily="34" charset="-122"/>
                 <a:cs typeface="Cambria" pitchFamily="34" charset="-120"/>
               </a:rPr>
-              <a:t>Demo suite</a:t>
+              <a:t>NESTFUL  ·  AppWorld</a:t>
             </a:r>
             <a:endParaRPr lang="en-US" sz="1300" dirty="0"/>
           </a:p>
@@ -4844,7 +4669,7 @@
                 <a:ea typeface="Calibri" pitchFamily="34" charset="-122"/>
                 <a:cs typeface="Calibri" pitchFamily="34" charset="-120"/>
               </a:rPr>
-              <a:t>6 workflow shapes,</a:t>
+              <a:t>two public benchmarks,</a:t>
             </a:r>
             <a:endParaRPr lang="en-US" sz="1050" dirty="0"/>
           </a:p>
@@ -4864,7 +4689,7 @@
                 <a:ea typeface="Calibri" pitchFamily="34" charset="-122"/>
                 <a:cs typeface="Calibri" pitchFamily="34" charset="-120"/>
               </a:rPr>
-              <a:t>3 negative controls</a:t>
+              <a:t>no measured benefit</a:t>
             </a:r>
             <a:endParaRPr lang="en-US" sz="1050" dirty="0"/>
           </a:p>
@@ -4903,7 +4728,7 @@
                 <a:ea typeface="Calibri" pitchFamily="34" charset="-122"/>
                 <a:cs typeface="Calibri" pitchFamily="34" charset="-120"/>
               </a:rPr>
-              <a:t>Seminar presentation  ·  prepared by JazzX AI  ·  August 2026</a:t>
+              <a:t>Seminar presentation  ·  prepared by JazzX AI  ·  October 2026</a:t>
             </a:r>
             <a:endParaRPr lang="en-US" sz="1050" dirty="0"/>
           </a:p>
@@ -5053,7 +4878,7 @@
                 <a:ea typeface="Calibri" pitchFamily="34" charset="-122"/>
                 <a:cs typeface="Calibri" pitchFamily="34" charset="-120"/>
               </a:rPr>
-              <a:t>METHOD  ·  ALGORITHM 2 (BUILDPATG)</a:t>
+              <a:t>METHOD  ·  STAGE 1  ·  ALGORITHM 3 (BUILDPATG)</a:t>
             </a:r>
             <a:endParaRPr lang="en-US" sz="1050" dirty="0"/>
           </a:p>
@@ -5134,7 +4959,7 @@
                 <a:ea typeface="Calibri" pitchFamily="34" charset="-122"/>
                 <a:cs typeface="Calibri" pitchFamily="34" charset="-120"/>
               </a:rPr>
-              <a:t>For each call-argument slot the program-argument trace graph searches entry-state and prior-result paths for typed values and bounded transforms. Exact matches, stable field paths, and transformations in ℒ become candidate producer edges; literal-only slots are restricted to identity or constant witnesses, so a page index or limit is never reconstructed.</a:t>
+              <a:t>For each call-argument slot the program-argument trace graph searches entry-state and prior-result paths for typed values reachable by a bounded transform in ℒ. A literal invariant across every supporting trace is also a witness; a repeated tool name or a successful replay is not.</a:t>
             </a:r>
             <a:endParaRPr lang="en-US" sz="1250" dirty="0"/>
           </a:p>
@@ -5517,7 +5342,7 @@
                 <a:ea typeface="Cambria" pitchFamily="34" charset="-122"/>
                 <a:cs typeface="Cambria" pitchFamily="34" charset="-120"/>
               </a:rPr>
-              <a:t>H = ∅</a:t>
+              <a:t>|H| = 0</a:t>
             </a:r>
             <a:endParaRPr lang="en-US" sz="1300" dirty="0"/>
           </a:p>
@@ -5830,7 +5655,7 @@
                 <a:ea typeface="Calibri" pitchFamily="34" charset="-122"/>
                 <a:cs typeface="Calibri" pitchFamily="34" charset="-120"/>
               </a:rPr>
-              <a:t>Above the configured cap. Blocked rather than defaulting to the cheapest explanation.</a:t>
+              <a:t>More than κ = 3 witnesses. Blocked rather than defaulting to the cheapest explanation.</a:t>
             </a:r>
             <a:endParaRPr lang="en-US" sz="1100" dirty="0"/>
           </a:p>
@@ -5956,7 +5781,7 @@
                 <a:ea typeface="Calibri" pitchFamily="34" charset="-122"/>
                 <a:cs typeface="Calibri" pitchFamily="34" charset="-120"/>
               </a:rPr>
-              <a:t>MEASURED ON NESTFUL — 5,746 DEPENDENCY SLOTS ACROSS 1,415 EXECUTABLE EPISODES</a:t>
+              <a:t>WORKED EXAMPLE — HELD-OUT ISSUE #4420 (FIGURE 2)</a:t>
             </a:r>
             <a:endParaRPr lang="en-US" sz="1050" dirty="0"/>
           </a:p>
@@ -6036,7 +5861,7 @@
                 <a:ea typeface="Cambria" pitchFamily="34" charset="-122"/>
                 <a:cs typeface="Cambria" pitchFamily="34" charset="-120"/>
               </a:rPr>
-              <a:t>5,531</a:t>
+              <a:t>2 / 2</a:t>
             </a:r>
             <a:endParaRPr lang="en-US" sz="1900" dirty="0"/>
           </a:p>
@@ -6075,7 +5900,7 @@
                 <a:ea typeface="Calibri" pitchFamily="34" charset="-122"/>
                 <a:cs typeface="Calibri" pitchFamily="34" charset="-120"/>
               </a:rPr>
-              <a:t>in candidate set</a:t>
+              <a:t>issue_number slots</a:t>
             </a:r>
             <a:endParaRPr lang="en-US" sz="1000" dirty="0"/>
           </a:p>
@@ -6117,7 +5942,7 @@
                 <a:ea typeface="Calibri" pitchFamily="34" charset="-122"/>
                 <a:cs typeface="Calibri" pitchFamily="34" charset="-120"/>
               </a:rPr>
-              <a:t>96.3% recall</a:t>
+              <a:t>witnessed by entry or record</a:t>
             </a:r>
             <a:endParaRPr lang="en-US" sz="950" dirty="0"/>
           </a:p>
@@ -6197,7 +6022,7 @@
                 <a:ea typeface="Cambria" pitchFamily="34" charset="-122"/>
                 <a:cs typeface="Cambria" pitchFamily="34" charset="-120"/>
               </a:rPr>
-              <a:t>4,636</a:t>
+              <a:t>none</a:t>
             </a:r>
             <a:endParaRPr lang="en-US" sz="1900" dirty="0"/>
           </a:p>
@@ -6236,7 +6061,7 @@
                 <a:ea typeface="Calibri" pitchFamily="34" charset="-122"/>
                 <a:cs typeface="Calibri" pitchFamily="34" charset="-120"/>
               </a:rPr>
-              <a:t>uniquely resolved</a:t>
+              <a:t>comments.limit</a:t>
             </a:r>
             <a:endParaRPr lang="en-US" sz="1000" dirty="0"/>
           </a:p>
@@ -6278,7 +6103,7 @@
                 <a:ea typeface="Calibri" pitchFamily="34" charset="-122"/>
                 <a:cs typeface="Calibri" pitchFamily="34" charset="-120"/>
               </a:rPr>
-              <a:t>80.7%</a:t>
+              <a:t>100 in 130 traces, 1 in two</a:t>
             </a:r>
             <a:endParaRPr lang="en-US" sz="950" dirty="0"/>
           </a:p>
@@ -6358,7 +6183,7 @@
                 <a:ea typeface="Cambria" pitchFamily="34" charset="-122"/>
                 <a:cs typeface="Cambria" pitchFamily="34" charset="-120"/>
               </a:rPr>
-              <a:t>895</a:t>
+              <a:t>3 → 2</a:t>
             </a:r>
             <a:endParaRPr lang="en-US" sz="1900" dirty="0"/>
           </a:p>
@@ -6397,7 +6222,7 @@
                 <a:ea typeface="Calibri" pitchFamily="34" charset="-122"/>
                 <a:cs typeface="Calibri" pitchFamily="34" charset="-120"/>
               </a:rPr>
-              <a:t>ambiguous</a:t>
+              <a:t>reads emitted</a:t>
             </a:r>
             <a:endParaRPr lang="en-US" sz="1000" dirty="0"/>
           </a:p>
@@ -6439,7 +6264,7 @@
                 <a:ea typeface="Calibri" pitchFamily="34" charset="-122"/>
                 <a:cs typeface="Calibri" pitchFamily="34" charset="-120"/>
               </a:rPr>
-              <a:t>truth among many, 15.6%</a:t>
+              <a:t>three-read region retires</a:t>
             </a:r>
             <a:endParaRPr lang="en-US" sz="950" dirty="0"/>
           </a:p>
@@ -6519,7 +6344,7 @@
                 <a:ea typeface="Cambria" pitchFamily="34" charset="-122"/>
                 <a:cs typeface="Cambria" pitchFamily="34" charset="-120"/>
               </a:rPr>
-              <a:t>215</a:t>
+              <a:t>132</a:t>
             </a:r>
             <a:endParaRPr lang="en-US" sz="1900" dirty="0"/>
           </a:p>
@@ -6558,7 +6383,7 @@
                 <a:ea typeface="Calibri" pitchFamily="34" charset="-122"/>
                 <a:cs typeface="Calibri" pitchFamily="34" charset="-120"/>
               </a:rPr>
-              <a:t>no candidate</a:t>
+              <a:t>discovery traces</a:t>
             </a:r>
             <a:endParaRPr lang="en-US" sz="1000" dirty="0"/>
           </a:p>
@@ -6600,7 +6425,7 @@
                 <a:ea typeface="Calibri" pitchFamily="34" charset="-122"/>
                 <a:cs typeface="Calibri" pitchFamily="34" charset="-120"/>
               </a:rPr>
-              <a:t>3.7%</a:t>
+              <a:t>all take the three-read route</a:t>
             </a:r>
             <a:endParaRPr lang="en-US" sz="950" dirty="0"/>
           </a:p>
@@ -6680,7 +6505,7 @@
                 <a:ea typeface="Cambria" pitchFamily="34" charset="-122"/>
                 <a:cs typeface="Cambria" pitchFamily="34" charset="-120"/>
               </a:rPr>
-              <a:t>84.3%</a:t>
+              <a:t>92 / 92</a:t>
             </a:r>
             <a:endParaRPr lang="en-US" sz="1900" dirty="0"/>
           </a:p>
@@ -6719,7 +6544,7 @@
                 <a:ea typeface="Calibri" pitchFamily="34" charset="-122"/>
                 <a:cs typeface="Calibri" pitchFamily="34" charset="-120"/>
               </a:rPr>
-              <a:t>edge precision</a:t>
+              <a:t>calibration groups</a:t>
             </a:r>
             <a:endParaRPr lang="en-US" sz="1000" dirty="0"/>
           </a:p>
@@ -6761,7 +6586,7 @@
                 <a:ea typeface="Calibri" pitchFamily="34" charset="-122"/>
                 <a:cs typeface="Calibri" pitchFamily="34" charset="-120"/>
               </a:rPr>
-              <a:t>5,531 / 6,564</a:t>
+              <a:t>two-read prefix admitted</a:t>
             </a:r>
             <a:endParaRPr lang="en-US" sz="950" dirty="0"/>
           </a:p>
@@ -6841,7 +6666,7 @@
                 <a:ea typeface="Cambria" pitchFamily="34" charset="-122"/>
                 <a:cs typeface="Cambria" pitchFamily="34" charset="-120"/>
               </a:rPr>
-              <a:t>85.3%</a:t>
+              <a:t>0.0498</a:t>
             </a:r>
             <a:endParaRPr lang="en-US" sz="1900" dirty="0"/>
           </a:p>
@@ -6880,7 +6705,7 @@
                 <a:ea typeface="Calibri" pitchFamily="34" charset="-122"/>
                 <a:cs typeface="Calibri" pitchFamily="34" charset="-120"/>
               </a:rPr>
-              <a:t>complete windows</a:t>
+              <a:t>upper bound</a:t>
             </a:r>
             <a:endParaRPr lang="en-US" sz="1000" dirty="0"/>
           </a:p>
@@ -6922,7 +6747,7 @@
                 <a:ea typeface="Calibri" pitchFamily="34" charset="-122"/>
                 <a:cs typeface="Calibri" pitchFamily="34" charset="-120"/>
               </a:rPr>
-              <a:t>1,207 / 1,415 episodes</a:t>
+              <a:t>against α = 0.05</a:t>
             </a:r>
             <a:endParaRPr lang="en-US" sz="950" dirty="0"/>
           </a:p>
@@ -6964,7 +6789,7 @@
                 <a:ea typeface="Calibri" pitchFamily="34" charset="-122"/>
                 <a:cs typeface="Calibri" pitchFamily="34" charset="-120"/>
               </a:rPr>
-              <a:t>H1 was pre-specified as recovery above 90%: supported on recall, not supported on unique resolution — and we report both. Recall here measures search reachability and is close to definitional: candidates are generated by value matching, so no non-empty candidate set omitted the true producer. The 215 misses are exactly the slots with no candidate at all.</a:t>
+              <a:t>A recurrence-only optimizer would emit all three reads, since every discovery trace takes that route. GAC blocks the region on one unwitnessed slot (ungroundable_slot); the agent still chooses the limit and writes the answer. The PR-outcome and backlog artifacts bind their limit=3 slots as invariant literals.</a:t>
             </a:r>
             <a:endParaRPr lang="en-US" sz="1000" dirty="0"/>
           </a:p>
@@ -7114,7 +6939,7 @@
                 <a:ea typeface="Calibri" pitchFamily="34" charset="-122"/>
                 <a:cs typeface="Calibri" pitchFamily="34" charset="-120"/>
               </a:rPr>
-              <a:t>METHOD  ·  §3.1–3.2</a:t>
+              <a:t>METHOD  ·  STAGES 2–3</a:t>
             </a:r>
             <a:endParaRPr lang="en-US" sz="1050" dirty="0"/>
           </a:p>
@@ -7237,7 +7062,7 @@
       </p:sp>
       <p:pic>
         <p:nvPicPr>
-          <p:cNvPr id="8" name="Image 0" descr="/home/claude/deck/eq/eq6.png"/>
+          <p:cNvPr id="8" name="Image 0"/>
           <p:cNvPicPr>
             <a:picLocks noChangeAspect="1"/>
           </p:cNvPicPr>
@@ -7252,7 +7077,7 @@
         <p:spPr>
           <a:xfrm>
             <a:off x="877824" y="1938528"/>
-            <a:ext cx="8575174" cy="420624"/>
+            <a:ext cx="7954543" cy="420624"/>
           </a:xfrm>
           <a:prstGeom prst="rect">
             <a:avLst/>
@@ -7295,7 +7120,7 @@
                 <a:ea typeface="Calibri" pitchFamily="34" charset="-122"/>
                 <a:cs typeface="Calibri" pitchFamily="34" charset="-120"/>
               </a:rPr>
-              <a:t>Expected saving from scenario-group support, mean removable model requests, and unit cost — charged for variant entropy, declared-effect exposure, and program size. The penalties matter: without λ₁ the ranking prefers a heterogeneous family whose single canonical form fits none of its members.</a:t>
+              <a:t>Expected saving from scenario-group support, mean removable model requests, and unit cost — charged for variant entropy, declared-effect exposure, and program size. Equation (5) affects only which family is tried first; no admission decision depends on it.</a:t>
             </a:r>
             <a:endParaRPr lang="en-US" sz="1000" dirty="0"/>
           </a:p>
@@ -7334,7 +7159,7 @@
                 <a:ea typeface="Calibri" pitchFamily="34" charset="-122"/>
                 <a:cs typeface="Calibri" pitchFamily="34" charset="-120"/>
               </a:rPr>
-              <a:t>(6)</a:t>
+              <a:t>(5)</a:t>
             </a:r>
             <a:endParaRPr lang="en-US" sz="1000" dirty="0"/>
           </a:p>
@@ -7470,7 +7295,7 @@
       </p:sp>
       <p:pic>
         <p:nvPicPr>
-          <p:cNvPr id="14" name="Image 1" descr="/home/claude/deck/eq/eq7.png"/>
+          <p:cNvPr id="14" name="Image 1"/>
           <p:cNvPicPr>
             <a:picLocks noChangeAspect="1"/>
           </p:cNvPicPr>
@@ -7485,7 +7310,7 @@
         <p:spPr>
           <a:xfrm>
             <a:off x="877824" y="4297680"/>
-            <a:ext cx="4005158" cy="512064"/>
+            <a:ext cx="4120993" cy="512064"/>
           </a:xfrm>
           <a:prstGeom prst="rect">
             <a:avLst/>
@@ -7528,7 +7353,7 @@
                 <a:ea typeface="Calibri" pitchFamily="34" charset="-122"/>
                 <a:cs typeface="Calibri" pitchFamily="34" charset="-120"/>
               </a:rPr>
-              <a:t>FEASIBILITY CEILING — what the compiler could achieve with a perfect verifier and a gate that never abstains. Because it assumes ρ = 1, no measured reduction can exceed it. Reporting the ceiling first makes a decisive negative answer cheap: a workload whose ceiling is under target is declined before a compiler is built for it.</a:t>
+              <a:t>FEASIBILITY CEILING — what the compiler could achieve with a perfect verifier and a gate that never abstains. Stage 3 checks only the left form (ρ = 1), so no measured reduction can exceed it, and a workload whose ceiling is under target is declined before any synthesis runs.</a:t>
             </a:r>
             <a:endParaRPr lang="en-US" sz="1000" dirty="0"/>
           </a:p>
@@ -7567,7 +7392,7 @@
                 <a:ea typeface="Calibri" pitchFamily="34" charset="-122"/>
                 <a:cs typeface="Calibri" pitchFamily="34" charset="-120"/>
               </a:rPr>
-              <a:t>(7)</a:t>
+              <a:t>(6)</a:t>
             </a:r>
             <a:endParaRPr lang="en-US" sz="1000" dirty="0"/>
           </a:p>
@@ -7647,7 +7472,7 @@
                 <a:ea typeface="Calibri" pitchFamily="34" charset="-122"/>
                 <a:cs typeface="Calibri" pitchFamily="34" charset="-120"/>
               </a:rPr>
-              <a:t>WORKED EXAMPLE — THE FIXED-PREFIX GITHUB STUDY</a:t>
+              <a:t>WORKED EXAMPLE — PR-OUTCOME AUDIT (TABLE 1)</a:t>
             </a:r>
             <a:endParaRPr lang="en-US" sz="950" dirty="0"/>
           </a:p>
@@ -7966,7 +7791,7 @@
             <a:r>
               <a:rPr lang="en-US" sz="1700" b="1" dirty="0">
                 <a:solidFill>
-                  <a:srgbClr val="1F8A99"/>
+                  <a:srgbClr val="0E1E3A"/>
                 </a:solidFill>
                 <a:latin typeface="Cambria" pitchFamily="34" charset="0"/>
                 <a:ea typeface="Cambria" pitchFamily="34" charset="-122"/>
@@ -7975,9 +7800,9 @@
               <a:t>75.0%</a:t>
             </a:r>
             <a:r>
-              <a:rPr lang="en-US" sz="1050" dirty="0">
-                <a:solidFill>
-                  <a:srgbClr val="24354F"/>
+              <a:rPr lang="en-US" sz="1100" dirty="0">
+                <a:solidFill>
+                  <a:srgbClr val="5A6B84"/>
                 </a:solidFill>
                 <a:latin typeface="Calibri" pitchFamily="34" charset="0"/>
                 <a:ea typeface="Calibri" pitchFamily="34" charset="-122"/>
@@ -8025,7 +7850,7 @@
                 <a:ea typeface="Calibri" pitchFamily="34" charset="-122"/>
                 <a:cs typeface="Calibri" pitchFamily="34" charset="-120"/>
               </a:rPr>
-              <a:t>Enumeration is practically bounded by the number of reachable result boundaries; the implementation's nested scan is worst-case O(NT²) when non-call spans are adversarial. We report this rather than the stronger O(NT) claim the bounded-call intuition suggests.</a:t>
+              <a:t>The ceiling counts requests removed by the prefix at a fixed continuation workload. Changes in downstream reasoning or fallback can change total requests, which is why the realized form also carries the verifier pass rate ρ.</a:t>
             </a:r>
             <a:endParaRPr lang="en-US" sz="1000" dirty="0"/>
           </a:p>
@@ -8175,7 +8000,7 @@
                 <a:ea typeface="Calibri" pitchFamily="34" charset="-122"/>
                 <a:cs typeface="Calibri" pitchFamily="34" charset="-120"/>
               </a:rPr>
-              <a:t>METHOD  ·  §3.2</a:t>
+              <a:t>METHOD  ·  STAGES 4–5  ·  TABLE 6</a:t>
             </a:r>
             <a:endParaRPr lang="en-US" sz="1050" dirty="0"/>
           </a:p>
@@ -8214,7 +8039,7 @@
                 <a:ea typeface="Cambria" pitchFamily="34" charset="-122"/>
                 <a:cs typeface="Cambria" pitchFamily="34" charset="-120"/>
               </a:rPr>
-              <a:t>Bounded synthesis, induced contracts — and an unrun challenge</a:t>
+              <a:t>Bounded synthesis and induced contracts: candidates, not proofs</a:t>
             </a:r>
             <a:endParaRPr lang="en-US" sz="2600" dirty="0"/>
           </a:p>
@@ -9007,7 +8832,7 @@
                 <a:ea typeface="Cambria" pitchFamily="34" charset="-122"/>
                 <a:cs typeface="Cambria" pitchFamily="34" charset="-120"/>
               </a:rPr>
-              <a:t>The replay-and-perturb challenge did not run on the headline artifact</a:t>
+              <a:t>Under drift, the guards showed no measured protection</a:t>
             </a:r>
             <a:endParaRPr lang="en-US" sz="1300" dirty="0"/>
           </a:p>
@@ -9049,7 +8874,7 @@
                 <a:ea typeface="Calibri" pitchFamily="34" charset="-122"/>
                 <a:cs typeface="Calibri" pitchFamily="34" charset="-120"/>
               </a:rPr>
-              <a:t>Replay and perturbation are available to challenge a candidate before calibration, but they are only as strong as the substrate supplied: without a sandbox the suite cannot run at all, and the artifact then records perturbations_claimed: false rather than implying a challenge occurred. The headline live artifact of §5.2 is in exactly that position, and the paper reports it as a limitation of that run rather than as a property of the method.</a:t>
+              <a:t>Two provider-free perturbation studies are null by construction: the simulated tools stay total, and on the GitHub records the oracle is the derived call argument. In the live continuation-graded study an emptied list lies inside the learned hull, both arms answered wrongly on 39 of 60 records, and no held-out record shows a guard preventing a wrong compiled answer.</a:t>
             </a:r>
             <a:endParaRPr lang="en-US" sz="1100" dirty="0"/>
           </a:p>
@@ -9199,7 +9024,7 @@
                 <a:ea typeface="Calibri" pitchFamily="34" charset="-122"/>
                 <a:cs typeface="Calibri" pitchFamily="34" charset="-120"/>
               </a:rPr>
-              <a:t>METHOD  ·  §3.3 AND ALGORITHM 3</a:t>
+              <a:t>METHOD  ·  STAGE 6  ·  ALGORITHM 1</a:t>
             </a:r>
             <a:endParaRPr lang="en-US" sz="1050" dirty="0"/>
           </a:p>
@@ -9398,7 +9223,7 @@
                 <a:ea typeface="Calibri" pitchFamily="34" charset="-122"/>
                 <a:cs typeface="Calibri" pitchFamily="34" charset="-120"/>
               </a:rPr>
-              <a:t>(8)</a:t>
+              <a:t>(7)</a:t>
             </a:r>
             <a:endParaRPr lang="en-US" sz="1000" dirty="0"/>
           </a:p>
@@ -9503,7 +9328,7 @@
                 <a:ea typeface="Calibri" pitchFamily="34" charset="-122"/>
                 <a:cs typeface="Calibri" pitchFamily="34" charset="-120"/>
               </a:rPr>
-              <a:t>One-sided Clopper–Pearson upper bound per threshold. The score q is a logistic model over entry-observable features — unseen category, distance proxy, missing fields, hull margin, temporal drift, provenance ambiguity, branch entropy — trained on development-group unproductive outcomes, then frozen. Calibration counts only violations: wrong after dispatch, never abstention.</a:t>
+              <a:t>One-sided Clopper–Pearson bound per threshold, Bonferroni-corrected over the grid. The score q is a logistic model over entry-observable features — missing fields, hull margin, temporal drift, provenance ambiguity — fitted on development groups only to predict an unproductive group, then frozen. The bound counts only dispatched groups that turned out wrong.</a:t>
             </a:r>
             <a:endParaRPr lang="en-US" sz="1000" dirty="0"/>
           </a:p>
@@ -9576,7 +9401,7 @@
                 <a:ea typeface="Calibri" pitchFamily="34" charset="-122"/>
                 <a:cs typeface="Calibri" pitchFamily="34" charset="-120"/>
               </a:rPr>
-              <a:t>PROPOSITION 1 — SIMULTANEOUS CALIBRATION STATEMENT</a:t>
+              <a:t>PROPOSITION 1 — PER-CANDIDATE SELECTIVE-RISK ADMISSION</a:t>
             </a:r>
             <a:endParaRPr lang="en-US" sz="950" dirty="0"/>
           </a:p>
@@ -9618,7 +9443,7 @@
                 <a:ea typeface="Calibri" pitchFamily="34" charset="-122"/>
                 <a:cs typeface="Calibri" pitchFamily="34" charset="-120"/>
               </a:rPr>
-              <a:t>If the program, score, violation definition and finite grid are fixed before calibration, and admitted calibration groups contribute i.i.d. (or conditionally i.i.d.) Bernoulli violation indicators from the same distribution as future admitted groups, then with probability at least 1 − δ over the calibration sample, every grid threshold's true group-level selective violation rate is no greater than its computed U η. Any selected threshold with U η ≤ α therefore has violation rate at most α on the same distribution.</a:t>
+              <a:t>Fix one candidate (P, H, V, q), the group-level violation rule, and the finite grid Λ before calibration. If calibration groups are i.i.d. from the future-group distribution, then with probability at least 1 − δ every threshold satisfies r(η) ≤ U(η), so a selected threshold with U(η) ≤ α has selective risk at most α. A run is compiler-wide when one candidate reaches calibration.</a:t>
             </a:r>
             <a:endParaRPr lang="en-US" sz="1050" dirty="0"/>
           </a:p>
@@ -9885,7 +9710,7 @@
                 <a:ea typeface="Calibri" pitchFamily="34" charset="-122"/>
                 <a:cs typeface="Calibri" pitchFamily="34" charset="-120"/>
               </a:rPr>
-              <a:t>at α = .05,  δ = .10,  |Λ| = 11.  Pre-committing to a single threshold rather than a grid of eleven drops the requirement to 45 — a design parameter as much as a data property.</a:t>
+              <a:t>at α = .05,  δ = .10,  |Λ| = 11. On a 92-group pool only full coverage is certifiable: abstaining on one group leaves U = 0.0503 &gt; α. At δ = .05 the floor rises to 106.</a:t>
             </a:r>
             <a:endParaRPr lang="en-US" sz="1000" dirty="0"/>
           </a:p>
@@ -10007,7 +9832,7 @@
                 <a:ea typeface="Calibri" pitchFamily="34" charset="-122"/>
                 <a:cs typeface="Calibri" pitchFamily="34" charset="-120"/>
               </a:rPr>
-              <a:t>A violation is disagreement with V, and V is induced from the same traces P was synthesized from. So α bounds the rate at which a compiled region breaks its own registered contract — never the rate at which the agent's task outcome is wrong. Absent distribution shift, a program fitted to satisfy V will rarely violate V.</a:t>
+              <a:t>A violation is a break of the compiled region's registered replay contract. On the GitHub cohorts that event has no support, because arguments are invariant and reads replay a pinned snapshot, so the bound confirms that enough groups were seen, not that risk was ranked.</a:t>
             </a:r>
             <a:endParaRPr lang="en-US" sz="1000" dirty="0"/>
           </a:p>
@@ -10046,7 +9871,7 @@
                 <a:ea typeface="Calibri" pitchFamily="34" charset="-122"/>
                 <a:cs typeface="Calibri" pitchFamily="34" charset="-120"/>
               </a:rPr>
-              <a:t>THREE THINGS WOULD MAKE THE CHAIN INDEPENDENT — NONE IS PRESENT IN THE SHIPPED ARTIFACT</a:t>
+              <a:t>WHAT THE CERTIFICATES COVER — AND WHAT THEY DO NOT</a:t>
             </a:r>
             <a:endParaRPr lang="en-US" sz="1050" dirty="0"/>
           </a:p>
@@ -10126,7 +9951,7 @@
                 <a:ea typeface="Cambria" pitchFamily="34" charset="-122"/>
                 <a:cs typeface="Cambria" pitchFamily="34" charset="-120"/>
               </a:rPr>
-              <a:t>A perturbation challenge</a:t>
+              <a:t>Support sufficiency</a:t>
             </a:r>
             <a:endParaRPr lang="en-US" sz="1150" dirty="0"/>
           </a:p>
@@ -10168,7 +9993,7 @@
                 <a:ea typeface="Calibri" pitchFamily="34" charset="-122"/>
                 <a:cs typeface="Calibri" pitchFamily="34" charset="-120"/>
               </a:rPr>
-              <a:t>not run: perturbations_claimed: false</a:t>
+              <a:t>92/92 zero-violation groups at full coverage</a:t>
             </a:r>
             <a:endParaRPr lang="en-US" sz="1000" dirty="0"/>
           </a:p>
@@ -10248,7 +10073,7 @@
                 <a:ea typeface="Cambria" pitchFamily="34" charset="-122"/>
                 <a:cs typeface="Cambria" pitchFamily="34" charset="-120"/>
               </a:rPr>
-              <a:t>An adjudication oracle</a:t>
+              <a:t>End-to-end event</a:t>
             </a:r>
             <a:endParaRPr lang="en-US" sz="1150" dirty="0"/>
           </a:p>
@@ -10290,7 +10115,7 @@
                 <a:ea typeface="Calibri" pitchFamily="34" charset="-122"/>
                 <a:cs typeface="Calibri" pitchFamily="34" charset="-120"/>
               </a:rPr>
-              <a:t>separate from the induction traces</a:t>
+              <a:t>one post-cutoff cohort: 0/132, bound 0.0173</a:t>
             </a:r>
             <a:endParaRPr lang="en-US" sz="1000" dirty="0"/>
           </a:p>
@@ -10370,7 +10195,7 @@
                 <a:ea typeface="Cambria" pitchFamily="34" charset="-122"/>
                 <a:cs typeface="Cambria" pitchFamily="34" charset="-120"/>
               </a:rPr>
-              <a:t>A task-quality measure</a:t>
+              <a:t>Graded risk ranking</a:t>
             </a:r>
             <a:endParaRPr lang="en-US" sz="1150" dirty="0"/>
           </a:p>
@@ -10412,7 +10237,7 @@
                 <a:ea typeface="Calibri" pitchFamily="34" charset="-122"/>
                 <a:cs typeface="Calibri" pitchFamily="34" charset="-120"/>
               </a:rPr>
-              <a:t>able to detect fabrication</a:t>
+              <a:t>not certified: an amended 184-group gate retired</a:t>
             </a:r>
             <a:endParaRPr lang="en-US" sz="1000" dirty="0"/>
           </a:p>
@@ -10454,7 +10279,7 @@
                 <a:ea typeface="Calibri" pitchFamily="34" charset="-122"/>
                 <a:cs typeface="Calibri" pitchFamily="34" charset="-120"/>
               </a:rPr>
-              <a:t>The independence assumption is load-bearing and stronger than exchangeability: groups from one repository, tenant, or time window are plausibly correlated, so a clustered deployment should calibrate at the cluster level and check sensitivity with a block bootstrap. The union bound also covers only one frozen artifact — a portfolio needs an explicit risk allocation across decisions.</a:t>
+              <a:t>Every bound assumes i.i.d. groups. Counting a creation day or an author as one unit retires every primary family under the registered grid.</a:t>
             </a:r>
             <a:endParaRPr lang="en-US" sz="900" dirty="0"/>
           </a:p>
@@ -10604,7 +10429,7 @@
                 <a:ea typeface="Calibri" pitchFamily="34" charset="-122"/>
                 <a:cs typeface="Calibri" pitchFamily="34" charset="-120"/>
               </a:rPr>
-              <a:t>METHOD  ·  ALGORITHM 4 AND §3.5.1</a:t>
+              <a:t>METHOD  ·  ALGORITHM 4</a:t>
             </a:r>
             <a:endParaRPr lang="en-US" sz="1050" dirty="0"/>
           </a:p>
@@ -11722,7 +11547,7 @@
                 <a:ea typeface="Calibri" pitchFamily="34" charset="-122"/>
                 <a:cs typeface="Calibri" pitchFamily="34" charset="-120"/>
               </a:rPr>
-              <a:t>§3.5.1  WHERE “UNMODIFIED BASELINE” IS EXACT, AND WHERE IT IS NOT</a:t>
+              <a:t>WHERE “UNMODIFIED BASELINE” IS EXACT, AND WHERE IT IS NOT</a:t>
             </a:r>
             <a:endParaRPr lang="en-US" sz="950" dirty="0"/>
           </a:p>
@@ -12225,7 +12050,7 @@
                 <a:ea typeface="Calibri" pitchFamily="34" charset="-122"/>
                 <a:cs typeface="Calibri" pitchFamily="34" charset="-120"/>
               </a:rPr>
-              <a:t>Three non-overlapping tiers, six directional hypotheses, and results reported with their denominators intact.</a:t>
+              <a:t>Three GitHub workflows, newer records, a public benchmark where GAC helps, and two where it does not — with every refusal reported.</a:t>
             </a:r>
             <a:endParaRPr lang="en-US" sz="1350" dirty="0"/>
           </a:p>
@@ -12375,7 +12200,7 @@
                 <a:ea typeface="Calibri" pitchFamily="34" charset="-122"/>
                 <a:cs typeface="Calibri" pitchFamily="34" charset="-120"/>
               </a:rPr>
-              <a:t>METHODOLOGY  ·  §4.1</a:t>
+              <a:t>EXPERIMENTAL SETUP  ·  §4</a:t>
             </a:r>
             <a:endParaRPr lang="en-US" sz="1050" dirty="0"/>
           </a:p>
@@ -12414,7 +12239,7 @@
                 <a:ea typeface="Cambria" pitchFamily="34" charset="-122"/>
                 <a:cs typeface="Cambria" pitchFamily="34" charset="-120"/>
               </a:rPr>
-              <a:t>Three evidence tiers and six directional hypotheses</a:t>
+              <a:t>Three evidence sources, every comparison paired</a:t>
             </a:r>
             <a:endParaRPr lang="en-US" sz="2600" dirty="0"/>
           </a:p>
@@ -12568,7 +12393,7 @@
                 <a:ea typeface="Cambria" pitchFamily="34" charset="-122"/>
                 <a:cs typeface="Cambria" pitchFamily="34" charset="-120"/>
               </a:rPr>
-              <a:t>External executable benchmark</a:t>
+              <a:t>Real records, live provider</a:t>
             </a:r>
             <a:endParaRPr lang="en-US" sz="1350" dirty="0"/>
           </a:p>
@@ -12610,7 +12435,7 @@
                 <a:ea typeface="Calibri" pitchFamily="34" charset="-122"/>
                 <a:cs typeface="Calibri" pitchFamily="34" charset="-120"/>
               </a:rPr>
-              <a:t>NESTFUL — 1,861 records, 1,416 in the audited module, 1,415 executing</a:t>
+              <a:t>Three GitHub workflow families on one pinned public snapshot</a:t>
             </a:r>
             <a:endParaRPr lang="en-US" sz="1000" dirty="0"/>
           </a:p>
@@ -12656,7 +12481,7 @@
                 <a:ea typeface="Calibri" pitchFamily="34" charset="-122"/>
                 <a:cs typeface="Calibri" pitchFamily="34" charset="-120"/>
               </a:rPr>
-              <a:t>Tests dependency reconstruction, synthesis, and refusal on public data with no model calls at all</a:t>
+              <a:t>132 discovery records each; 16 train, 8 dev, and 92 calibration groups</a:t>
             </a:r>
             <a:endParaRPr lang="en-US" sz="1000" dirty="0"/>
           </a:p>
@@ -12680,7 +12505,7 @@
                 <a:ea typeface="Calibri" pitchFamily="34" charset="-122"/>
                 <a:cs typeface="Calibri" pitchFamily="34" charset="-120"/>
               </a:rPr>
-              <a:t>Per-family split is lexicographic by episode identifier, so it tests held-out windows, not distribution shift</a:t>
+              <a:t>30 balanced held-out records per family with exact, source-grounded answer contracts</a:t>
             </a:r>
             <a:endParaRPr lang="en-US" sz="1000" dirty="0"/>
           </a:p>
@@ -12704,7 +12529,7 @@
                 <a:ea typeface="Calibri" pitchFamily="34" charset="-122"/>
                 <a:cs typeface="Calibri" pitchFamily="34" charset="-120"/>
               </a:rPr>
-              <a:t>Builds provenance, mining, synthesis and replay directly rather than invoking the full compiler</a:t>
+              <a:t>Baseline, compiled artifact, and a hand-written program on the same records</a:t>
             </a:r>
             <a:endParaRPr lang="en-US" sz="1000" dirty="0"/>
           </a:p>
@@ -12858,7 +12683,7 @@
                 <a:ea typeface="Cambria" pitchFamily="34" charset="-122"/>
                 <a:cs typeface="Cambria" pitchFamily="34" charset="-120"/>
               </a:rPr>
-              <a:t>Real records, live provider</a:t>
+              <a:t>Newer records, fresh cohort</a:t>
             </a:r>
             <a:endParaRPr lang="en-US" sz="1350" dirty="0"/>
           </a:p>
@@ -12900,7 +12725,7 @@
                 <a:ea typeface="Calibri" pitchFamily="34" charset="-122"/>
                 <a:cs typeface="Calibri" pitchFamily="34" charset="-120"/>
               </a:rPr>
-              <a:t>Four GitHub protocols on a pinned 12.7 MB Apache-2.0 snapshot</a:t>
+              <a:t>Five-repository PR-outcome extension and 132 post-cutoff pull requests</a:t>
             </a:r>
             <a:endParaRPr lang="en-US" sz="1000" dirty="0"/>
           </a:p>
@@ -12946,7 +12771,7 @@
                 <a:ea typeface="Calibri" pitchFamily="34" charset="-122"/>
                 <a:cs typeface="Calibri" pitchFamily="34" charset="-120"/>
               </a:rPr>
-              <a:t>The first protocol prescribes a fixed prefix as a conformance ablation</a:t>
+              <a:t>Held-out records newer than discovery, inside each frozen snapshot</a:t>
             </a:r>
             <a:endParaRPr lang="en-US" sz="1000" dirty="0"/>
           </a:p>
@@ -12970,7 +12795,7 @@
                 <a:ea typeface="Calibri" pitchFamily="34" charset="-122"/>
                 <a:cs typeface="Calibri" pitchFamily="34" charset="-120"/>
               </a:rPr>
-              <a:t>The review-driven follow-up and its expanded replication name required facts but no tool functions and no order</a:t>
+              <a:t>Selection sealed before provider calls; retired repositories stay in the result</a:t>
             </a:r>
             <a:endParaRPr lang="en-US" sz="1000" dirty="0"/>
           </a:p>
@@ -12994,7 +12819,7 @@
                 <a:ea typeface="Calibri" pitchFamily="34" charset="-122"/>
                 <a:cs typeface="Calibri" pitchFamily="34" charset="-120"/>
               </a:rPr>
-              <a:t>A prospective portfolio pilot freezes the replication as selection evidence, then runs 12 fresh records</a:t>
+              <a:t>Pull requests created after the snapshot carry the end-to-end certificate</a:t>
             </a:r>
             <a:endParaRPr lang="en-US" sz="1000" dirty="0"/>
           </a:p>
@@ -13148,7 +12973,7 @@
                 <a:ea typeface="Cambria" pitchFamily="34" charset="-122"/>
                 <a:cs typeface="Cambria" pitchFamily="34" charset="-120"/>
               </a:rPr>
-              <a:t>Controlled demonstration suite</a:t>
+              <a:t>Public benchmarks</a:t>
             </a:r>
             <a:endParaRPr lang="en-US" sz="1350" dirty="0"/>
           </a:p>
@@ -13190,7 +13015,7 @@
                 <a:ea typeface="Calibri" pitchFamily="34" charset="-122"/>
                 <a:cs typeface="Calibri" pitchFamily="34" charset="-120"/>
               </a:rPr>
-              <a:t>Six workflow shapes, eight conditions, real SDK runtime</a:t>
+              <a:t>BIRD with a live SQL agent; NESTFUL and AppWorld traces</a:t>
             </a:r>
             <a:endParaRPr lang="en-US" sz="1000" dirty="0"/>
           </a:p>
@@ -13236,7 +13061,7 @@
                 <a:ea typeface="Calibri" pitchFamily="34" charset="-122"/>
                 <a:cs typeface="Calibri" pitchFamily="34" charset="-120"/>
               </a:rPr>
-              <a:t>Covers observation-dependent branches, pagination, a mandatory irreversible write, a handoff barrier, an undeclared-effect MCP surface</a:t>
+              <a:t>BIRD: pinned read-only databases, a standard and a schema-first agent</a:t>
             </a:r>
             <a:endParaRPr lang="en-US" sz="1000" dirty="0"/>
           </a:p>
@@ -13260,7 +13085,7 @@
                 <a:ea typeface="Calibri" pitchFamily="34" charset="-122"/>
                 <a:cs typeface="Calibri" pitchFamily="34" charset="-120"/>
               </a:rPr>
-              <a:t>Three conditions are negative controls whose only correct outcome is no compaction</a:t>
+              <a:t>NESTFUL and AppWorld: executable traces and no model runs, so no efficiency claim</a:t>
             </a:r>
             <a:endParaRPr lang="en-US" sz="1000" dirty="0"/>
           </a:p>
@@ -13284,7 +13109,7 @@
                 <a:ea typeface="Calibri" pitchFamily="34" charset="-122"/>
                 <a:cs typeface="Calibri" pitchFamily="34" charset="-120"/>
               </a:rPr>
-              <a:t>Business records are fictional — no real-world data claim</a:t>
+              <a:t>API-Bank and BFCL v4 behave like NESTFUL</a:t>
             </a:r>
             <a:endParaRPr lang="en-US" sz="1000" dirty="0"/>
           </a:p>
@@ -13323,7 +13148,7 @@
                 <a:ea typeface="Calibri" pitchFamily="34" charset="-122"/>
                 <a:cs typeface="Calibri" pitchFamily="34" charset="-120"/>
               </a:rPr>
-              <a:t>HYPOTHESES, FIXED INTERNALLY BEFORE THE SEALED TEST WAS SCORED — NOT EXTERNALLY PREREGISTERED</a:t>
+              <a:t>CONDITIONS, MODELS, AND STATISTICS — CONDITIONS WITHIN A FAMILY DIFFER IN STRUCTURE ALONE</a:t>
             </a:r>
             <a:endParaRPr lang="en-US" sz="1050" dirty="0"/>
           </a:p>
@@ -13394,7 +13219,7 @@
                 <a:ea typeface="Calibri" pitchFamily="34" charset="-122"/>
                 <a:cs typeface="Calibri" pitchFamily="34" charset="-120"/>
               </a:rPr>
-              <a:t>H1</a:t>
+              <a:t>B</a:t>
             </a:r>
             <a:endParaRPr lang="en-US" sz="900" dirty="0"/>
           </a:p>
@@ -13436,7 +13261,7 @@
                 <a:ea typeface="Calibri" pitchFamily="34" charset="-122"/>
                 <a:cs typeface="Calibri" pitchFamily="34" charset="-120"/>
               </a:rPr>
-              <a:t>provenance places the expected producer for &gt; 90% of executable nested slots</a:t>
+              <a:t>the unchanged agent, the baseline every reduction is measured against</a:t>
             </a:r>
             <a:endParaRPr lang="en-US" sz="1000" dirty="0"/>
           </a:p>
@@ -13507,7 +13332,7 @@
                 <a:ea typeface="Calibri" pitchFamily="34" charset="-122"/>
                 <a:cs typeface="Calibri" pitchFamily="34" charset="-120"/>
               </a:rPr>
-              <a:t>H2</a:t>
+              <a:t>A</a:t>
             </a:r>
             <a:endParaRPr lang="en-US" sz="900" dirty="0"/>
           </a:p>
@@ -13549,7 +13374,7 @@
                 <a:ea typeface="Calibri" pitchFamily="34" charset="-122"/>
                 <a:cs typeface="Calibri" pitchFamily="34" charset="-120"/>
               </a:rPr>
-              <a:t>the compiled prefix reduces provider requests and total tokens</a:t>
+              <a:t>the compiled artifact, dispatched only when guard, score, and pins pass</a:t>
             </a:r>
             <a:endParaRPr lang="en-US" sz="1000" dirty="0"/>
           </a:p>
@@ -13620,7 +13445,7 @@
                 <a:ea typeface="Calibri" pitchFamily="34" charset="-122"/>
                 <a:cs typeface="Calibri" pitchFamily="34" charset="-120"/>
               </a:rPr>
-              <a:t>H3</a:t>
+              <a:t>M</a:t>
             </a:r>
             <a:endParaRPr lang="en-US" sz="900" dirty="0"/>
           </a:p>
@@ -13662,7 +13487,7 @@
                 <a:ea typeface="Calibri" pitchFamily="34" charset="-122"/>
                 <a:cs typeface="Calibri" pitchFamily="34" charset="-120"/>
               </a:rPr>
-              <a:t>no observed quality loss on the sealed task</a:t>
+              <a:t>a hand-written pre-model program written with full workflow knowledge</a:t>
             </a:r>
             <a:endParaRPr lang="en-US" sz="1000" dirty="0"/>
           </a:p>
@@ -13733,7 +13558,7 @@
                 <a:ea typeface="Calibri" pitchFamily="34" charset="-122"/>
                 <a:cs typeface="Calibri" pitchFamily="34" charset="-120"/>
               </a:rPr>
-              <a:t>H4</a:t>
+              <a:t>S</a:t>
             </a:r>
             <a:endParaRPr lang="en-US" sz="900" dirty="0"/>
           </a:p>
@@ -13775,7 +13600,7 @@
                 <a:ea typeface="Calibri" pitchFamily="34" charset="-122"/>
                 <a:cs typeface="Calibri" pitchFamily="34" charset="-120"/>
               </a:rPr>
-              <a:t>families below the exact-gate sample requirement retire</a:t>
+              <a:t>paired exact McNemar, bootstrap intervals, Wilcoxon signed-rank tests</a:t>
             </a:r>
             <a:endParaRPr lang="en-US" sz="1000" dirty="0"/>
           </a:p>
@@ -13846,7 +13671,7 @@
                 <a:ea typeface="Calibri" pitchFamily="34" charset="-122"/>
                 <a:cs typeface="Calibri" pitchFamily="34" charset="-120"/>
               </a:rPr>
-              <a:t>H5</a:t>
+              <a:t>R</a:t>
             </a:r>
             <a:endParaRPr lang="en-US" sz="900" dirty="0"/>
           </a:p>
@@ -13888,7 +13713,7 @@
                 <a:ea typeface="Calibri" pitchFamily="34" charset="-122"/>
                 <a:cs typeface="Calibri" pitchFamily="34" charset="-120"/>
               </a:rPr>
-              <a:t>a condition that must refuse reproduces the baseline model-call count and quality</a:t>
+              <a:t>gpt-5.6-luna primary; gpt-6-luna and claude-sonnet-5 replications</a:t>
             </a:r>
             <a:endParaRPr lang="en-US" sz="1000" dirty="0"/>
           </a:p>
@@ -13959,7 +13784,7 @@
                 <a:ea typeface="Calibri" pitchFamily="34" charset="-122"/>
                 <a:cs typeface="Calibri" pitchFamily="34" charset="-120"/>
               </a:rPr>
-              <a:t>H6</a:t>
+              <a:t>$</a:t>
             </a:r>
             <a:endParaRPr lang="en-US" sz="900" dirty="0"/>
           </a:p>
@@ -14001,7 +13826,7 @@
                 <a:ea typeface="Calibri" pitchFamily="34" charset="-122"/>
                 <a:cs typeface="Calibri" pitchFamily="34" charset="-120"/>
               </a:rPr>
-              <a:t>the frozen selector's chosen action passes all fresh task contracts and reduces the weighted objective</a:t>
+              <a:t>requests, interfaces, tokens, latency, and cost at list prices</a:t>
             </a:r>
             <a:endParaRPr lang="en-US" sz="1000" dirty="0"/>
           </a:p>
@@ -14040,7 +13865,7 @@
                 <a:ea typeface="Calibri" pitchFamily="34" charset="-122"/>
                 <a:cs typeface="Calibri" pitchFamily="34" charset="-120"/>
               </a:rPr>
-              <a:t>H5 is deliberately not stated in dollars: refusing conditions cost more than baseline for prompt-cache reasons unrelated to whether the refusal was correct. H3 is an observed-sample hypothesis, not a population equivalence claim.</a:t>
+              <a:t>The exact-trace filter keeps 130–132 of 132 discovery records per family, so each certificate is conditional on that selection. Gate multiplicity is controlled by the Bonferroni term of Equation (7).</a:t>
             </a:r>
             <a:endParaRPr lang="en-US" sz="900" dirty="0"/>
           </a:p>
@@ -14151,7 +13976,7 @@
                 <a:ea typeface="Calibri" pitchFamily="34" charset="-122"/>
                 <a:cs typeface="Calibri" pitchFamily="34" charset="-120"/>
               </a:rPr>
-              <a:t>17</a:t>
+              <a:t>22</a:t>
             </a:r>
             <a:endParaRPr lang="en-US" sz="900" dirty="0"/>
           </a:p>
@@ -14190,7 +14015,7 @@
                 <a:ea typeface="Calibri" pitchFamily="34" charset="-122"/>
                 <a:cs typeface="Calibri" pitchFamily="34" charset="-120"/>
               </a:rPr>
-              <a:t>RESULTS  ·  RQ1 AND RQ3  ·  §5.1</a:t>
+              <a:t>RESULTS  ·  §5.4  ·  TABLE 2</a:t>
             </a:r>
             <a:endParaRPr lang="en-US" sz="1050" dirty="0"/>
           </a:p>
@@ -14229,7 +14054,7 @@
                 <a:ea typeface="Cambria" pitchFamily="34" charset="-122"/>
                 <a:cs typeface="Cambria" pitchFamily="34" charset="-120"/>
               </a:rPr>
-              <a:t>Provenance succeeds more often than certification</a:t>
+              <a:t>Where GAC yields no measured benefit: NESTFUL and AppWorld</a:t>
             </a:r>
             <a:endParaRPr lang="en-US" sz="2600" dirty="0"/>
           </a:p>
@@ -14275,7 +14100,7 @@
                 <a:ea typeface="Calibri" pitchFamily="34" charset="-122"/>
                 <a:cs typeface="Calibri" pitchFamily="34" charset="-120"/>
               </a:rPr>
-              <a:t>Recurrence is fragmented: 714 candidate families exist, only 32 have support of at least five, and maximum support is 26.</a:t>
+              <a:t>Thin evidence: NESTFUL, the largest trace corpus the compiler ingests (1,415 traces), passes provenance, synthesis, and replay with no wrong execution.</a:t>
             </a:r>
             <a:endParaRPr lang="en-US" sz="1150" dirty="0"/>
           </a:p>
@@ -14299,7 +14124,7 @@
                 <a:ea typeface="Calibri" pitchFamily="34" charset="-122"/>
                 <a:cs typeface="Calibri" pitchFamily="34" charset="-120"/>
               </a:rPr>
-              <a:t>Of 32 attempted families, 12 synthesize. Their 36 held-out windows yield 24 passes, 12 abstentions, and zero wrong executions. Dominant synthesis failures are unsupported loop predicates and slots that fail grouped refitting.</a:t>
+              <a:t>Yet its best family reaches 26 independent groups against the 92 the gate requires, so all 32 families retire at stage 6. API-Bank and BFCL v4 retire the same way, at 8 and 15.</a:t>
             </a:r>
             <a:endParaRPr lang="en-US" sz="1150" dirty="0"/>
           </a:p>
@@ -14323,7 +14148,7 @@
                 <a:ea typeface="Calibri" pitchFamily="34" charset="-122"/>
                 <a:cs typeface="Calibri" pitchFamily="34" charset="-120"/>
               </a:rPr>
-              <a:t>Zero wrong does not certify the programs. The exact gate requires 92 zero-violation groups, so every family retires — H4 supported.</a:t>
+              <a:t>Admissible, rarely dispatchable: on AppWorld's gold solutions one argument-free two-call artifact is admitted at 92/92 groups, yet ReAct and plan-and-execute agents open by reading API documentation and almost never reach it.</a:t>
             </a:r>
             <a:endParaRPr lang="en-US" sz="1150" dirty="0"/>
           </a:p>
@@ -14406,7 +14231,7 @@
                 <a:ea typeface="Calibri" pitchFamily="34" charset="-122"/>
                 <a:cs typeface="Calibri" pitchFamily="34" charset="-120"/>
               </a:rPr>
-              <a:t>A scientifically useful negative result. </a:t>
+              <a:t>No model runs on either benchmark, so neither licenses an efficiency claim.</a:t>
             </a:r>
             <a:r>
               <a:rPr lang="en-US" sz="1100" dirty="0">
@@ -14417,7 +14242,7 @@
                 <a:ea typeface="Calibri" pitchFamily="34" charset="-122"/>
                 <a:cs typeface="Calibri" pitchFamily="34" charset="-120"/>
               </a:rPr>
-              <a:t>A system that emitted all 32 recurrent families would look more productive, yet none has the required support. Refusal exposes the data requirement rather than moving it into an undocumented heuristic — and it is what distinguishes a guarded compiler from a recurrence-only macro miner.</a:t>
+              <a:t> The floor is a corpus-size fact: it bounds what public trace benchmarks can certify, not what the compiler can do. Admitting the documentation read as a prologue recovers only 2 more of 4,680 runs.</a:t>
             </a:r>
             <a:endParaRPr lang="en-US" sz="1100" dirty="0"/>
           </a:p>
@@ -14472,7 +14297,7 @@
                 <a:ea typeface="Calibri" pitchFamily="34" charset="-122"/>
                 <a:cs typeface="Calibri" pitchFamily="34" charset="-120"/>
               </a:rPr>
-              <a:t>TABLE 1 — EXTERNAL NESTFUL COMPILER RESULTS</a:t>
+              <a:t>TABLE 2 — THE TWO TRACE BENCHMARKS WITH NO MEASURED GAC BENEFIT</a:t>
             </a:r>
             <a:endParaRPr lang="en-US" sz="1050" dirty="0"/>
           </a:p>
@@ -14594,7 +14419,7 @@
                 <a:ea typeface="Calibri" pitchFamily="34" charset="-122"/>
                 <a:cs typeface="Calibri" pitchFamily="34" charset="-120"/>
               </a:rPr>
-              <a:t>executable basic-function episodes</a:t>
+              <a:t>NESTFUL executable traces</a:t>
             </a:r>
             <a:endParaRPr lang="en-US" sz="900" dirty="0"/>
           </a:p>
@@ -14674,7 +14499,7 @@
                 <a:ea typeface="Cambria" pitchFamily="34" charset="-122"/>
                 <a:cs typeface="Cambria" pitchFamily="34" charset="-120"/>
               </a:rPr>
-              <a:t>96.3% / 80.7%</a:t>
+              <a:t>26 / 92</a:t>
             </a:r>
             <a:endParaRPr lang="en-US" sz="1250" dirty="0"/>
           </a:p>
@@ -14716,7 +14541,7 @@
                 <a:ea typeface="Calibri" pitchFamily="34" charset="-122"/>
                 <a:cs typeface="Calibri" pitchFamily="34" charset="-120"/>
               </a:rPr>
-              <a:t>recall / unique resolution</a:t>
+              <a:t>best family support vs. gate floor</a:t>
             </a:r>
             <a:endParaRPr lang="en-US" sz="900" dirty="0"/>
           </a:p>
@@ -14796,7 +14621,7 @@
                 <a:ea typeface="Cambria" pitchFamily="34" charset="-122"/>
                 <a:cs typeface="Cambria" pitchFamily="34" charset="-120"/>
               </a:rPr>
-              <a:t>1,207</a:t>
+              <a:t>0 / 32</a:t>
             </a:r>
             <a:endParaRPr lang="en-US" sz="1250" dirty="0"/>
           </a:p>
@@ -14838,7 +14663,7 @@
                 <a:ea typeface="Calibri" pitchFamily="34" charset="-122"/>
                 <a:cs typeface="Calibri" pitchFamily="34" charset="-120"/>
               </a:rPr>
-              <a:t>complete groundable windows</a:t>
+              <a:t>NESTFUL families admitted</a:t>
             </a:r>
             <a:endParaRPr lang="en-US" sz="900" dirty="0"/>
           </a:p>
@@ -14918,7 +14743,7 @@
                 <a:ea typeface="Cambria" pitchFamily="34" charset="-122"/>
                 <a:cs typeface="Cambria" pitchFamily="34" charset="-120"/>
               </a:rPr>
-              <a:t>12 / 32</a:t>
+              <a:t>24 / 12 / 0</a:t>
             </a:r>
             <a:endParaRPr lang="en-US" sz="1250" dirty="0"/>
           </a:p>
@@ -14960,7 +14785,7 @@
                 <a:ea typeface="Calibri" pitchFamily="34" charset="-122"/>
                 <a:cs typeface="Calibri" pitchFamily="34" charset="-120"/>
               </a:rPr>
-              <a:t>families synthesized</a:t>
+              <a:t>replay pass / abstain / wrong</a:t>
             </a:r>
             <a:endParaRPr lang="en-US" sz="900" dirty="0"/>
           </a:p>
@@ -15040,7 +14865,7 @@
                 <a:ea typeface="Cambria" pitchFamily="34" charset="-122"/>
                 <a:cs typeface="Cambria" pitchFamily="34" charset="-120"/>
               </a:rPr>
-              <a:t>24 / 12 / 0</a:t>
+              <a:t>136</a:t>
             </a:r>
             <a:endParaRPr lang="en-US" sz="1250" dirty="0"/>
           </a:p>
@@ -15082,7 +14907,7 @@
                 <a:ea typeface="Calibri" pitchFamily="34" charset="-122"/>
                 <a:cs typeface="Calibri" pitchFamily="34" charset="-120"/>
               </a:rPr>
-              <a:t>pass / abstain / wrong</a:t>
+              <a:t>largest AppWorld family support</a:t>
             </a:r>
             <a:endParaRPr lang="en-US" sz="900" dirty="0"/>
           </a:p>
@@ -15162,7 +14987,7 @@
                 <a:ea typeface="Cambria" pitchFamily="34" charset="-122"/>
                 <a:cs typeface="Cambria" pitchFamily="34" charset="-120"/>
               </a:rPr>
-              <a:t>0</a:t>
+              <a:t>2,339/2,340</a:t>
             </a:r>
             <a:endParaRPr lang="en-US" sz="1250" dirty="0"/>
           </a:p>
@@ -15204,7 +15029,7 @@
                 <a:ea typeface="Calibri" pitchFamily="34" charset="-122"/>
                 <a:cs typeface="Calibri" pitchFamily="34" charset="-120"/>
               </a:rPr>
-              <a:t>certifiable families</a:t>
+              <a:t>full-code runs that can dispatch</a:t>
             </a:r>
             <a:endParaRPr lang="en-US" sz="900" dirty="0"/>
           </a:p>
@@ -15284,7 +15109,7 @@
                 <a:ea typeface="Cambria" pitchFamily="34" charset="-122"/>
                 <a:cs typeface="Cambria" pitchFamily="34" charset="-120"/>
               </a:rPr>
-              <a:t>23.3 MiB / 5.98 s</a:t>
+              <a:t>1 / 4,680</a:t>
             </a:r>
             <a:endParaRPr lang="en-US" sz="1250" dirty="0"/>
           </a:p>
@@ -15326,7 +15151,7 @@
                 <a:ea typeface="Calibri" pitchFamily="34" charset="-122"/>
                 <a:cs typeface="Calibri" pitchFamily="34" charset="-120"/>
               </a:rPr>
-              <a:t>peak memory / elapsed</a:t>
+              <a:t>ReAct or plan-and-execute runs</a:t>
             </a:r>
             <a:endParaRPr lang="en-US" sz="900" dirty="0"/>
           </a:p>
@@ -15476,7 +15301,7 @@
                 <a:ea typeface="Calibri" pitchFamily="34" charset="-122"/>
                 <a:cs typeface="Calibri" pitchFamily="34" charset="-120"/>
               </a:rPr>
-              <a:t>RESULTS  ·  RQ2  ·  §5.2.1  ·  TABLE 2</a:t>
+              <a:t>RESULTS  ·  §5.1  ·  ISSUE-TYPE ROUTING  ·  TABLES 1 AND 11</a:t>
             </a:r>
             <a:endParaRPr lang="en-US" sz="1050" dirty="0"/>
           </a:p>
@@ -15515,7 +15340,7 @@
                 <a:ea typeface="Cambria" pitchFamily="34" charset="-122"/>
                 <a:cs typeface="Cambria" pitchFamily="34" charset="-120"/>
               </a:rPr>
-              <a:t>Expanded natural-order replication: 30 fresh real records</a:t>
+              <a:t>Issue-type routing: the compiler keeps only what it can ground</a:t>
             </a:r>
             <a:endParaRPr lang="en-US" sz="2600" dirty="0"/>
           </a:p>
@@ -15657,7 +15482,7 @@
                 <a:ea typeface="Calibri" pitchFamily="34" charset="-122"/>
                 <a:cs typeface="Calibri" pitchFamily="34" charset="-120"/>
               </a:rPr>
-              <a:t>All 132 discovery traces read record → labels → comments under a prompt naming neither tools nor order; 130 pass the exact-source task</a:t>
+              <a:t>All 132 discovery traces read record → labels → comments under a prompt naming neither tools nor order</a:t>
             </a:r>
             <a:endParaRPr lang="en-US" sz="1000" dirty="0"/>
           </a:p>
@@ -15681,7 +15506,7 @@
                 <a:ea typeface="Calibri" pitchFamily="34" charset="-122"/>
                 <a:cs typeface="Calibri" pitchFamily="34" charset="-120"/>
               </a:rPr>
-              <a:t>The natural caller chose different integer comment limits, so no trace-grounded expression reproduces that argument</a:t>
+              <a:t>The comments limit is 100 in 130 traces and 1 in two: not an invariant literal, and no trace-grounded expression reproduces it</a:t>
             </a:r>
             <a:endParaRPr lang="en-US" sz="1000" dirty="0"/>
           </a:p>
@@ -15705,7 +15530,7 @@
                 <a:ea typeface="Calibri" pitchFamily="34" charset="-122"/>
                 <a:cs typeface="Calibri" pitchFamily="34" charset="-120"/>
               </a:rPr>
-              <a:t>The full three-read candidate is rejected with ungroundable_slot; the compiler emits the groundable two-read prefix and the ordinary agent performs the comments read and final rendering</a:t>
+              <a:t>The full three-read candidate is rejected with ungroundable_slot; the compiler emits the two-read prefix, and the agent performs the comments read and the final answer</a:t>
             </a:r>
             <a:endParaRPr lang="en-US" sz="1000" dirty="0"/>
           </a:p>
@@ -16363,7 +16188,7 @@
                 <a:ea typeface="Calibri" pitchFamily="34" charset="-122"/>
                 <a:cs typeface="Calibri" pitchFamily="34" charset="-120"/>
               </a:rPr>
-              <a:t>exact + full task contracts, every arm</a:t>
+              <a:t>exact contracts, every arm</a:t>
             </a:r>
             <a:endParaRPr lang="en-US" sz="900" dirty="0"/>
           </a:p>
@@ -16485,7 +16310,7 @@
                 <a:ea typeface="Calibri" pitchFamily="34" charset="-122"/>
                 <a:cs typeface="Calibri" pitchFamily="34" charset="-120"/>
               </a:rPr>
-              <a:t>one-sided bound on paired degradation</a:t>
+              <a:t>one-sided bound on compiled-only misses</a:t>
             </a:r>
             <a:endParaRPr lang="en-US" sz="900" dirty="0"/>
           </a:p>
@@ -16524,7 +16349,7 @@
                 <a:ea typeface="Calibri" pitchFamily="34" charset="-122"/>
                 <a:cs typeface="Calibri" pitchFamily="34" charset="-120"/>
               </a:rPr>
-              <a:t>Thresholds below 0.11 admit none and those at or above 0.11 admit all 92, so this remains a sample-size gate rather than a demonstrated risk–coverage discriminator. Break-even against the 132-episode discovery cost lands between 176 and 292 eligible future episodes depending on which resource is amortized.</a:t>
+              <a:t>The hand-written program uses one tool interface instead of three and fewer tokens; only latency favors the compiler. On a 92-group pool only full coverage is certifiable, and discovery breaks even after 411 episodes for this family.</a:t>
             </a:r>
             <a:endParaRPr lang="en-US" sz="900" dirty="0"/>
           </a:p>
@@ -16674,7 +16499,7 @@
                 <a:ea typeface="Calibri" pitchFamily="34" charset="-122"/>
                 <a:cs typeface="Calibri" pitchFamily="34" charset="-120"/>
               </a:rPr>
-              <a:t>RESULTS  ·  §5.2  ·  TABLES 3 AND 4</a:t>
+              <a:t>RESULTS  ·  §1  ·  APPENDIX F.2  ·  CONTINUATION AUDIT</a:t>
             </a:r>
             <a:endParaRPr lang="en-US" sz="1050" dirty="0"/>
           </a:p>
@@ -16713,7 +16538,7 @@
                 <a:ea typeface="Cambria" pitchFamily="34" charset="-122"/>
                 <a:cs typeface="Cambria" pitchFamily="34" charset="-120"/>
               </a:rPr>
-              <a:t>Preservation is not invariant to compilation depth</a:t>
+              <a:t>Recurrence proposes a program; it does not license one</a:t>
             </a:r>
             <a:endParaRPr lang="en-US" sz="2600" dirty="0"/>
           </a:p>
@@ -16832,7 +16657,7 @@
                 <a:ea typeface="Calibri" pitchFamily="34" charset="-122"/>
                 <a:cs typeface="Calibri" pitchFamily="34" charset="-120"/>
               </a:rPr>
-              <a:t>expanded replication, 30 issues</a:t>
+              <a:t>registered study, α = .05, 30 issues</a:t>
             </a:r>
             <a:endParaRPr lang="en-US" sz="1050" dirty="0"/>
           </a:p>
@@ -17066,7 +16891,7 @@
                 <a:ea typeface="Calibri" pitchFamily="34" charset="-122"/>
                 <a:cs typeface="Calibri" pitchFamily="34" charset="-120"/>
               </a:rPr>
-              <a:t>exact source contracts</a:t>
+              <a:t>exact contracts</a:t>
             </a:r>
             <a:endParaRPr lang="en-US" sz="1100" dirty="0"/>
           </a:p>
@@ -17105,7 +16930,7 @@
                 <a:ea typeface="Cambria" pitchFamily="34" charset="-122"/>
                 <a:cs typeface="Cambria" pitchFamily="34" charset="-120"/>
               </a:rPr>
-              <a:t>9.5%</a:t>
+              <a:t>92 / 92</a:t>
             </a:r>
             <a:endParaRPr lang="en-US" sz="1500" dirty="0"/>
           </a:p>
@@ -17144,7 +16969,7 @@
                 <a:ea typeface="Calibri" pitchFamily="34" charset="-122"/>
                 <a:cs typeface="Calibri" pitchFamily="34" charset="-120"/>
               </a:rPr>
-              <a:t>degradation bound</a:t>
+              <a:t>calibration groups, bound 0.0498</a:t>
             </a:r>
             <a:endParaRPr lang="en-US" sz="1100" dirty="0"/>
           </a:p>
@@ -17186,7 +17011,7 @@
                 <a:ea typeface="Calibri" pitchFamily="34" charset="-122"/>
                 <a:cs typeface="Calibri" pitchFamily="34" charset="-120"/>
               </a:rPr>
-              <a:t>Groundability permits only two of three reads. Nothing is lost, and the bound is what the sample size allows — not equivalence.</a:t>
+              <a:t>Groundability permits only two of three reads. No accuracy difference is detected; equivalence is not established.</a:t>
             </a:r>
             <a:endParaRPr lang="en-US" sz="1000" dirty="0"/>
           </a:p>
@@ -17305,7 +17130,7 @@
                 <a:ea typeface="Calibri" pitchFamily="34" charset="-122"/>
                 <a:cs typeface="Calibri" pitchFamily="34" charset="-120"/>
               </a:rPr>
-              <a:t>earlier aggressive study, 18 issues</a:t>
+              <a:t>earlier study, α = .10, 18 issues</a:t>
             </a:r>
             <a:endParaRPr lang="en-US" sz="1050" dirty="0"/>
           </a:p>
@@ -17344,7 +17169,7 @@
                 <a:ea typeface="Cambria" pitchFamily="34" charset="-122"/>
                 <a:cs typeface="Cambria" pitchFamily="34" charset="-120"/>
               </a:rPr>
-              <a:t>−75.0%</a:t>
+              <a:t>45 / 45</a:t>
             </a:r>
             <a:endParaRPr lang="en-US" sz="1500" dirty="0"/>
           </a:p>
@@ -17383,7 +17208,7 @@
                 <a:ea typeface="Calibri" pitchFamily="34" charset="-122"/>
                 <a:cs typeface="Calibri" pitchFamily="34" charset="-120"/>
               </a:rPr>
-              <a:t>provider requests</a:t>
+              <a:t>calibration replays passed</a:t>
             </a:r>
             <a:endParaRPr lang="en-US" sz="1100" dirty="0"/>
           </a:p>
@@ -17422,7 +17247,7 @@
                 <a:ea typeface="Cambria" pitchFamily="34" charset="-122"/>
                 <a:cs typeface="Cambria" pitchFamily="34" charset="-120"/>
               </a:rPr>
-              <a:t>−66.0%</a:t>
+              <a:t>18 / 18</a:t>
             </a:r>
             <a:endParaRPr lang="en-US" sz="1500" dirty="0"/>
           </a:p>
@@ -17461,7 +17286,7 @@
                 <a:ea typeface="Calibri" pitchFamily="34" charset="-122"/>
                 <a:cs typeface="Calibri" pitchFamily="34" charset="-120"/>
               </a:rPr>
-              <a:t>total tokens</a:t>
+              <a:t>held-out tool contracts</a:t>
             </a:r>
             <a:endParaRPr lang="en-US" sz="1100" dirty="0"/>
           </a:p>
@@ -17539,7 +17364,7 @@
                 <a:ea typeface="Calibri" pitchFamily="34" charset="-122"/>
                 <a:cs typeface="Calibri" pitchFamily="34" charset="-120"/>
               </a:rPr>
-              <a:t>exact source contracts</a:t>
+              <a:t>exact downstream answers</a:t>
             </a:r>
             <a:endParaRPr lang="en-US" sz="1100" dirty="0"/>
           </a:p>
@@ -17578,7 +17403,7 @@
                 <a:ea typeface="Cambria" pitchFamily="34" charset="-122"/>
                 <a:cs typeface="Cambria" pitchFamily="34" charset="-120"/>
               </a:rPr>
-              <a:t>23.8%</a:t>
+              <a:t>18 / 18</a:t>
             </a:r>
             <a:endParaRPr lang="en-US" sz="1500" dirty="0"/>
           </a:p>
@@ -17617,7 +17442,7 @@
                 <a:ea typeface="Calibri" pitchFamily="34" charset="-122"/>
                 <a:cs typeface="Calibri" pitchFamily="34" charset="-120"/>
               </a:rPr>
-              <a:t>degradation bound</a:t>
+              <a:t>after checked rendering</a:t>
             </a:r>
             <a:endParaRPr lang="en-US" sz="1100" dirty="0"/>
           </a:p>
@@ -17659,7 +17484,7 @@
                 <a:ea typeface="Calibri" pitchFamily="34" charset="-122"/>
                 <a:cs typeface="Calibri" pitchFamily="34" charset="-120"/>
               </a:rPr>
-              <a:t>On issue 6602 the source contained a Markdown link; the compiled continuation dropped the URL and returned only its anchor text.</a:t>
+              <a:t>On issue #6602 the source held a Markdown link; the compiled continuation dropped the URL and returned only its anchor text.</a:t>
             </a:r>
             <a:endParaRPr lang="en-US" sz="1000" dirty="0"/>
           </a:p>
@@ -17810,7 +17635,7 @@
                 <a:ea typeface="Cambria" pitchFamily="34" charset="-122"/>
                 <a:cs typeface="Cambria" pitchFamily="34" charset="-120"/>
               </a:rPr>
-              <a:t>The miss fixes the gate's scope — and motivates a second admission layer</a:t>
+              <a:t>The miss fixes the gate's scope — and motivates a continuation check</a:t>
             </a:r>
             <a:endParaRPr lang="en-US" sz="1300" dirty="0"/>
           </a:p>
@@ -17852,7 +17677,7 @@
                 <a:ea typeface="Calibri" pitchFamily="34" charset="-122"/>
                 <a:cs typeface="Calibri" pitchFamily="34" charset="-120"/>
               </a:rPr>
-              <a:t>Zero calibration violations concern the compiled tool program: grounded arguments, tool outputs, call counts, declared effects. The verifier does not certify the downstream model continuation, so 45/45 clean program replays and a held-out factual miss are compatible. A framework-neutral ContinuationGuard — candidate answer, then an optional deterministic renderer, then baseline, revalidating either output before release — accepts 17 retained answers, detects issue 6602, and checked-renders it to 18/18 in provider-free replay. That establishes detection and rendering on retained records, not live latency, cost, non-inferiority, or cross-domain safety.</a:t>
+              <a:t>Zero replay violations concern the compiled tool program, not the model's answer, so 45/45 clean calibration replays and a held-out factual miss are compatible. A provider-free continuation check, run after the model's answer, passes 17 retained answers unchanged, detects #6602, and checked-renders it to 18/18. That shows detection on retained records, not live quality or safety.</a:t>
             </a:r>
             <a:endParaRPr lang="en-US" sz="1050" dirty="0"/>
           </a:p>
@@ -17894,7 +17719,7 @@
                 <a:ea typeface="Calibri" pitchFamily="34" charset="-122"/>
                 <a:cs typeface="Calibri" pitchFamily="34" charset="-120"/>
               </a:rPr>
-              <a:t>McNemar carries almost no information at these sample sizes — p = 1 in both arms. The informative quantity is the one-sided exact bound on the paired degradation rate: 9.5% for the 30-record arm with zero compiler-only failures, 23.8% for the 18-record arm with its single discordance. H3 is therefore supported for the two-read artifact and not supported for the three-read one. A predeclared non-inferiority margin of a few percentage points would need hundreds of sealed pairs per domain.</a:t>
+              <a:t>The three-read study is excluded from the registered α = .05 headline because it used α = .10 and exposed a continuation error. A recurrence-only optimizer would have shipped the three-read program and accepted the answer.</a:t>
             </a:r>
             <a:endParaRPr lang="en-US" sz="1000" dirty="0"/>
           </a:p>
@@ -19392,7 +19217,7 @@
                 <a:ea typeface="Calibri" pitchFamily="34" charset="-122"/>
                 <a:cs typeface="Calibri" pitchFamily="34" charset="-120"/>
               </a:rPr>
-              <a:t>RESULTS  ·  RQ4  ·  §5.3  ·  TABLE 5</a:t>
+              <a:t>RESULTS  ·  §5.2  ·  TABLES 14 AND 15</a:t>
             </a:r>
             <a:endParaRPr lang="en-US" sz="1050" dirty="0"/>
           </a:p>
@@ -19431,7 +19256,7 @@
                 <a:ea typeface="Cambria" pitchFamily="34" charset="-122"/>
                 <a:cs typeface="Cambria" pitchFamily="34" charset="-120"/>
               </a:rPr>
-              <a:t>Where compaction is partial, and where the saving inverts</a:t>
+              <a:t>Newer records: compile or retire, and one end-to-end certificate</a:t>
             </a:r>
             <a:endParaRPr lang="en-US" sz="2600" dirty="0"/>
           </a:p>
@@ -19530,7 +19355,7 @@
                 <a:ea typeface="Cambria" pitchFamily="34" charset="-122"/>
                 <a:cs typeface="Cambria" pitchFamily="34" charset="-120"/>
               </a:rPr>
-              <a:t>Partial compaction is the correct outcome when a workflow commits</a:t>
+              <a:t>Four of five repositories compile; one retires</a:t>
             </a:r>
             <a:endParaRPr lang="en-US" sz="1150" dirty="0"/>
           </a:p>
@@ -19572,7 +19397,7 @@
                 <a:ea typeface="Calibri" pitchFamily="34" charset="-122"/>
                 <a:cs typeface="Calibri" pitchFamily="34" charset="-120"/>
               </a:rPr>
-              <a:t>Demo E holds two entry-state branches and one observation-dependent branch, and ends every episode in an irreversible write. Model calls fall 7 → 2 rather than 7 → 1: the evidence turns disappear, the decision turn and the write survive, and tokens fall 66.4% at unchanged quality. This is the shape most real operational workflows have, and it is absent from Tiers 1 and 2.</a:t>
+              <a:t>On the two-read PR-outcome task the compiled agent completes 120/120 exact contracts across four repositories. pytorch/pytorch retires at admission: no calibration group is accepted at any threshold.</a:t>
             </a:r>
             <a:endParaRPr lang="en-US" sz="950" dirty="0"/>
           </a:p>
@@ -19655,7 +19480,7 @@
                 <a:ea typeface="Cambria" pitchFamily="34" charset="-122"/>
                 <a:cs typeface="Cambria" pitchFamily="34" charset="-120"/>
               </a:rPr>
-              <a:t>Refusal reproduces the baseline execution, not the baseline invoice</a:t>
+              <a:t>Abstention by composition, not failure</a:t>
             </a:r>
             <a:endParaRPr lang="en-US" sz="1150" dirty="0"/>
           </a:p>
@@ -19697,7 +19522,7 @@
                 <a:ea typeface="Calibri" pitchFamily="34" charset="-122"/>
                 <a:cs typeface="Calibri" pitchFamily="34" charset="-120"/>
               </a:rPr>
-              <a:t>The three negative controls — undeclared MCP effects, a loop-bearing artifact the adapter cannot advance one turn at a time, and an entry state whose intake schema drifted past the guard's pin — all return baseline model-call counts at identical quality, supporting H5. Yet two bill 55.4% and 54.5% more on identical token counts.</a:t>
+              <a:t>Every open-class record abstained on the induced pr.state hull, because discovery held 0–3 open records. A balanced rerun with all classes in discovery dispatches on 180/180 and reaches 180/180.</a:t>
             </a:r>
             <a:endParaRPr lang="en-US" sz="950" dirty="0"/>
           </a:p>
@@ -19780,7 +19605,7 @@
                 <a:ea typeface="Cambria" pitchFamily="34" charset="-122"/>
                 <a:cs typeface="Cambria" pitchFamily="34" charset="-120"/>
               </a:rPr>
-              <a:t>The mechanism is prompt caching</a:t>
+              <a:t>One end-to-end certificate, on fresh pull requests</a:t>
             </a:r>
             <a:endParaRPr lang="en-US" sz="1150" dirty="0"/>
           </a:p>
@@ -19822,7 +19647,7 @@
                 <a:ea typeface="Calibri" pitchFamily="34" charset="-122"/>
                 <a:cs typeface="Calibri" pitchFamily="34" charset="-120"/>
               </a:rPr>
-              <a:t>A seven-turn baseline pays one cache write over a long prefix then reads it six times; a two-turn compacted run pays the write with almost nothing to amortize against. Route specialization is worse one level up, since each route is a distinct cache prefix. Measured cached-input share falls 96% → 38% (E) and 98% → 58% (F).</a:t>
+              <a:t>On 132 pull requests created after the snapshot's last day, the re-derived artifact missed 0 graded task contracts: bound 0.0173 (0.035 on the grid). The draw held open and merged, but no closed-unmerged, pull requests.</a:t>
             </a:r>
             <a:endParaRPr lang="en-US" sz="950" dirty="0"/>
           </a:p>
@@ -19898,7 +19723,7 @@
                 <a:ea typeface="Calibri" pitchFamily="34" charset="-122"/>
                 <a:cs typeface="Calibri" pitchFamily="34" charset="-120"/>
               </a:rPr>
-              <a:t>The direction is what the data supports; the magnitude is not. </a:t>
+              <a:t>Held-out records are newer than discovery but inside the same frozen snapshot.</a:t>
             </a:r>
             <a:r>
               <a:rPr lang="en-US" sz="1050" dirty="0">
@@ -19909,7 +19734,7 @@
                 <a:ea typeface="Calibri" pitchFamily="34" charset="-122"/>
                 <a:cs typeface="Calibri" pitchFamily="34" charset="-120"/>
               </a:rPr>
-              <a:t>Only Demo F clears the noise floor set by the refusing controls, and the effect shrinks as episodes per prefix grow. The residue is a real design constraint eq. (5) does not price: a rarely-exercised route may never amortize its own cache write, and a cache-dominated baseline has far less dollar headroom than its token headroom implies.</a:t>
+              <a:t> The program ran on 80/120 core records, so requests fell 44.4% overall and 66.7% where it dispatched. The hand-written program is more efficient in the core protocol and tied in the balanced rerun.</a:t>
             </a:r>
             <a:endParaRPr lang="en-US" sz="1050" dirty="0"/>
           </a:p>
@@ -20020,7 +19845,7 @@
                 <a:ea typeface="Calibri" pitchFamily="34" charset="-122"/>
                 <a:cs typeface="Calibri" pitchFamily="34" charset="-120"/>
               </a:rPr>
-              <a:t>21</a:t>
+              <a:t>17</a:t>
             </a:r>
             <a:endParaRPr lang="en-US" sz="900" dirty="0"/>
           </a:p>
@@ -20059,7 +19884,7 @@
                 <a:ea typeface="Calibri" pitchFamily="34" charset="-122"/>
                 <a:cs typeface="Calibri" pitchFamily="34" charset="-120"/>
               </a:rPr>
-              <a:t>RESULTS  ·  §5.4  ·  TABLE 6</a:t>
+              <a:t>RESULTS  ·  §5.1  ·  TABLES 1 AND 11</a:t>
             </a:r>
             <a:endParaRPr lang="en-US" sz="1050" dirty="0"/>
           </a:p>
@@ -20098,7 +19923,7 @@
                 <a:ea typeface="Cambria" pitchFamily="34" charset="-122"/>
                 <a:cs typeface="Cambria" pitchFamily="34" charset="-120"/>
               </a:rPr>
-              <a:t>The comparator that matters: one hand-written composite tool</a:t>
+              <a:t>Three GitHub workflows: 90/90 kept, two-thirds fewer calls</a:t>
             </a:r>
             <a:endParaRPr lang="en-US" sz="2600" dirty="0"/>
           </a:p>
@@ -20140,7 +19965,7 @@
                 <a:ea typeface="Calibri" pitchFamily="34" charset="-122"/>
                 <a:cs typeface="Calibri" pitchFamily="34" charset="-120"/>
               </a:rPr>
-              <a:t>A request reduction measured only against an unoptimized agent cannot distinguish “compilation works” from “this workflow was easy.” </a:t>
+              <a:t>Across 90 held-out records the compiled agent satisfies 90/90 exact contracts and the unchanged agent 89/90, with </a:t>
             </a:r>
             <a:r>
               <a:rPr lang="en-US" sz="1250" b="1" dirty="0">
@@ -20151,46 +19976,57 @@
                 <a:ea typeface="Calibri" pitchFamily="34" charset="-122"/>
                 <a:cs typeface="Calibri" pitchFamily="34" charset="-120"/>
               </a:rPr>
-              <a:t>The study therefore reports both against the same baseline — and the result is not in the compiler's favour.</a:t>
-            </a:r>
-            <a:endParaRPr lang="en-US" sz="1250" dirty="0"/>
-          </a:p>
-        </p:txBody>
-      </p:sp>
-      <p:sp>
-        <p:nvSpPr>
-          <p:cNvPr id="7" name="Text 5"/>
-          <p:cNvSpPr/>
-          <p:nvPr/>
-        </p:nvSpPr>
-        <p:spPr>
-          <a:xfrm>
-            <a:off x="640080" y="1719072"/>
-            <a:ext cx="5852160" cy="201168"/>
-          </a:xfrm>
-          <a:prstGeom prst="rect">
-            <a:avLst/>
-          </a:prstGeom>
-          <a:noFill/>
-          <a:ln/>
-        </p:spPr>
-        <p:txBody>
-          <a:bodyPr wrap="square" lIns="0" tIns="0" rIns="0" bIns="0" rtlCol="0" anchor="t"/>
-          <a:lstStyle/>
-          <a:p>
-            <a:pPr marL="0" indent="0">
-              <a:buNone/>
-            </a:pPr>
-            <a:r>
-              <a:rPr lang="en-US" sz="900" b="1" kern="0" spc="80" dirty="0">
-                <a:solidFill>
-                  <a:srgbClr val="1F8A99"/>
+              <a:t>zero compiled-only misses.</a:t>
+            </a:r>
+            <a:r>
+              <a:rPr lang="en-US" sz="1250" dirty="0">
+                <a:solidFill>
+                  <a:srgbClr val="24354F"/>
                 </a:solidFill>
                 <a:latin typeface="Calibri" pitchFamily="34" charset="0"/>
                 <a:ea typeface="Calibri" pitchFamily="34" charset="-122"/>
                 <a:cs typeface="Calibri" pitchFamily="34" charset="-120"/>
               </a:rPr>
-              <a:t>OFFLINE STRESS STUDY — PAIRED REQUEST RATIO VS THE UNCHANGED AGENT, LOWER IS BETTER</a:t>
+              <a:t> Requests fall 66.6%, tokens 63.1%, latency 64.2%, and cost 58.7%.</a:t>
+            </a:r>
+            <a:endParaRPr lang="en-US" sz="1250" dirty="0"/>
+          </a:p>
+        </p:txBody>
+      </p:sp>
+      <p:sp>
+        <p:nvSpPr>
+          <p:cNvPr id="7" name="Text 5"/>
+          <p:cNvSpPr/>
+          <p:nvPr/>
+        </p:nvSpPr>
+        <p:spPr>
+          <a:xfrm>
+            <a:off x="640080" y="1719072"/>
+            <a:ext cx="5852160" cy="201168"/>
+          </a:xfrm>
+          <a:prstGeom prst="rect">
+            <a:avLst/>
+          </a:prstGeom>
+          <a:noFill/>
+          <a:ln/>
+        </p:spPr>
+        <p:txBody>
+          <a:bodyPr wrap="square" lIns="0" tIns="0" rIns="0" bIns="0" rtlCol="0" anchor="t"/>
+          <a:lstStyle/>
+          <a:p>
+            <a:pPr marL="0" indent="0">
+              <a:buNone/>
+            </a:pPr>
+            <a:r>
+              <a:rPr lang="en-US" sz="900" b="1" kern="0" spc="80" dirty="0">
+                <a:solidFill>
+                  <a:srgbClr val="1F8A99"/>
+                </a:solidFill>
+                <a:latin typeface="Calibri" pitchFamily="34" charset="0"/>
+                <a:ea typeface="Calibri" pitchFamily="34" charset="-122"/>
+                <a:cs typeface="Calibri" pitchFamily="34" charset="-120"/>
+              </a:rPr>
+              <a:t>TABLE 11 — REDUCTION VS THE UNCHANGED AGENT, SAME 90 RECORDS (%), HIGHER IS BETTER</a:t>
             </a:r>
             <a:endParaRPr lang="en-US" sz="900" dirty="0"/>
           </a:p>
@@ -20266,7 +20102,7 @@
                           <a:ea typeface="Calibri" pitchFamily="34" charset="-122"/>
                           <a:cs typeface="Calibri" pitchFamily="34" charset="-120"/>
                         </a:rPr>
-                        <a:t>Workload</a:t>
+                        <a:t>Resource</a:t>
                       </a:r>
                       <a:endParaRPr lang="en-US" sz="1000" dirty="0">
                         <a:latin typeface="Calibri" charset="0"/>
@@ -20334,7 +20170,7 @@
                           <a:ea typeface="Calibri" pitchFamily="34" charset="-122"/>
                           <a:cs typeface="Calibri" pitchFamily="34" charset="-120"/>
                         </a:rPr>
-                        <a:t>Macro</a:t>
+                        <a:t>Manual</a:t>
                       </a:r>
                       <a:endParaRPr lang="en-US" sz="1000" dirty="0">
                         <a:latin typeface="Calibri" charset="0"/>
@@ -20470,7 +20306,7 @@
                           <a:ea typeface="Calibri" pitchFamily="34" charset="-122"/>
                           <a:cs typeface="Calibri" pitchFamily="34" charset="-120"/>
                         </a:rPr>
-                        <a:t>Lower</a:t>
+                        <a:t>Better</a:t>
                       </a:r>
                       <a:endParaRPr lang="en-US" sz="1000" dirty="0">
                         <a:latin typeface="Calibri" charset="0"/>
@@ -20537,7 +20373,7 @@
                         <a:buNone/>
                       </a:pPr>
                       <a:r>
-                        <a:rPr lang="en-US" sz="1000" dirty="0">
+                        <a:rPr lang="en-US" sz="1000" dirty="0" b="0">
                           <a:solidFill>
                             <a:srgbClr val="24354F"/>
                           </a:solidFill>
@@ -20545,7 +20381,7 @@
                           <a:ea typeface="Calibri" pitchFamily="34" charset="-122"/>
                           <a:cs typeface="Calibri" pitchFamily="34" charset="-120"/>
                         </a:rPr>
-                        <a:t>Tier-1 support evidence gathering</a:t>
+                        <a:t>Provider requests</a:t>
                       </a:r>
                       <a:endParaRPr lang="en-US" sz="1000" dirty="0">
                         <a:latin typeface="Calibri" charset="0"/>
@@ -20605,15 +20441,15 @@
                         <a:buNone/>
                       </a:pPr>
                       <a:r>
-                        <a:rPr lang="en-US" sz="1000" b="1" dirty="0">
+                        <a:rPr lang="en-US" sz="1000" dirty="0" b="0">
                           <a:solidFill>
-                            <a:srgbClr val="A93B2B"/>
+                            <a:srgbClr val="24354F"/>
                           </a:solidFill>
                           <a:latin typeface="Calibri" pitchFamily="34" charset="0"/>
                           <a:ea typeface="Calibri" pitchFamily="34" charset="-122"/>
                           <a:cs typeface="Calibri" pitchFamily="34" charset="-120"/>
                         </a:rPr>
-                        <a:t>0.726</a:t>
+                        <a:t>66.6</a:t>
                       </a:r>
                       <a:endParaRPr lang="en-US" sz="1000" dirty="0">
                         <a:latin typeface="Calibri" charset="0"/>
@@ -20673,7 +20509,7 @@
                         <a:buNone/>
                       </a:pPr>
                       <a:r>
-                        <a:rPr lang="en-US" sz="1000" dirty="0">
+                        <a:rPr lang="en-US" sz="1000" dirty="0" b="0">
                           <a:solidFill>
                             <a:srgbClr val="24354F"/>
                           </a:solidFill>
@@ -20681,7 +20517,7 @@
                           <a:ea typeface="Calibri" pitchFamily="34" charset="-122"/>
                           <a:cs typeface="Calibri" pitchFamily="34" charset="-120"/>
                         </a:rPr>
-                        <a:t>0.755</a:t>
+                        <a:t>66.6</a:t>
                       </a:r>
                       <a:endParaRPr lang="en-US" sz="1000" dirty="0">
                         <a:latin typeface="Calibri" charset="0"/>
@@ -20741,15 +20577,15 @@
                         <a:buNone/>
                       </a:pPr>
                       <a:r>
-                        <a:rPr lang="en-US" sz="1000" b="1" dirty="0">
+                        <a:rPr lang="en-US" sz="1000" dirty="0" b="0">
                           <a:solidFill>
-                            <a:srgbClr val="A93B2B"/>
+                            <a:srgbClr val="24354F"/>
                           </a:solidFill>
                           <a:latin typeface="Calibri" pitchFamily="34" charset="0"/>
                           <a:ea typeface="Calibri" pitchFamily="34" charset="-122"/>
                           <a:cs typeface="Calibri" pitchFamily="34" charset="-120"/>
                         </a:rPr>
-                        <a:t>macro</a:t>
+                        <a:t>tie</a:t>
                       </a:r>
                       <a:endParaRPr lang="en-US" sz="1000" dirty="0">
                         <a:latin typeface="Calibri" charset="0"/>
@@ -20816,7 +20652,7 @@
                         <a:buNone/>
                       </a:pPr>
                       <a:r>
-                        <a:rPr lang="en-US" sz="1000" dirty="0">
+                        <a:rPr lang="en-US" sz="1000" dirty="0" b="0">
                           <a:solidFill>
                             <a:srgbClr val="24354F"/>
                           </a:solidFill>
@@ -20824,7 +20660,7 @@
                           <a:ea typeface="Calibri" pitchFamily="34" charset="-122"/>
                           <a:cs typeface="Calibri" pitchFamily="34" charset="-120"/>
                         </a:rPr>
-                        <a:t>Permissioned RAG knowledge assistant</a:t>
+                        <a:t>Provider-visible tool interfaces</a:t>
                       </a:r>
                       <a:endParaRPr lang="en-US" sz="1000" dirty="0">
                         <a:latin typeface="Calibri" charset="0"/>
@@ -20884,7 +20720,7 @@
                         <a:buNone/>
                       </a:pPr>
                       <a:r>
-                        <a:rPr lang="en-US" sz="1000" b="1" dirty="0">
+                        <a:rPr lang="en-US" sz="1000" dirty="0" b="1">
                           <a:solidFill>
                             <a:srgbClr val="A93B2B"/>
                           </a:solidFill>
@@ -20892,7 +20728,7 @@
                           <a:ea typeface="Calibri" pitchFamily="34" charset="-122"/>
                           <a:cs typeface="Calibri" pitchFamily="34" charset="-120"/>
                         </a:rPr>
-                        <a:t>0.335</a:t>
+                        <a:t>66.5</a:t>
                       </a:r>
                       <a:endParaRPr lang="en-US" sz="1000" dirty="0">
                         <a:latin typeface="Calibri" charset="0"/>
@@ -20952,7 +20788,7 @@
                         <a:buNone/>
                       </a:pPr>
                       <a:r>
-                        <a:rPr lang="en-US" sz="1000" dirty="0">
+                        <a:rPr lang="en-US" sz="1000" dirty="0" b="0">
                           <a:solidFill>
                             <a:srgbClr val="24354F"/>
                           </a:solidFill>
@@ -20960,7 +20796,7 @@
                           <a:ea typeface="Calibri" pitchFamily="34" charset="-122"/>
                           <a:cs typeface="Calibri" pitchFamily="34" charset="-120"/>
                         </a:rPr>
-                        <a:t>0.718</a:t>
+                        <a:t>44.2</a:t>
                       </a:r>
                       <a:endParaRPr lang="en-US" sz="1000" dirty="0">
                         <a:latin typeface="Calibri" charset="0"/>
@@ -21020,7 +20856,7 @@
                         <a:buNone/>
                       </a:pPr>
                       <a:r>
-                        <a:rPr lang="en-US" sz="1000" b="1" dirty="0">
+                        <a:rPr lang="en-US" sz="1000" dirty="0" b="1">
                           <a:solidFill>
                             <a:srgbClr val="A93B2B"/>
                           </a:solidFill>
@@ -21028,7 +20864,7 @@
                           <a:ea typeface="Calibri" pitchFamily="34" charset="-122"/>
                           <a:cs typeface="Calibri" pitchFamily="34" charset="-120"/>
                         </a:rPr>
-                        <a:t>macro</a:t>
+                        <a:t>manual</a:t>
                       </a:r>
                       <a:endParaRPr lang="en-US" sz="1000" dirty="0">
                         <a:latin typeface="Calibri" charset="0"/>
@@ -21095,7 +20931,7 @@
                         <a:buNone/>
                       </a:pPr>
                       <a:r>
-                        <a:rPr lang="en-US" sz="1000" dirty="0">
+                        <a:rPr lang="en-US" sz="1000" dirty="0" b="0">
                           <a:solidFill>
                             <a:srgbClr val="24354F"/>
                           </a:solidFill>
@@ -21103,7 +20939,7 @@
                           <a:ea typeface="Calibri" pitchFamily="34" charset="-122"/>
                           <a:cs typeface="Calibri" pitchFamily="34" charset="-120"/>
                         </a:rPr>
-                        <a:t>Multi-agent incident triage</a:t>
+                        <a:t>Total tokens</a:t>
                       </a:r>
                       <a:endParaRPr lang="en-US" sz="1000" dirty="0">
                         <a:latin typeface="Calibri" charset="0"/>
@@ -21163,15 +20999,15 @@
                         <a:buNone/>
                       </a:pPr>
                       <a:r>
-                        <a:rPr lang="en-US" sz="1000" dirty="0">
+                        <a:rPr lang="en-US" sz="1000" dirty="0" b="1">
                           <a:solidFill>
-                            <a:srgbClr val="24354F"/>
+                            <a:srgbClr val="A93B2B"/>
                           </a:solidFill>
                           <a:latin typeface="Calibri" pitchFamily="34" charset="0"/>
                           <a:ea typeface="Calibri" pitchFamily="34" charset="-122"/>
                           <a:cs typeface="Calibri" pitchFamily="34" charset="-120"/>
                         </a:rPr>
-                        <a:t>0.922</a:t>
+                        <a:t>71.1</a:t>
                       </a:r>
                       <a:endParaRPr lang="en-US" sz="1000" dirty="0">
                         <a:latin typeface="Calibri" charset="0"/>
@@ -21231,15 +21067,15 @@
                         <a:buNone/>
                       </a:pPr>
                       <a:r>
-                        <a:rPr lang="en-US" sz="1000" b="1" dirty="0">
+                        <a:rPr lang="en-US" sz="1000" dirty="0" b="0">
                           <a:solidFill>
-                            <a:srgbClr val="1F8A99"/>
+                            <a:srgbClr val="24354F"/>
                           </a:solidFill>
                           <a:latin typeface="Calibri" pitchFamily="34" charset="0"/>
                           <a:ea typeface="Calibri" pitchFamily="34" charset="-122"/>
                           <a:cs typeface="Calibri" pitchFamily="34" charset="-120"/>
                         </a:rPr>
-                        <a:t>0.780</a:t>
+                        <a:t>63.1</a:t>
                       </a:r>
                       <a:endParaRPr lang="en-US" sz="1000" dirty="0">
                         <a:latin typeface="Calibri" charset="0"/>
@@ -21299,15 +21135,15 @@
                         <a:buNone/>
                       </a:pPr>
                       <a:r>
-                        <a:rPr lang="en-US" sz="1000" b="1" dirty="0">
+                        <a:rPr lang="en-US" sz="1000" dirty="0" b="1">
                           <a:solidFill>
-                            <a:srgbClr val="1F8A99"/>
+                            <a:srgbClr val="A93B2B"/>
                           </a:solidFill>
                           <a:latin typeface="Calibri" pitchFamily="34" charset="0"/>
                           <a:ea typeface="Calibri" pitchFamily="34" charset="-122"/>
                           <a:cs typeface="Calibri" pitchFamily="34" charset="-120"/>
                         </a:rPr>
-                        <a:t>GAC</a:t>
+                        <a:t>manual</a:t>
                       </a:r>
                       <a:endParaRPr lang="en-US" sz="1000" dirty="0">
                         <a:latin typeface="Calibri" charset="0"/>
@@ -21374,7 +21210,7 @@
                         <a:buNone/>
                       </a:pPr>
                       <a:r>
-                        <a:rPr lang="en-US" sz="1000" dirty="0">
+                        <a:rPr lang="en-US" sz="1000" dirty="0" b="0">
                           <a:solidFill>
                             <a:srgbClr val="24354F"/>
                           </a:solidFill>
@@ -21382,7 +21218,7 @@
                           <a:ea typeface="Calibri" pitchFamily="34" charset="-122"/>
                           <a:cs typeface="Calibri" pitchFamily="34" charset="-120"/>
                         </a:rPr>
-                        <a:t>Multi-tenant MCP ops (negative control)</a:t>
+                        <a:t>Observed wall latency</a:t>
                       </a:r>
                       <a:endParaRPr lang="en-US" sz="1000" dirty="0">
                         <a:latin typeface="Calibri" charset="0"/>
@@ -21442,15 +21278,15 @@
                         <a:buNone/>
                       </a:pPr>
                       <a:r>
-                        <a:rPr lang="en-US" sz="1000" b="1" dirty="0">
+                        <a:rPr lang="en-US" sz="1000" dirty="0" b="0">
                           <a:solidFill>
-                            <a:srgbClr val="A93B2B"/>
+                            <a:srgbClr val="24354F"/>
                           </a:solidFill>
                           <a:latin typeface="Calibri" pitchFamily="34" charset="0"/>
                           <a:ea typeface="Calibri" pitchFamily="34" charset="-122"/>
                           <a:cs typeface="Calibri" pitchFamily="34" charset="-120"/>
                         </a:rPr>
-                        <a:t>0.724</a:t>
+                        <a:t>62.2</a:t>
                       </a:r>
                       <a:endParaRPr lang="en-US" sz="1000" dirty="0">
                         <a:latin typeface="Calibri" charset="0"/>
@@ -21510,15 +21346,15 @@
                         <a:buNone/>
                       </a:pPr>
                       <a:r>
-                        <a:rPr lang="en-US" sz="1000" dirty="0">
+                        <a:rPr lang="en-US" sz="1000" dirty="0" b="1">
                           <a:solidFill>
-                            <a:srgbClr val="24354F"/>
+                            <a:srgbClr val="1F8A99"/>
                           </a:solidFill>
                           <a:latin typeface="Calibri" pitchFamily="34" charset="0"/>
                           <a:ea typeface="Calibri" pitchFamily="34" charset="-122"/>
                           <a:cs typeface="Calibri" pitchFamily="34" charset="-120"/>
                         </a:rPr>
-                        <a:t>1.000</a:t>
+                        <a:t>64.2</a:t>
                       </a:r>
                       <a:endParaRPr lang="en-US" sz="1000" dirty="0">
                         <a:latin typeface="Calibri" charset="0"/>
@@ -21578,15 +21414,15 @@
                         <a:buNone/>
                       </a:pPr>
                       <a:r>
-                        <a:rPr lang="en-US" sz="1000" b="1" dirty="0">
+                        <a:rPr lang="en-US" sz="1000" dirty="0" b="1">
                           <a:solidFill>
-                            <a:srgbClr val="A93B2B"/>
+                            <a:srgbClr val="1F8A99"/>
                           </a:solidFill>
                           <a:latin typeface="Calibri" pitchFamily="34" charset="0"/>
                           <a:ea typeface="Calibri" pitchFamily="34" charset="-122"/>
                           <a:cs typeface="Calibri" pitchFamily="34" charset="-120"/>
                         </a:rPr>
-                        <a:t>macro</a:t>
+                        <a:t>GAC</a:t>
                       </a:r>
                       <a:endParaRPr lang="en-US" sz="1000" dirty="0">
                         <a:latin typeface="Calibri" charset="0"/>
@@ -21653,7 +21489,7 @@
                         <a:buNone/>
                       </a:pPr>
                       <a:r>
-                        <a:rPr lang="en-US" sz="1000" dirty="0">
+                        <a:rPr lang="en-US" sz="1000" dirty="0" b="0">
                           <a:solidFill>
                             <a:srgbClr val="24354F"/>
                           </a:solidFill>
@@ -21661,7 +21497,7 @@
                           <a:ea typeface="Calibri" pitchFamily="34" charset="-122"/>
                           <a:cs typeface="Calibri" pitchFamily="34" charset="-120"/>
                         </a:rPr>
-                        <a:t>Order-fulfillment exception handling</a:t>
+                        <a:t>Estimated cost</a:t>
                       </a:r>
                       <a:endParaRPr lang="en-US" sz="1000" dirty="0">
                         <a:latin typeface="Calibri" charset="0"/>
@@ -21721,15 +21557,15 @@
                         <a:buNone/>
                       </a:pPr>
                       <a:r>
-                        <a:rPr lang="en-US" sz="1000" dirty="0">
+                        <a:rPr lang="en-US" sz="1000" dirty="0" b="1">
                           <a:solidFill>
-                            <a:srgbClr val="24354F"/>
+                            <a:srgbClr val="A93B2B"/>
                           </a:solidFill>
                           <a:latin typeface="Calibri" pitchFamily="34" charset="0"/>
                           <a:ea typeface="Calibri" pitchFamily="34" charset="-122"/>
                           <a:cs typeface="Calibri" pitchFamily="34" charset="-120"/>
                         </a:rPr>
-                        <a:t>0.661</a:t>
+                        <a:t>60.4</a:t>
                       </a:r>
                       <a:endParaRPr lang="en-US" sz="1000" dirty="0">
                         <a:latin typeface="Calibri" charset="0"/>
@@ -21789,15 +21625,15 @@
                         <a:buNone/>
                       </a:pPr>
                       <a:r>
-                        <a:rPr lang="en-US" sz="1000" b="1" dirty="0">
+                        <a:rPr lang="en-US" sz="1000" dirty="0" b="0">
                           <a:solidFill>
-                            <a:srgbClr val="1F8A99"/>
+                            <a:srgbClr val="24354F"/>
                           </a:solidFill>
                           <a:latin typeface="Calibri" pitchFamily="34" charset="0"/>
                           <a:ea typeface="Calibri" pitchFamily="34" charset="-122"/>
                           <a:cs typeface="Calibri" pitchFamily="34" charset="-120"/>
                         </a:rPr>
-                        <a:t>0.642</a:t>
+                        <a:t>58.7</a:t>
                       </a:r>
                       <a:endParaRPr lang="en-US" sz="1000" dirty="0">
                         <a:latin typeface="Calibri" charset="0"/>
@@ -21857,15 +21693,15 @@
                         <a:buNone/>
                       </a:pPr>
                       <a:r>
-                        <a:rPr lang="en-US" sz="1000" b="1" dirty="0">
+                        <a:rPr lang="en-US" sz="1000" dirty="0" b="1">
                           <a:solidFill>
-                            <a:srgbClr val="1F8A99"/>
+                            <a:srgbClr val="A93B2B"/>
                           </a:solidFill>
                           <a:latin typeface="Calibri" pitchFamily="34" charset="0"/>
                           <a:ea typeface="Calibri" pitchFamily="34" charset="-122"/>
                           <a:cs typeface="Calibri" pitchFamily="34" charset="-120"/>
                         </a:rPr>
-                        <a:t>GAC</a:t>
+                        <a:t>manual</a:t>
                       </a:r>
                       <a:endParaRPr lang="en-US" sz="1000" dirty="0">
                         <a:latin typeface="Calibri" charset="0"/>
@@ -22003,7 +21839,7 @@
                 <a:ea typeface="Calibri" pitchFamily="34" charset="-122"/>
                 <a:cs typeface="Calibri" pitchFamily="34" charset="-120"/>
               </a:rPr>
-              <a:t>This substrate is simulated: a scripted policy stands in for the model at each boundary, so these ratios settle that the comparison was run — not the live question. The negative control is the most informative row: the macro takes a 27.6% saving that GAC refuses because the tool effects are undeclared and the catalog fails closed. Whether that is prudence or lost value depends on whether those tools really are read-only — exactly the question a human answers by writing the macro.</a:t>
+              <a:t>Hand-written programs written with full workflow knowledge also reach 90/90. They tie on requests, use fewer interfaces and tokens, cost marginally less, and lose only on latency. The claim is automated discovery and guarded admission, not runtime dominance over code written by someone who already knows the workflow.</a:t>
             </a:r>
             <a:endParaRPr lang="en-US" sz="1000" dirty="0"/>
           </a:p>
@@ -22154,7 +21990,7 @@
                 <a:ea typeface="Cambria" pitchFamily="34" charset="-122"/>
                 <a:cs typeface="Cambria" pitchFamily="34" charset="-120"/>
               </a:rPr>
-              <a:t>Write the composite tool when…</a:t>
+              <a:t>Write the program by hand when…</a:t>
             </a:r>
             <a:endParaRPr lang="en-US" sz="1300" dirty="0"/>
           </a:p>
@@ -22573,7 +22409,7 @@
                 <a:ea typeface="Calibri" pitchFamily="34" charset="-122"/>
                 <a:cs typeface="Calibri" pitchFamily="34" charset="-120"/>
               </a:rPr>
-              <a:t>MECHANISTIC EXPLANATION AND A TESTABLE HYPOTHESIS</a:t>
+              <a:t>WHAT THE PRIMARY RESULT DOES AND DOES NOT ESTABLISH</a:t>
             </a:r>
             <a:endParaRPr lang="en-US" sz="950" dirty="0"/>
           </a:p>
@@ -22615,1205 +22451,7 @@
                 <a:ea typeface="Calibri" pitchFamily="34" charset="-122"/>
                 <a:cs typeface="Calibri" pitchFamily="34" charset="-120"/>
               </a:rPr>
-              <a:t>The macro is allowed to redesign the application interface: it fuses three reads, returns a task-specific sufficient record, and exposes one schema. The compiler is constrained to preserve existing interfaces, provenance, intermediate evidence, and fallback semantics — its groundability proof permits only a two-read prefix, and all three logical reads remain necessary. Hypothesis: manual macros dominate on stable, low-entropy workflows, while guarded compilation earns its cost across branching or changing families for which manual discovery and maintenance do not amortize. Live confirmation on 30 real issues: the macro matches the compiler's request count, uses one tool call instead of three, and beats it on tokens (−58.2% vs −39.5%) and estimated cost (−37.5% vs −32.0%); only observed wall latency favours the compiler, and that paired interval crosses zero.</a:t>
-            </a:r>
-            <a:endParaRPr lang="en-US" sz="1000" dirty="0"/>
-          </a:p>
-        </p:txBody>
-      </p:sp>
-    </p:spTree>
-  </p:cSld>
-  <p:clrMapOvr>
-    <a:masterClrMapping/>
-  </p:clrMapOvr>
-</p:sld>
-</file>
-
-<file path=ppt/slides/slide22.xml><?xml version="1.0" encoding="utf-8"?>
-<p:sld xmlns:a="http://schemas.openxmlformats.org/drawingml/2006/main" xmlns:r="http://schemas.openxmlformats.org/officeDocument/2006/relationships" xmlns:p="http://schemas.openxmlformats.org/presentationml/2006/main">
-  <p:cSld name="Slide 22">
-    <p:bg>
-      <p:bgPr>
-        <a:solidFill>
-          <a:srgbClr val="FFFFFF"/>
-        </a:solidFill>
-        <a:effectLst/>
-      </p:bgPr>
-    </p:bg>
-    <p:spTree>
-      <p:nvGrpSpPr>
-        <p:cNvPr id="1" name=""/>
-        <p:cNvGrpSpPr/>
-        <p:nvPr/>
-      </p:nvGrpSpPr>
-      <p:grpSpPr>
-        <a:xfrm>
-          <a:off x="0" y="0"/>
-          <a:ext cx="0" cy="0"/>
-          <a:chOff x="0" y="0"/>
-          <a:chExt cx="0" cy="0"/>
-        </a:xfrm>
-      </p:grpSpPr>
-      <p:sp>
-        <p:nvSpPr>
-          <p:cNvPr id="2" name="Text 0"/>
-          <p:cNvSpPr/>
-          <p:nvPr/>
-        </p:nvSpPr>
-        <p:spPr>
-          <a:xfrm>
-            <a:off x="640080" y="6345936"/>
-            <a:ext cx="5486400" cy="256032"/>
-          </a:xfrm>
-          <a:prstGeom prst="rect">
-            <a:avLst/>
-          </a:prstGeom>
-          <a:noFill/>
-          <a:ln/>
-        </p:spPr>
-        <p:txBody>
-          <a:bodyPr wrap="square" lIns="0" tIns="0" rIns="0" bIns="0" rtlCol="0" anchor="t"/>
-          <a:lstStyle/>
-          <a:p>
-            <a:pPr marL="0" indent="0">
-              <a:buNone/>
-            </a:pPr>
-            <a:r>
-              <a:rPr lang="en-US" sz="900" kern="0" spc="100" dirty="0">
-                <a:solidFill>
-                  <a:srgbClr val="A3B2C4"/>
-                </a:solidFill>
-                <a:latin typeface="Calibri" pitchFamily="34" charset="0"/>
-                <a:ea typeface="Calibri" pitchFamily="34" charset="-122"/>
-                <a:cs typeface="Calibri" pitchFamily="34" charset="-120"/>
-              </a:rPr>
-              <a:t>Guarded Agentic Compaction</a:t>
-            </a:r>
-            <a:endParaRPr lang="en-US" sz="900" dirty="0"/>
-          </a:p>
-        </p:txBody>
-      </p:sp>
-      <p:sp>
-        <p:nvSpPr>
-          <p:cNvPr id="3" name="Text 1"/>
-          <p:cNvSpPr/>
-          <p:nvPr/>
-        </p:nvSpPr>
-        <p:spPr>
-          <a:xfrm>
-            <a:off x="10637215" y="6345936"/>
-            <a:ext cx="914400" cy="256032"/>
-          </a:xfrm>
-          <a:prstGeom prst="rect">
-            <a:avLst/>
-          </a:prstGeom>
-          <a:noFill/>
-          <a:ln/>
-        </p:spPr>
-        <p:txBody>
-          <a:bodyPr wrap="square" lIns="0" tIns="0" rIns="0" bIns="0" rtlCol="0" anchor="t"/>
-          <a:lstStyle/>
-          <a:p>
-            <a:pPr marL="0" indent="0" algn="r">
-              <a:buNone/>
-            </a:pPr>
-            <a:r>
-              <a:rPr lang="en-US" sz="900" dirty="0">
-                <a:solidFill>
-                  <a:srgbClr val="A3B2C4"/>
-                </a:solidFill>
-                <a:latin typeface="Calibri" pitchFamily="34" charset="0"/>
-                <a:ea typeface="Calibri" pitchFamily="34" charset="-122"/>
-                <a:cs typeface="Calibri" pitchFamily="34" charset="-120"/>
-              </a:rPr>
-              <a:t>22</a:t>
-            </a:r>
-            <a:endParaRPr lang="en-US" sz="900" dirty="0"/>
-          </a:p>
-        </p:txBody>
-      </p:sp>
-      <p:sp>
-        <p:nvSpPr>
-          <p:cNvPr id="4" name="Text 2"/>
-          <p:cNvSpPr/>
-          <p:nvPr/>
-        </p:nvSpPr>
-        <p:spPr>
-          <a:xfrm>
-            <a:off x="640080" y="384048"/>
-            <a:ext cx="10911535" cy="237744"/>
-          </a:xfrm>
-          <a:prstGeom prst="rect">
-            <a:avLst/>
-          </a:prstGeom>
-          <a:noFill/>
-          <a:ln/>
-        </p:spPr>
-        <p:txBody>
-          <a:bodyPr wrap="square" lIns="0" tIns="0" rIns="0" bIns="0" rtlCol="0" anchor="t"/>
-          <a:lstStyle/>
-          <a:p>
-            <a:pPr marL="0" indent="0">
-              <a:buNone/>
-            </a:pPr>
-            <a:r>
-              <a:rPr lang="en-US" sz="1050" b="1" kern="0" spc="180" dirty="0">
-                <a:solidFill>
-                  <a:srgbClr val="1F8A99"/>
-                </a:solidFill>
-                <a:latin typeface="Calibri" pitchFamily="34" charset="0"/>
-                <a:ea typeface="Calibri" pitchFamily="34" charset="-122"/>
-                <a:cs typeface="Calibri" pitchFamily="34" charset="-120"/>
-              </a:rPr>
-              <a:t>RESULTS  ·  RQ5  ·  §3.4 AND §5.5  ·  TABLE 7</a:t>
-            </a:r>
-            <a:endParaRPr lang="en-US" sz="1050" dirty="0"/>
-          </a:p>
-        </p:txBody>
-      </p:sp>
-      <p:sp>
-        <p:nvSpPr>
-          <p:cNvPr id="5" name="Text 3"/>
-          <p:cNvSpPr/>
-          <p:nvPr/>
-        </p:nvSpPr>
-        <p:spPr>
-          <a:xfrm>
-            <a:off x="640080" y="658368"/>
-            <a:ext cx="10911535" cy="502920"/>
-          </a:xfrm>
-          <a:prstGeom prst="rect">
-            <a:avLst/>
-          </a:prstGeom>
-          <a:noFill/>
-          <a:ln/>
-        </p:spPr>
-        <p:txBody>
-          <a:bodyPr wrap="square" lIns="0" tIns="0" rIns="0" bIns="0" rtlCol="0" anchor="t"/>
-          <a:lstStyle/>
-          <a:p>
-            <a:pPr marL="0" indent="0">
-              <a:buNone/>
-            </a:pPr>
-            <a:r>
-              <a:rPr lang="en-US" sz="2600" b="1" dirty="0">
-                <a:solidFill>
-                  <a:srgbClr val="0E1E3A"/>
-                </a:solidFill>
-                <a:latin typeface="Cambria" pitchFamily="34" charset="0"/>
-                <a:ea typeface="Cambria" pitchFamily="34" charset="-122"/>
-                <a:cs typeface="Cambria" pitchFamily="34" charset="-120"/>
-              </a:rPr>
-              <a:t>Risk-bounded selection over measured actions only</a:t>
-            </a:r>
-            <a:endParaRPr lang="en-US" sz="2600" dirty="0"/>
-          </a:p>
-        </p:txBody>
-      </p:sp>
-      <p:sp>
-        <p:nvSpPr>
-          <p:cNvPr id="6" name="Shape 4"/>
-          <p:cNvSpPr/>
-          <p:nvPr/>
-        </p:nvSpPr>
-        <p:spPr>
-          <a:xfrm>
-            <a:off x="640080" y="1170432"/>
-            <a:ext cx="5943600" cy="1298448"/>
-          </a:xfrm>
-          <a:prstGeom prst="roundRect">
-            <a:avLst>
-              <a:gd name="adj" fmla="val 3521"/>
-            </a:avLst>
-          </a:prstGeom>
-          <a:solidFill>
-            <a:srgbClr val="F5F9FC"/>
-          </a:solidFill>
-          <a:ln w="9525">
-            <a:solidFill>
-              <a:srgbClr val="D5E0EB"/>
-            </a:solidFill>
-            <a:prstDash val="solid"/>
-          </a:ln>
-        </p:spPr>
-        <p:txBody>
-          <a:bodyPr/>
-          <a:lstStyle/>
-          <a:p>
-            <a:endParaRPr lang="en-US"/>
-          </a:p>
-        </p:txBody>
-      </p:sp>
-      <p:pic>
-        <p:nvPicPr>
-          <p:cNvPr id="7" name="Image 0" descr="/home/claude/deck/eq/eq9.png"/>
-          <p:cNvPicPr>
-            <a:picLocks noChangeAspect="1"/>
-          </p:cNvPicPr>
-          <p:nvPr/>
-        </p:nvPicPr>
-        <p:blipFill>
-          <a:blip r:embed="rId3"/>
-          <a:stretch>
-            <a:fillRect/>
-          </a:stretch>
-        </p:blipFill>
-        <p:spPr>
-          <a:xfrm>
-            <a:off x="877824" y="1316736"/>
-            <a:ext cx="3803904" cy="402336"/>
-          </a:xfrm>
-          <a:prstGeom prst="rect">
-            <a:avLst/>
-          </a:prstGeom>
-        </p:spPr>
-      </p:pic>
-      <p:sp>
-        <p:nvSpPr>
-          <p:cNvPr id="8" name="Text 5"/>
-          <p:cNvSpPr/>
-          <p:nvPr/>
-        </p:nvSpPr>
-        <p:spPr>
-          <a:xfrm>
-            <a:off x="877824" y="1792224"/>
-            <a:ext cx="5468112" cy="566928"/>
-          </a:xfrm>
-          <a:prstGeom prst="rect">
-            <a:avLst/>
-          </a:prstGeom>
-          <a:noFill/>
-          <a:ln/>
-        </p:spPr>
-        <p:txBody>
-          <a:bodyPr wrap="square" lIns="0" tIns="0" rIns="0" bIns="0" rtlCol="0" anchor="t"/>
-          <a:lstStyle/>
-          <a:p>
-            <a:pPr marL="0" indent="0">
-              <a:lnSpc>
-                <a:spcPct val="105000"/>
-              </a:lnSpc>
-              <a:buNone/>
-            </a:pPr>
-            <a:r>
-              <a:rPr lang="en-US" sz="1000" dirty="0">
-                <a:solidFill>
-                  <a:srgbClr val="5A6B84"/>
-                </a:solidFill>
-                <a:latin typeface="Calibri" pitchFamily="34" charset="0"/>
-                <a:ea typeface="Calibri" pitchFamily="34" charset="-122"/>
-                <a:cs typeface="Calibri" pitchFamily="34" charset="-120"/>
-              </a:rPr>
-              <a:t>Each metric's paired reduction is one minus the candidate's cost over the baseline's, weighted 0.35 cost, 0.25 latency, 0.20 tokens, 0.20 tool calls. A quality violation is recorded whenever the candidate's task contract fails, a regret event whenever U g (a) ≤ U min. Repeated executions of one issue are averaged within that issue and never increase the independent-group count.</a:t>
-            </a:r>
-            <a:endParaRPr lang="en-US" sz="1000" dirty="0"/>
-          </a:p>
-        </p:txBody>
-      </p:sp>
-      <p:sp>
-        <p:nvSpPr>
-          <p:cNvPr id="9" name="Text 6"/>
-          <p:cNvSpPr/>
-          <p:nvPr/>
-        </p:nvSpPr>
-        <p:spPr>
-          <a:xfrm>
-            <a:off x="5888736" y="1316736"/>
-            <a:ext cx="493776" cy="274320"/>
-          </a:xfrm>
-          <a:prstGeom prst="rect">
-            <a:avLst/>
-          </a:prstGeom>
-          <a:noFill/>
-          <a:ln/>
-        </p:spPr>
-        <p:txBody>
-          <a:bodyPr wrap="square" lIns="0" tIns="0" rIns="0" bIns="0" rtlCol="0" anchor="t"/>
-          <a:lstStyle/>
-          <a:p>
-            <a:pPr marL="0" indent="0" algn="r">
-              <a:buNone/>
-            </a:pPr>
-            <a:r>
-              <a:rPr lang="en-US" sz="1000" dirty="0">
-                <a:solidFill>
-                  <a:srgbClr val="56B3BE"/>
-                </a:solidFill>
-                <a:latin typeface="Calibri" pitchFamily="34" charset="0"/>
-                <a:ea typeface="Calibri" pitchFamily="34" charset="-122"/>
-                <a:cs typeface="Calibri" pitchFamily="34" charset="-120"/>
-              </a:rPr>
-              <a:t>(9)</a:t>
-            </a:r>
-            <a:endParaRPr lang="en-US" sz="1000" dirty="0"/>
-          </a:p>
-        </p:txBody>
-      </p:sp>
-      <p:sp>
-        <p:nvSpPr>
-          <p:cNvPr id="10" name="Shape 7"/>
-          <p:cNvSpPr/>
-          <p:nvPr/>
-        </p:nvSpPr>
-        <p:spPr>
-          <a:xfrm>
-            <a:off x="640080" y="2560320"/>
-            <a:ext cx="5943600" cy="1188720"/>
-          </a:xfrm>
-          <a:prstGeom prst="roundRect">
-            <a:avLst>
-              <a:gd name="adj" fmla="val 3846"/>
-            </a:avLst>
-          </a:prstGeom>
-          <a:solidFill>
-            <a:srgbClr val="F5F9FC"/>
-          </a:solidFill>
-          <a:ln w="9525">
-            <a:solidFill>
-              <a:srgbClr val="D5E0EB"/>
-            </a:solidFill>
-            <a:prstDash val="solid"/>
-          </a:ln>
-        </p:spPr>
-        <p:txBody>
-          <a:bodyPr/>
-          <a:lstStyle/>
-          <a:p>
-            <a:endParaRPr lang="en-US"/>
-          </a:p>
-        </p:txBody>
-      </p:sp>
-      <p:pic>
-        <p:nvPicPr>
-          <p:cNvPr id="11" name="Image 1" descr="/home/claude/deck/eq/eq10.png"/>
-          <p:cNvPicPr>
-            <a:picLocks noChangeAspect="1"/>
-          </p:cNvPicPr>
-          <p:nvPr/>
-        </p:nvPicPr>
-        <p:blipFill>
-          <a:blip r:embed="rId4"/>
-          <a:stretch>
-            <a:fillRect/>
-          </a:stretch>
-        </p:blipFill>
-        <p:spPr>
-          <a:xfrm>
-            <a:off x="877824" y="2724978"/>
-            <a:ext cx="4901184" cy="310763"/>
-          </a:xfrm>
-          <a:prstGeom prst="rect">
-            <a:avLst/>
-          </a:prstGeom>
-        </p:spPr>
-      </p:pic>
-      <p:sp>
-        <p:nvSpPr>
-          <p:cNvPr id="12" name="Text 8"/>
-          <p:cNvSpPr/>
-          <p:nvPr/>
-        </p:nvSpPr>
-        <p:spPr>
-          <a:xfrm>
-            <a:off x="877824" y="3127248"/>
-            <a:ext cx="5468112" cy="512064"/>
-          </a:xfrm>
-          <a:prstGeom prst="rect">
-            <a:avLst/>
-          </a:prstGeom>
-          <a:noFill/>
-          <a:ln/>
-        </p:spPr>
-        <p:txBody>
-          <a:bodyPr wrap="square" lIns="0" tIns="0" rIns="0" bIns="0" rtlCol="0" anchor="t"/>
-          <a:lstStyle/>
-          <a:p>
-            <a:pPr marL="0" indent="0">
-              <a:lnSpc>
-                <a:spcPct val="105000"/>
-              </a:lnSpc>
-              <a:buNone/>
-            </a:pPr>
-            <a:r>
-              <a:rPr lang="en-US" sz="1000" dirty="0">
-                <a:solidFill>
-                  <a:srgbClr val="5A6B84"/>
-                </a:solidFill>
-                <a:latin typeface="Calibri" pitchFamily="34" charset="0"/>
-                <a:ea typeface="Calibri" pitchFamily="34" charset="-122"/>
-                <a:cs typeface="Calibri" pitchFamily="34" charset="-120"/>
-              </a:rPr>
-              <a:t>One-sided Clopper–Pearson bounds on both endpoints, with the confidence budget split across both bounds and all compared actions. The selector returns arg max U over the admitted set, or the baseline if it is empty. Macros default to human review: the library returns a decision record, evidence, and rationale — never generated application code.</a:t>
-            </a:r>
-            <a:endParaRPr lang="en-US" sz="1000" dirty="0"/>
-          </a:p>
-        </p:txBody>
-      </p:sp>
-      <p:sp>
-        <p:nvSpPr>
-          <p:cNvPr id="13" name="Text 9"/>
-          <p:cNvSpPr/>
-          <p:nvPr/>
-        </p:nvSpPr>
-        <p:spPr>
-          <a:xfrm>
-            <a:off x="5888736" y="2706624"/>
-            <a:ext cx="493776" cy="274320"/>
-          </a:xfrm>
-          <a:prstGeom prst="rect">
-            <a:avLst/>
-          </a:prstGeom>
-          <a:noFill/>
-          <a:ln/>
-        </p:spPr>
-        <p:txBody>
-          <a:bodyPr wrap="square" lIns="0" tIns="0" rIns="0" bIns="0" rtlCol="0" anchor="t"/>
-          <a:lstStyle/>
-          <a:p>
-            <a:pPr marL="0" indent="0" algn="r">
-              <a:buNone/>
-            </a:pPr>
-            <a:r>
-              <a:rPr lang="en-US" sz="1000" dirty="0">
-                <a:solidFill>
-                  <a:srgbClr val="56B3BE"/>
-                </a:solidFill>
-                <a:latin typeface="Calibri" pitchFamily="34" charset="0"/>
-                <a:ea typeface="Calibri" pitchFamily="34" charset="-122"/>
-                <a:cs typeface="Calibri" pitchFamily="34" charset="-120"/>
-              </a:rPr>
-              <a:t>(10)</a:t>
-            </a:r>
-            <a:endParaRPr lang="en-US" sz="1000" dirty="0"/>
-          </a:p>
-        </p:txBody>
-      </p:sp>
-      <p:graphicFrame>
-        <p:nvGraphicFramePr>
-          <p:cNvPr id="14" name="Chart 0"/>
-          <p:cNvGraphicFramePr/>
-          <p:nvPr/>
-        </p:nvGraphicFramePr>
-        <p:xfrm>
-          <a:off x="640080" y="3877056"/>
-          <a:ext cx="5943600" cy="1463040"/>
-        </p:xfrm>
-        <a:graphic>
-          <a:graphicData uri="http://schemas.openxmlformats.org/drawingml/2006/chart">
-            <c:chart xmlns:c="http://schemas.openxmlformats.org/drawingml/2006/chart" xmlns:r="http://schemas.openxmlformats.org/officeDocument/2006/relationships" r:id="rId5"/>
-          </a:graphicData>
-        </a:graphic>
-      </p:graphicFrame>
-      <p:sp>
-        <p:nvSpPr>
-          <p:cNvPr id="15" name="Text 10"/>
-          <p:cNvSpPr/>
-          <p:nvPr/>
-        </p:nvSpPr>
-        <p:spPr>
-          <a:xfrm>
-            <a:off x="640080" y="5431536"/>
-            <a:ext cx="5943600" cy="566928"/>
-          </a:xfrm>
-          <a:prstGeom prst="rect">
-            <a:avLst/>
-          </a:prstGeom>
-          <a:noFill/>
-          <a:ln/>
-        </p:spPr>
-        <p:txBody>
-          <a:bodyPr wrap="square" lIns="0" tIns="0" rIns="0" bIns="0" rtlCol="0" anchor="t"/>
-          <a:lstStyle/>
-          <a:p>
-            <a:pPr marL="0" indent="0">
-              <a:lnSpc>
-                <a:spcPct val="105000"/>
-              </a:lnSpc>
-              <a:buNone/>
-            </a:pPr>
-            <a:r>
-              <a:rPr lang="en-US" sz="1000" dirty="0">
-                <a:solidFill>
-                  <a:srgbClr val="5A6B84"/>
-                </a:solidFill>
-                <a:latin typeface="Calibri" pitchFamily="34" charset="0"/>
-                <a:ea typeface="Calibri" pitchFamily="34" charset="-122"/>
-                <a:cs typeface="Calibri" pitchFamily="34" charset="-120"/>
-              </a:rPr>
-              <a:t>Both actions admitted: zero quality failures, zero non-positive-utility groups, exact upper bounds 0.136 against the pilot's 15% limit — intentionally looser than the compiler's 5% registered-contract bound and not to be conflated with it.</a:t>
-            </a:r>
-            <a:endParaRPr lang="en-US" sz="1000" dirty="0"/>
-          </a:p>
-        </p:txBody>
-      </p:sp>
-      <p:sp>
-        <p:nvSpPr>
-          <p:cNvPr id="16" name="Shape 11"/>
-          <p:cNvSpPr/>
-          <p:nvPr/>
-        </p:nvSpPr>
-        <p:spPr>
-          <a:xfrm>
-            <a:off x="6949440" y="1170432"/>
-            <a:ext cx="4602175" cy="3346704"/>
-          </a:xfrm>
-          <a:prstGeom prst="roundRect">
-            <a:avLst>
-              <a:gd name="adj" fmla="val 1366"/>
-            </a:avLst>
-          </a:prstGeom>
-          <a:solidFill>
-            <a:srgbClr val="E8F4F5"/>
-          </a:solidFill>
-          <a:ln w="9525">
-            <a:solidFill>
-              <a:srgbClr val="CFE4E7"/>
-            </a:solidFill>
-            <a:prstDash val="solid"/>
-          </a:ln>
-          <a:effectLst>
-            <a:outerShdw blurRad="114300" dist="17780" dir="5400000" algn="bl" rotWithShape="0">
-              <a:srgbClr val="94A6BC">
-                <a:alpha val="15000"/>
-              </a:srgbClr>
-            </a:outerShdw>
-          </a:effectLst>
-        </p:spPr>
-        <p:txBody>
-          <a:bodyPr/>
-          <a:lstStyle/>
-          <a:p>
-            <a:endParaRPr lang="en-US"/>
-          </a:p>
-        </p:txBody>
-      </p:sp>
-      <p:sp>
-        <p:nvSpPr>
-          <p:cNvPr id="17" name="Text 12"/>
-          <p:cNvSpPr/>
-          <p:nvPr/>
-        </p:nvSpPr>
-        <p:spPr>
-          <a:xfrm>
-            <a:off x="7205472" y="1316736"/>
-            <a:ext cx="4090111" cy="365760"/>
-          </a:xfrm>
-          <a:prstGeom prst="rect">
-            <a:avLst/>
-          </a:prstGeom>
-          <a:noFill/>
-          <a:ln/>
-        </p:spPr>
-        <p:txBody>
-          <a:bodyPr wrap="square" lIns="0" tIns="0" rIns="0" bIns="0" rtlCol="0" anchor="t"/>
-          <a:lstStyle/>
-          <a:p>
-            <a:pPr marL="0" indent="0">
-              <a:lnSpc>
-                <a:spcPct val="105000"/>
-              </a:lnSpc>
-              <a:buNone/>
-            </a:pPr>
-            <a:r>
-              <a:rPr lang="en-US" sz="950" b="1" kern="0" spc="100" dirty="0">
-                <a:solidFill>
-                  <a:srgbClr val="1F8A99"/>
-                </a:solidFill>
-                <a:latin typeface="Calibri" pitchFamily="34" charset="0"/>
-                <a:ea typeface="Calibri" pitchFamily="34" charset="-122"/>
-                <a:cs typeface="Calibri" pitchFamily="34" charset="-120"/>
-              </a:rPr>
-              <a:t>PROSPECTIVE TEST — 12 FRESH PUBLIC ISSUES, DECISION AND HASH FROZEN FIRST</a:t>
-            </a:r>
-            <a:endParaRPr lang="en-US" sz="950" dirty="0"/>
-          </a:p>
-        </p:txBody>
-      </p:sp>
-      <p:sp>
-        <p:nvSpPr>
-          <p:cNvPr id="18" name="Text 13"/>
-          <p:cNvSpPr/>
-          <p:nvPr/>
-        </p:nvSpPr>
-        <p:spPr>
-          <a:xfrm>
-            <a:off x="7205472" y="1773936"/>
-            <a:ext cx="1234440" cy="329184"/>
-          </a:xfrm>
-          <a:prstGeom prst="rect">
-            <a:avLst/>
-          </a:prstGeom>
-          <a:noFill/>
-          <a:ln/>
-        </p:spPr>
-        <p:txBody>
-          <a:bodyPr wrap="square" lIns="0" tIns="0" rIns="0" bIns="0" rtlCol="0" anchor="ctr"/>
-          <a:lstStyle/>
-          <a:p>
-            <a:pPr marL="0" indent="0">
-              <a:buNone/>
-            </a:pPr>
-            <a:r>
-              <a:rPr lang="en-US" sz="1500" b="1" dirty="0">
-                <a:solidFill>
-                  <a:srgbClr val="1F8A99"/>
-                </a:solidFill>
-                <a:latin typeface="Cambria" pitchFamily="34" charset="0"/>
-                <a:ea typeface="Cambria" pitchFamily="34" charset="-122"/>
-                <a:cs typeface="Cambria" pitchFamily="34" charset="-120"/>
-              </a:rPr>
-              <a:t>12 / 12</a:t>
-            </a:r>
-            <a:endParaRPr lang="en-US" sz="1500" dirty="0"/>
-          </a:p>
-        </p:txBody>
-      </p:sp>
-      <p:sp>
-        <p:nvSpPr>
-          <p:cNvPr id="19" name="Text 14"/>
-          <p:cNvSpPr/>
-          <p:nvPr/>
-        </p:nvSpPr>
-        <p:spPr>
-          <a:xfrm>
-            <a:off x="8549640" y="1773936"/>
-            <a:ext cx="2727655" cy="329184"/>
-          </a:xfrm>
-          <a:prstGeom prst="rect">
-            <a:avLst/>
-          </a:prstGeom>
-          <a:noFill/>
-          <a:ln/>
-        </p:spPr>
-        <p:txBody>
-          <a:bodyPr wrap="square" lIns="0" tIns="0" rIns="0" bIns="0" rtlCol="0" anchor="ctr"/>
-          <a:lstStyle/>
-          <a:p>
-            <a:pPr marL="0" indent="0">
-              <a:buNone/>
-            </a:pPr>
-            <a:r>
-              <a:rPr lang="en-US" sz="1050" dirty="0">
-                <a:solidFill>
-                  <a:srgbClr val="24354F"/>
-                </a:solidFill>
-                <a:latin typeface="Calibri" pitchFamily="34" charset="0"/>
-                <a:ea typeface="Calibri" pitchFamily="34" charset="-122"/>
-                <a:cs typeface="Calibri" pitchFamily="34" charset="-120"/>
-              </a:rPr>
-              <a:t>exact factual and full task contracts</a:t>
-            </a:r>
-            <a:endParaRPr lang="en-US" sz="1050" dirty="0"/>
-          </a:p>
-        </p:txBody>
-      </p:sp>
-      <p:sp>
-        <p:nvSpPr>
-          <p:cNvPr id="20" name="Text 15"/>
-          <p:cNvSpPr/>
-          <p:nvPr/>
-        </p:nvSpPr>
-        <p:spPr>
-          <a:xfrm>
-            <a:off x="7205472" y="2212848"/>
-            <a:ext cx="1234440" cy="329184"/>
-          </a:xfrm>
-          <a:prstGeom prst="rect">
-            <a:avLst/>
-          </a:prstGeom>
-          <a:noFill/>
-          <a:ln/>
-        </p:spPr>
-        <p:txBody>
-          <a:bodyPr wrap="square" lIns="0" tIns="0" rIns="0" bIns="0" rtlCol="0" anchor="ctr"/>
-          <a:lstStyle/>
-          <a:p>
-            <a:pPr marL="0" indent="0">
-              <a:buNone/>
-            </a:pPr>
-            <a:r>
-              <a:rPr lang="en-US" sz="1500" b="1" dirty="0">
-                <a:solidFill>
-                  <a:srgbClr val="0E1E3A"/>
-                </a:solidFill>
-                <a:latin typeface="Cambria" pitchFamily="34" charset="0"/>
-                <a:ea typeface="Cambria" pitchFamily="34" charset="-122"/>
-                <a:cs typeface="Cambria" pitchFamily="34" charset="-120"/>
-              </a:rPr>
-              <a:t>−50.0%</a:t>
-            </a:r>
-            <a:endParaRPr lang="en-US" sz="1500" dirty="0"/>
-          </a:p>
-        </p:txBody>
-      </p:sp>
-      <p:sp>
-        <p:nvSpPr>
-          <p:cNvPr id="21" name="Text 16"/>
-          <p:cNvSpPr/>
-          <p:nvPr/>
-        </p:nvSpPr>
-        <p:spPr>
-          <a:xfrm>
-            <a:off x="8549640" y="2212848"/>
-            <a:ext cx="2727655" cy="329184"/>
-          </a:xfrm>
-          <a:prstGeom prst="rect">
-            <a:avLst/>
-          </a:prstGeom>
-          <a:noFill/>
-          <a:ln/>
-        </p:spPr>
-        <p:txBody>
-          <a:bodyPr wrap="square" lIns="0" tIns="0" rIns="0" bIns="0" rtlCol="0" anchor="ctr"/>
-          <a:lstStyle/>
-          <a:p>
-            <a:pPr marL="0" indent="0">
-              <a:buNone/>
-            </a:pPr>
-            <a:r>
-              <a:rPr lang="en-US" sz="1050" dirty="0">
-                <a:solidFill>
-                  <a:srgbClr val="24354F"/>
-                </a:solidFill>
-                <a:latin typeface="Calibri" pitchFamily="34" charset="0"/>
-                <a:ea typeface="Calibri" pitchFamily="34" charset="-122"/>
-                <a:cs typeface="Calibri" pitchFamily="34" charset="-120"/>
-              </a:rPr>
-              <a:t>provider requests (4 → 2)</a:t>
-            </a:r>
-            <a:endParaRPr lang="en-US" sz="1050" dirty="0"/>
-          </a:p>
-        </p:txBody>
-      </p:sp>
-      <p:sp>
-        <p:nvSpPr>
-          <p:cNvPr id="22" name="Text 17"/>
-          <p:cNvSpPr/>
-          <p:nvPr/>
-        </p:nvSpPr>
-        <p:spPr>
-          <a:xfrm>
-            <a:off x="7205472" y="2651760"/>
-            <a:ext cx="1234440" cy="329184"/>
-          </a:xfrm>
-          <a:prstGeom prst="rect">
-            <a:avLst/>
-          </a:prstGeom>
-          <a:noFill/>
-          <a:ln/>
-        </p:spPr>
-        <p:txBody>
-          <a:bodyPr wrap="square" lIns="0" tIns="0" rIns="0" bIns="0" rtlCol="0" anchor="ctr"/>
-          <a:lstStyle/>
-          <a:p>
-            <a:pPr marL="0" indent="0">
-              <a:buNone/>
-            </a:pPr>
-            <a:r>
-              <a:rPr lang="en-US" sz="1500" b="1" dirty="0">
-                <a:solidFill>
-                  <a:srgbClr val="0E1E3A"/>
-                </a:solidFill>
-                <a:latin typeface="Cambria" pitchFamily="34" charset="0"/>
-                <a:ea typeface="Cambria" pitchFamily="34" charset="-122"/>
-                <a:cs typeface="Cambria" pitchFamily="34" charset="-120"/>
-              </a:rPr>
-              <a:t>−66.7%</a:t>
-            </a:r>
-            <a:endParaRPr lang="en-US" sz="1500" dirty="0"/>
-          </a:p>
-        </p:txBody>
-      </p:sp>
-      <p:sp>
-        <p:nvSpPr>
-          <p:cNvPr id="23" name="Text 18"/>
-          <p:cNvSpPr/>
-          <p:nvPr/>
-        </p:nvSpPr>
-        <p:spPr>
-          <a:xfrm>
-            <a:off x="8549640" y="2651760"/>
-            <a:ext cx="2727655" cy="329184"/>
-          </a:xfrm>
-          <a:prstGeom prst="rect">
-            <a:avLst/>
-          </a:prstGeom>
-          <a:noFill/>
-          <a:ln/>
-        </p:spPr>
-        <p:txBody>
-          <a:bodyPr wrap="square" lIns="0" tIns="0" rIns="0" bIns="0" rtlCol="0" anchor="ctr"/>
-          <a:lstStyle/>
-          <a:p>
-            <a:pPr marL="0" indent="0">
-              <a:buNone/>
-            </a:pPr>
-            <a:r>
-              <a:rPr lang="en-US" sz="1050" dirty="0">
-                <a:solidFill>
-                  <a:srgbClr val="24354F"/>
-                </a:solidFill>
-                <a:latin typeface="Calibri" pitchFamily="34" charset="0"/>
-                <a:ea typeface="Calibri" pitchFamily="34" charset="-122"/>
-                <a:cs typeface="Calibri" pitchFamily="34" charset="-120"/>
-              </a:rPr>
-              <a:t>tool calls (3 → 1)</a:t>
-            </a:r>
-            <a:endParaRPr lang="en-US" sz="1050" dirty="0"/>
-          </a:p>
-        </p:txBody>
-      </p:sp>
-      <p:sp>
-        <p:nvSpPr>
-          <p:cNvPr id="24" name="Text 19"/>
-          <p:cNvSpPr/>
-          <p:nvPr/>
-        </p:nvSpPr>
-        <p:spPr>
-          <a:xfrm>
-            <a:off x="7205472" y="3090672"/>
-            <a:ext cx="1234440" cy="329184"/>
-          </a:xfrm>
-          <a:prstGeom prst="rect">
-            <a:avLst/>
-          </a:prstGeom>
-          <a:noFill/>
-          <a:ln/>
-        </p:spPr>
-        <p:txBody>
-          <a:bodyPr wrap="square" lIns="0" tIns="0" rIns="0" bIns="0" rtlCol="0" anchor="ctr"/>
-          <a:lstStyle/>
-          <a:p>
-            <a:pPr marL="0" indent="0">
-              <a:buNone/>
-            </a:pPr>
-            <a:r>
-              <a:rPr lang="en-US" sz="1500" b="1" dirty="0">
-                <a:solidFill>
-                  <a:srgbClr val="0E1E3A"/>
-                </a:solidFill>
-                <a:latin typeface="Cambria" pitchFamily="34" charset="0"/>
-                <a:ea typeface="Cambria" pitchFamily="34" charset="-122"/>
-                <a:cs typeface="Cambria" pitchFamily="34" charset="-120"/>
-              </a:rPr>
-              <a:t>−59.2%</a:t>
-            </a:r>
-            <a:endParaRPr lang="en-US" sz="1500" dirty="0"/>
-          </a:p>
-        </p:txBody>
-      </p:sp>
-      <p:sp>
-        <p:nvSpPr>
-          <p:cNvPr id="25" name="Text 20"/>
-          <p:cNvSpPr/>
-          <p:nvPr/>
-        </p:nvSpPr>
-        <p:spPr>
-          <a:xfrm>
-            <a:off x="8549640" y="3090672"/>
-            <a:ext cx="2727655" cy="329184"/>
-          </a:xfrm>
-          <a:prstGeom prst="rect">
-            <a:avLst/>
-          </a:prstGeom>
-          <a:noFill/>
-          <a:ln/>
-        </p:spPr>
-        <p:txBody>
-          <a:bodyPr wrap="square" lIns="0" tIns="0" rIns="0" bIns="0" rtlCol="0" anchor="ctr"/>
-          <a:lstStyle/>
-          <a:p>
-            <a:pPr marL="0" indent="0">
-              <a:buNone/>
-            </a:pPr>
-            <a:r>
-              <a:rPr lang="en-US" sz="1050" dirty="0">
-                <a:solidFill>
-                  <a:srgbClr val="24354F"/>
-                </a:solidFill>
-                <a:latin typeface="Calibri" pitchFamily="34" charset="0"/>
-                <a:ea typeface="Calibri" pitchFamily="34" charset="-122"/>
-                <a:cs typeface="Calibri" pitchFamily="34" charset="-120"/>
-              </a:rPr>
-              <a:t>total tokens</a:t>
-            </a:r>
-            <a:endParaRPr lang="en-US" sz="1050" dirty="0"/>
-          </a:p>
-        </p:txBody>
-      </p:sp>
-      <p:sp>
-        <p:nvSpPr>
-          <p:cNvPr id="26" name="Text 21"/>
-          <p:cNvSpPr/>
-          <p:nvPr/>
-        </p:nvSpPr>
-        <p:spPr>
-          <a:xfrm>
-            <a:off x="7205472" y="3529584"/>
-            <a:ext cx="1234440" cy="329184"/>
-          </a:xfrm>
-          <a:prstGeom prst="rect">
-            <a:avLst/>
-          </a:prstGeom>
-          <a:noFill/>
-          <a:ln/>
-        </p:spPr>
-        <p:txBody>
-          <a:bodyPr wrap="square" lIns="0" tIns="0" rIns="0" bIns="0" rtlCol="0" anchor="ctr"/>
-          <a:lstStyle/>
-          <a:p>
-            <a:pPr marL="0" indent="0">
-              <a:buNone/>
-            </a:pPr>
-            <a:r>
-              <a:rPr lang="en-US" sz="1500" b="1" dirty="0">
-                <a:solidFill>
-                  <a:srgbClr val="0E1E3A"/>
-                </a:solidFill>
-                <a:latin typeface="Cambria" pitchFamily="34" charset="0"/>
-                <a:ea typeface="Cambria" pitchFamily="34" charset="-122"/>
-                <a:cs typeface="Cambria" pitchFamily="34" charset="-120"/>
-              </a:rPr>
-              <a:t>−40.6%</a:t>
-            </a:r>
-            <a:endParaRPr lang="en-US" sz="1500" dirty="0"/>
-          </a:p>
-        </p:txBody>
-      </p:sp>
-      <p:sp>
-        <p:nvSpPr>
-          <p:cNvPr id="27" name="Text 22"/>
-          <p:cNvSpPr/>
-          <p:nvPr/>
-        </p:nvSpPr>
-        <p:spPr>
-          <a:xfrm>
-            <a:off x="8549640" y="3529584"/>
-            <a:ext cx="2727655" cy="329184"/>
-          </a:xfrm>
-          <a:prstGeom prst="rect">
-            <a:avLst/>
-          </a:prstGeom>
-          <a:noFill/>
-          <a:ln/>
-        </p:spPr>
-        <p:txBody>
-          <a:bodyPr wrap="square" lIns="0" tIns="0" rIns="0" bIns="0" rtlCol="0" anchor="ctr"/>
-          <a:lstStyle/>
-          <a:p>
-            <a:pPr marL="0" indent="0">
-              <a:buNone/>
-            </a:pPr>
-            <a:r>
-              <a:rPr lang="en-US" sz="1050" dirty="0">
-                <a:solidFill>
-                  <a:srgbClr val="24354F"/>
-                </a:solidFill>
-                <a:latin typeface="Calibri" pitchFamily="34" charset="0"/>
-                <a:ea typeface="Calibri" pitchFamily="34" charset="-122"/>
-                <a:cs typeface="Calibri" pitchFamily="34" charset="-120"/>
-              </a:rPr>
-              <a:t>estimated cost</a:t>
-            </a:r>
-            <a:endParaRPr lang="en-US" sz="1050" dirty="0"/>
-          </a:p>
-        </p:txBody>
-      </p:sp>
-      <p:sp>
-        <p:nvSpPr>
-          <p:cNvPr id="28" name="Text 23"/>
-          <p:cNvSpPr/>
-          <p:nvPr/>
-        </p:nvSpPr>
-        <p:spPr>
-          <a:xfrm>
-            <a:off x="7205472" y="3968496"/>
-            <a:ext cx="1234440" cy="329184"/>
-          </a:xfrm>
-          <a:prstGeom prst="rect">
-            <a:avLst/>
-          </a:prstGeom>
-          <a:noFill/>
-          <a:ln/>
-        </p:spPr>
-        <p:txBody>
-          <a:bodyPr wrap="square" lIns="0" tIns="0" rIns="0" bIns="0" rtlCol="0" anchor="ctr"/>
-          <a:lstStyle/>
-          <a:p>
-            <a:pPr marL="0" indent="0">
-              <a:buNone/>
-            </a:pPr>
-            <a:r>
-              <a:rPr lang="en-US" sz="1500" b="1" dirty="0">
-                <a:solidFill>
-                  <a:srgbClr val="0E1E3A"/>
-                </a:solidFill>
-                <a:latin typeface="Cambria" pitchFamily="34" charset="0"/>
-                <a:ea typeface="Cambria" pitchFamily="34" charset="-122"/>
-                <a:cs typeface="Cambria" pitchFamily="34" charset="-120"/>
-              </a:rPr>
-              <a:t>−71.6%</a:t>
-            </a:r>
-            <a:endParaRPr lang="en-US" sz="1500" dirty="0"/>
-          </a:p>
-        </p:txBody>
-      </p:sp>
-      <p:sp>
-        <p:nvSpPr>
-          <p:cNvPr id="29" name="Text 24"/>
-          <p:cNvSpPr/>
-          <p:nvPr/>
-        </p:nvSpPr>
-        <p:spPr>
-          <a:xfrm>
-            <a:off x="8549640" y="3968496"/>
-            <a:ext cx="2727655" cy="329184"/>
-          </a:xfrm>
-          <a:prstGeom prst="rect">
-            <a:avLst/>
-          </a:prstGeom>
-          <a:noFill/>
-          <a:ln/>
-        </p:spPr>
-        <p:txBody>
-          <a:bodyPr wrap="square" lIns="0" tIns="0" rIns="0" bIns="0" rtlCol="0" anchor="ctr"/>
-          <a:lstStyle/>
-          <a:p>
-            <a:pPr marL="0" indent="0">
-              <a:buNone/>
-            </a:pPr>
-            <a:r>
-              <a:rPr lang="en-US" sz="1050" dirty="0">
-                <a:solidFill>
-                  <a:srgbClr val="24354F"/>
-                </a:solidFill>
-                <a:latin typeface="Calibri" pitchFamily="34" charset="0"/>
-                <a:ea typeface="Calibri" pitchFamily="34" charset="-122"/>
-                <a:cs typeface="Calibri" pitchFamily="34" charset="-120"/>
-              </a:rPr>
-              <a:t>observed wall latency</a:t>
-            </a:r>
-            <a:endParaRPr lang="en-US" sz="1050" dirty="0"/>
-          </a:p>
-        </p:txBody>
-      </p:sp>
-      <p:sp>
-        <p:nvSpPr>
-          <p:cNvPr id="30" name="Shape 25"/>
-          <p:cNvSpPr/>
-          <p:nvPr/>
-        </p:nvSpPr>
-        <p:spPr>
-          <a:xfrm>
-            <a:off x="6949440" y="4645152"/>
-            <a:ext cx="4602175" cy="1463040"/>
-          </a:xfrm>
-          <a:prstGeom prst="roundRect">
-            <a:avLst>
-              <a:gd name="adj" fmla="val 3125"/>
-            </a:avLst>
-          </a:prstGeom>
-          <a:solidFill>
-            <a:srgbClr val="FBF0EC"/>
-          </a:solidFill>
-          <a:ln w="9525">
-            <a:solidFill>
-              <a:srgbClr val="EFDCD4"/>
-            </a:solidFill>
-            <a:prstDash val="solid"/>
-          </a:ln>
-          <a:effectLst>
-            <a:outerShdw blurRad="114300" dist="17780" dir="5400000" algn="bl" rotWithShape="0">
-              <a:srgbClr val="94A6BC">
-                <a:alpha val="15000"/>
-              </a:srgbClr>
-            </a:outerShdw>
-          </a:effectLst>
-        </p:spPr>
-        <p:txBody>
-          <a:bodyPr/>
-          <a:lstStyle/>
-          <a:p>
-            <a:endParaRPr lang="en-US"/>
-          </a:p>
-        </p:txBody>
-      </p:sp>
-      <p:sp>
-        <p:nvSpPr>
-          <p:cNvPr id="31" name="Text 26"/>
-          <p:cNvSpPr/>
-          <p:nvPr/>
-        </p:nvSpPr>
-        <p:spPr>
-          <a:xfrm>
-            <a:off x="7205472" y="4754880"/>
-            <a:ext cx="4090111" cy="256032"/>
-          </a:xfrm>
-          <a:prstGeom prst="rect">
-            <a:avLst/>
-          </a:prstGeom>
-          <a:noFill/>
-          <a:ln/>
-        </p:spPr>
-        <p:txBody>
-          <a:bodyPr wrap="square" lIns="0" tIns="0" rIns="0" bIns="0" rtlCol="0" anchor="t"/>
-          <a:lstStyle/>
-          <a:p>
-            <a:pPr marL="0" indent="0">
-              <a:buNone/>
-            </a:pPr>
-            <a:r>
-              <a:rPr lang="en-US" sz="1200" b="1" dirty="0">
-                <a:solidFill>
-                  <a:srgbClr val="A93B2B"/>
-                </a:solidFill>
-                <a:latin typeface="Cambria" pitchFamily="34" charset="0"/>
-                <a:ea typeface="Cambria" pitchFamily="34" charset="-122"/>
-                <a:cs typeface="Cambria" pitchFamily="34" charset="-120"/>
-              </a:rPr>
-              <a:t>What the pilot cannot establish</a:t>
-            </a:r>
-            <a:endParaRPr lang="en-US" sz="1200" dirty="0"/>
-          </a:p>
-        </p:txBody>
-      </p:sp>
-      <p:sp>
-        <p:nvSpPr>
-          <p:cNvPr id="32" name="Text 27"/>
-          <p:cNvSpPr/>
-          <p:nvPr/>
-        </p:nvSpPr>
-        <p:spPr>
-          <a:xfrm>
-            <a:off x="7205472" y="5029200"/>
-            <a:ext cx="4090111" cy="969264"/>
-          </a:xfrm>
-          <a:prstGeom prst="rect">
-            <a:avLst/>
-          </a:prstGeom>
-          <a:noFill/>
-          <a:ln/>
-        </p:spPr>
-        <p:txBody>
-          <a:bodyPr wrap="square" lIns="0" tIns="0" rIns="0" bIns="0" rtlCol="0" anchor="t"/>
-          <a:lstStyle/>
-          <a:p>
-            <a:pPr marL="0" indent="0">
-              <a:lnSpc>
-                <a:spcPct val="105000"/>
-              </a:lnSpc>
-              <a:buNone/>
-            </a:pPr>
-            <a:r>
-              <a:rPr lang="en-US" sz="1000" dirty="0">
-                <a:solidFill>
-                  <a:srgbClr val="5C4034"/>
-                </a:solidFill>
-                <a:latin typeface="Calibri" pitchFamily="34" charset="0"/>
-                <a:ea typeface="Calibri" pitchFamily="34" charset="-122"/>
-                <a:cs typeface="Calibri" pitchFamily="34" charset="-120"/>
-              </a:rPr>
-              <a:t>One workflow family supplies both calibration and test, no cache candidate has measured evidence, and the selected action is the same macro a static always-macro policy would choose. Showing value from selection requires multiple families on which different actions are optimal, measured construction and maintenance costs, and time-forward drift.</a:t>
+              <a:t>Each artifact was admitted at 92/92 zero-violation calibration groups (U = 0.0498). The one discordant pair is a baseline-only miss (McNemar p = 1; one-sided bound on compiled-only misses 3.3%), and a rerun scored 30/30 in every arm, so no accuracy difference is detected and equivalence is not established. Savings are marginal per episode within one snapshot: every artifact pins its snapshot digest, and discovery breaks even after 411, 183, and 181 episodes per family. A recurrence-only replay on issue-type routing also passed 30/30 at one request per record.</a:t>
             </a:r>
             <a:endParaRPr lang="en-US" sz="1000" dirty="0"/>
           </a:p>
@@ -23924,7 +22562,7 @@
                 <a:ea typeface="Calibri" pitchFamily="34" charset="-122"/>
                 <a:cs typeface="Calibri" pitchFamily="34" charset="-120"/>
               </a:rPr>
-              <a:t>23</a:t>
+              <a:t>24</a:t>
             </a:r>
             <a:endParaRPr lang="en-US" sz="900" dirty="0"/>
           </a:p>
@@ -23963,7 +22601,7 @@
                 <a:ea typeface="Calibri" pitchFamily="34" charset="-122"/>
                 <a:cs typeface="Calibri" pitchFamily="34" charset="-120"/>
               </a:rPr>
-              <a:t>LIMITATIONS AND THREATS TO VALIDITY  ·  §8</a:t>
+              <a:t>DISCUSSION AND LIMITATIONS  ·  §7</a:t>
             </a:r>
             <a:endParaRPr lang="en-US" sz="1050" dirty="0"/>
           </a:p>
@@ -24156,7 +22794,7 @@
                 <a:ea typeface="Cambria" pitchFamily="34" charset="-122"/>
                 <a:cs typeface="Cambria" pitchFamily="34" charset="-120"/>
               </a:rPr>
-              <a:t>The selective gate did not discriminate</a:t>
+              <a:t>The gate did not rank risk</a:t>
             </a:r>
             <a:endParaRPr lang="en-US" sz="1150" dirty="0"/>
           </a:p>
@@ -24198,7 +22836,7 @@
                 <a:ea typeface="Calibri" pitchFamily="34" charset="-122"/>
                 <a:cs typeface="Calibri" pitchFamily="34" charset="-120"/>
               </a:rPr>
-              <a:t>Every threshold below 0.14 admits zero calibration groups and every threshold at or above it admits all 92, with zero violations throughout. The score was fitted on development-group unproductive outcomes — of which there were none — so a logistic model was trained with zero positive examples over eight observations and seven features. A single-class fit yields a near-constant score, and a near-constant score is exactly what produces the observed step. Contribution (v) is demonstrated only as a sample-size counter.</a:t>
+              <a:t>Every threshold below 0.14 admits no calibration group and every one at or above it admits all 92, with zero violations throughout. A support-only comparator on 240 held-out pairs found the same step, and an amended 184-group end-to-end issue gate retired with two errors. No risk–coverage frontier is certified.</a:t>
             </a:r>
             <a:endParaRPr lang="en-US" sz="900" dirty="0"/>
           </a:p>
@@ -24352,7 +22990,7 @@
                 <a:ea typeface="Cambria" pitchFamily="34" charset="-122"/>
                 <a:cs typeface="Cambria" pitchFamily="34" charset="-120"/>
               </a:rPr>
-              <a:t>Not production safe</a:t>
+              <a:t>Certificates assume independence</a:t>
             </a:r>
             <a:endParaRPr lang="en-US" sz="1150" dirty="0"/>
           </a:p>
@@ -24394,7 +23032,7 @@
                 <a:ea typeface="Calibri" pitchFamily="34" charset="-122"/>
                 <a:cs typeface="Calibri" pitchFamily="34" charset="-120"/>
               </a:rPr>
-              <a:t>No live GitHub service, no canary, no multi-domain test; the artifact was activated only under a lab-protocol flag. Registry records are mutable Python objects, lifecycle and approval fields were set directly, and signing was disabled — so immutability and signature verification are capabilities of the registry, not properties this experiment demonstrates.</a:t>
+              <a:t>Every bound assumes i.i.d. groups. Counting a creation day or an author as one unit retires every primary family under the registered grid, and AppWorld's bound retires at scenario or supervisor level. The end-to-end certificate covers one family and excludes closed-unmerged pull requests.</a:t>
             </a:r>
             <a:endParaRPr lang="en-US" sz="900" dirty="0"/>
           </a:p>
@@ -24548,7 +23186,7 @@
                 <a:ea typeface="Cambria" pitchFamily="34" charset="-122"/>
                 <a:cs typeface="Cambria" pitchFamily="34" charset="-120"/>
               </a:rPr>
-              <a:t>Compaction did not stabilize text</a:t>
+              <a:t>Savings stay inside one snapshot</a:t>
             </a:r>
             <a:endParaRPr lang="en-US" sz="1150" dirty="0"/>
           </a:p>
@@ -24590,7 +23228,7 @@
                 <a:ea typeface="Calibri" pitchFamily="34" charset="-122"/>
                 <a:cs typeface="Calibri" pitchFamily="34" charset="-120"/>
               </a:rPr>
-              <a:t>Category decisions agree 10/10 across arms, but byte-exact answers agree 7/10 baseline, 6/10 compiled, 4/10 macro. In the earlier six-repeat pilot: 1/6 baseline and 0/6 compiled. Structural determinism of the tool prefix improves by construction; free-form surface determinism does not.</a:t>
+              <a:t>Every artifact pins its snapshot digest and abstains on any other, so a new snapshot is recompiled. Savings are marginal per episode, and discovery breaks even after 181–411 episodes per family. Manual authoring effort is not priced.</a:t>
             </a:r>
             <a:endParaRPr lang="en-US" sz="900" dirty="0"/>
           </a:p>
@@ -24786,7 +23424,7 @@
                 <a:ea typeface="Calibri" pitchFamily="34" charset="-122"/>
                 <a:cs typeface="Calibri" pitchFamily="34" charset="-120"/>
               </a:rPr>
-              <a:t>Moderation, policy, and guardrail checks commonly run at model boundaries. A region deleting three of four boundaries risks deleting three of four evaluations, and neither the effect catalog nor the read-only policy covers that: a guardrail is not a tool call, so it is invisible to both. The demonstrations expose no guardrails, so the gap is untested rather than benign.</a:t>
+              <a:t>Moderation, policy, and guardrail checks commonly run at model boundaries. A region that deletes three of four boundaries risks deleting three of four evaluations. Writes, handoffs, hosted tools, undeclared effects, and removed-turn guardrails lie outside Proposition 1.</a:t>
             </a:r>
             <a:endParaRPr lang="en-US" sz="900" dirty="0"/>
           </a:p>
@@ -24940,7 +23578,7 @@
                 <a:ea typeface="Cambria" pitchFamily="34" charset="-122"/>
                 <a:cs typeface="Cambria" pitchFamily="34" charset="-120"/>
               </a:rPr>
-              <a:t>Factual quality is narrow</a:t>
+              <a:t>Guards gave no measured protection</a:t>
             </a:r>
             <a:endParaRPr lang="en-US" sz="1150" dirty="0"/>
           </a:p>
@@ -24982,7 +23620,7 @@
                 <a:ea typeface="Calibri" pitchFamily="34" charset="-122"/>
                 <a:cs typeface="Calibri" pitchFamily="34" charset="-120"/>
               </a:rPr>
-              <a:t>The oracle is an automatic extractive contract, not human semantic adjudication. It checks exact snapshot fields and source-supported excerpts; it does not detect fluent fabrication. Both audited oracle corrections are retained in the artifact to show that even strict-looking metrics can drift.</a:t>
+              <a:t>Two provider-free drift studies are null by construction. In the live continuation-graded study an emptied list lies inside the learned hull, and both arms answered wrongly on 39 of 60 records under the original grader, 40 under its correction.</a:t>
             </a:r>
             <a:endParaRPr lang="en-US" sz="900" dirty="0"/>
           </a:p>
@@ -25136,7 +23774,7 @@
                 <a:ea typeface="Cambria" pitchFamily="34" charset="-122"/>
                 <a:cs typeface="Cambria" pitchFamily="34" charset="-120"/>
               </a:rPr>
-              <a:t>Latency is partly confounded</a:t>
+              <a:t>The evidence base is narrow</a:t>
             </a:r>
             <a:endParaRPr lang="en-US" sz="1150" dirty="0"/>
           </a:p>
@@ -25178,7 +23816,7 @@
                 <a:ea typeface="Calibri" pitchFamily="34" charset="-122"/>
                 <a:cs typeface="Calibri" pitchFamily="34" charset="-120"/>
               </a:rPr>
-              <a:t>The fixed-prefix harness ran the entire baseline batch and then the entire compiled batch, so provider load, connection reuse, and prompt-cache warmth differ systematically between conditions. The request-count reduction is structural and unaffected, but the −85.0% wall-latency figure should be read as an observation under that ordering. Both natural-order studies counterbalance all six condition permutations.</a:t>
+              <a:t>One pinned snapshot, five frozen cross-repository snapshots, one post-cutoff cohort, one public benchmark with a live agent, and one calibrated model family. Every GitHub compiled-only miss is an excerpt departing from identical evidence, with no counterfactual attributing it to the model.</a:t>
             </a:r>
             <a:endParaRPr lang="en-US" sz="900" dirty="0"/>
           </a:p>
@@ -25220,7 +23858,7 @@
                 <a:ea typeface="Calibri" pitchFamily="34" charset="-122"/>
                 <a:cs typeface="Calibri" pitchFamily="34" charset="-120"/>
               </a:rPr>
-              <a:t>Also: discovery is not free (132 episodes cost 528 provider requests, 533,293 tokens, and about $0.096, with break-even between 176 and 292 eligible future episodes); risk control is per-artifact with no global guarantee when many artifacts are selected; the closed DSL intentionally misses legitimate transformations and loops; and the workspace retained no prior Git history, so pre-snapshot commit ancestry cannot be reconstructed.</a:t>
+              <a:t>Also: 810 held-out GitHub episodes in six studies produced one compiled-only contract failure; AWO, Agent JIT, and EvoC2F were not run head-to-head; the closed DSL intentionally misses legitimate transformations and loops; and a recurrence-only replay on issue-type routing also passed 30/30.</a:t>
             </a:r>
             <a:endParaRPr lang="en-US" sz="950" dirty="0"/>
           </a:p>
@@ -25331,7 +23969,7 @@
                 <a:ea typeface="Calibri" pitchFamily="34" charset="-122"/>
                 <a:cs typeface="Calibri" pitchFamily="34" charset="-120"/>
               </a:rPr>
-              <a:t>24</a:t>
+              <a:t>25</a:t>
             </a:r>
             <a:endParaRPr lang="en-US" sz="900" dirty="0"/>
           </a:p>
@@ -25370,7 +24008,7 @@
                 <a:ea typeface="Calibri" pitchFamily="34" charset="-122"/>
                 <a:cs typeface="Calibri" pitchFamily="34" charset="-120"/>
               </a:rPr>
-              <a:t>APPENDIX C / TABLE 9</a:t>
+              <a:t>CLAIMS AND EVIDENCE  ·  APPENDIX I</a:t>
             </a:r>
             <a:endParaRPr lang="en-US" sz="1050" dirty="0"/>
           </a:p>
@@ -25409,7 +24047,7 @@
                 <a:ea typeface="Cambria" pitchFamily="34" charset="-122"/>
                 <a:cs typeface="Cambria" pitchFamily="34" charset="-120"/>
               </a:rPr>
-              <a:t>The complete claims register — retained to prevent narrative drift</a:t>
+              <a:t>The claims register — retained to prevent narrative drift</a:t>
             </a:r>
             <a:endParaRPr lang="en-US" sz="2600" dirty="0"/>
           </a:p>
@@ -25689,7 +24327,7 @@
                           <a:ea typeface="Calibri" pitchFamily="34" charset="-122"/>
                           <a:cs typeface="Calibri" pitchFamily="34" charset="-120"/>
                         </a:rPr>
-                        <a:t>Verdict (as recorded in Table 9)</a:t>
+                        <a:t>Verdict</a:t>
                       </a:r>
                       <a:endParaRPr lang="en-US" sz="900" dirty="0">
                         <a:latin typeface="Calibri" charset="0"/>
@@ -25832,7 +24470,7 @@
                           <a:ea typeface="Calibri" pitchFamily="34" charset="-122"/>
                           <a:cs typeface="Calibri" pitchFamily="34" charset="-120"/>
                         </a:rPr>
-                        <a:t>Expected producer appears in the provenance candidate set</a:t>
+                        <a:t>Guarded programs keep held-out contracts on the GitHub families</a:t>
                       </a:r>
                       <a:endParaRPr lang="en-US" sz="850" dirty="0">
                         <a:latin typeface="Calibri" charset="0"/>
@@ -25900,7 +24538,7 @@
                           <a:ea typeface="Calibri" pitchFamily="34" charset="-122"/>
                           <a:cs typeface="Calibri" pitchFamily="34" charset="-120"/>
                         </a:rPr>
-                        <a:t>Pinned NESTFUL: 5,531 / 5,746 dependency slots</a:t>
+                        <a:t>90/90 compiled vs. 89/90 unchanged; zero compiled-only misses</a:t>
                       </a:r>
                       <a:endParaRPr lang="en-US" sz="850" dirty="0">
                         <a:latin typeface="Calibri" charset="0"/>
@@ -25960,7 +24598,7 @@
                         <a:buNone/>
                       </a:pPr>
                       <a:r>
-                        <a:rPr lang="en-US" sz="850" b="1" dirty="0">
+                        <a:rPr lang="en-US" sz="850" dirty="0" b="1">
                           <a:solidFill>
                             <a:srgbClr val="B5821F"/>
                           </a:solidFill>
@@ -25968,7 +24606,7 @@
                           <a:ea typeface="Calibri" pitchFamily="34" charset="-122"/>
                           <a:cs typeface="Calibri" pitchFamily="34" charset="-120"/>
                         </a:rPr>
-                        <a:t>96.3% recall; 80.7% unique</a:t>
+                        <a:t>Yes; no difference detected</a:t>
                       </a:r>
                       <a:endParaRPr lang="en-US" sz="850" dirty="0">
                         <a:latin typeface="Calibri" charset="0"/>
@@ -26111,7 +24749,7 @@
                           <a:ea typeface="Calibri" pitchFamily="34" charset="-122"/>
                           <a:cs typeface="Calibri" pitchFamily="34" charset="-120"/>
                         </a:rPr>
-                        <a:t>A naturally recurring prefix can remove model decisions</a:t>
+                        <a:t>Compiled programs remove model calls</a:t>
                       </a:r>
                       <a:endParaRPr lang="en-US" sz="850" dirty="0">
                         <a:latin typeface="Calibri" charset="0"/>
@@ -26179,7 +24817,7 @@
                           <a:ea typeface="Calibri" pitchFamily="34" charset="-122"/>
                           <a:cs typeface="Calibri" pitchFamily="34" charset="-120"/>
                         </a:rPr>
-                        <a:t>132 live discovery records; 30 counterbalanced real-record tests</a:t>
+                        <a:t>−66.6% requests, −63.1% tokens, −58.7% cost on 90 records</a:t>
                       </a:r>
                       <a:endParaRPr lang="en-US" sz="850" dirty="0">
                         <a:latin typeface="Calibri" charset="0"/>
@@ -26239,7 +24877,7 @@
                         <a:buNone/>
                       </a:pPr>
                       <a:r>
-                        <a:rPr lang="en-US" sz="850" b="1" dirty="0">
+                        <a:rPr lang="en-US" sz="850" dirty="0" b="1">
                           <a:solidFill>
                             <a:srgbClr val="B5821F"/>
                           </a:solidFill>
@@ -26247,7 +24885,7 @@
                           <a:ea typeface="Calibri" pitchFamily="34" charset="-122"/>
                           <a:cs typeface="Calibri" pitchFamily="34" charset="-120"/>
                         </a:rPr>
-                        <a:t>Yes; one snapshot domain</a:t>
+                        <a:t>Yes; within one snapshot</a:t>
                       </a:r>
                       <a:endParaRPr lang="en-US" sz="850" dirty="0">
                         <a:latin typeface="Calibri" charset="0"/>
@@ -26390,7 +25028,7 @@
                           <a:ea typeface="Calibri" pitchFamily="34" charset="-122"/>
                           <a:cs typeface="Calibri" pitchFamily="34" charset="-120"/>
                         </a:rPr>
-                        <a:t>Source-grounded task quality is preserved</a:t>
+                        <a:t>Compile-or-retire holds on newer records</a:t>
                       </a:r>
                       <a:endParaRPr lang="en-US" sz="850" dirty="0">
                         <a:latin typeface="Calibri" charset="0"/>
@@ -26458,7 +25096,7 @@
                           <a:ea typeface="Calibri" pitchFamily="34" charset="-122"/>
                           <a:cs typeface="Calibri" pitchFamily="34" charset="-120"/>
                         </a:rPr>
-                        <a:t>Expanded partial compiler: all three arms 30/30; earlier aggressive: 17/18</a:t>
+                        <a:t>120/120 on four repositories; pytorch/pytorch retires</a:t>
                       </a:r>
                       <a:endParaRPr lang="en-US" sz="850" dirty="0">
                         <a:latin typeface="Calibri" charset="0"/>
@@ -26518,7 +25156,7 @@
                         <a:buNone/>
                       </a:pPr>
                       <a:r>
-                        <a:rPr lang="en-US" sz="850" b="1" dirty="0">
+                        <a:rPr lang="en-US" sz="850" dirty="0" b="1">
                           <a:solidFill>
                             <a:srgbClr val="B5821F"/>
                           </a:solidFill>
@@ -26526,7 +25164,7 @@
                           <a:ea typeface="Calibri" pitchFamily="34" charset="-122"/>
                           <a:cs typeface="Calibri" pitchFamily="34" charset="-120"/>
                         </a:rPr>
-                        <a:t>This sample only</a:t>
+                        <a:t>Yes; inside frozen snapshots</a:t>
                       </a:r>
                       <a:endParaRPr lang="en-US" sz="850" dirty="0">
                         <a:latin typeface="Calibri" charset="0"/>
@@ -26669,7 +25307,7 @@
                           <a:ea typeface="Calibri" pitchFamily="34" charset="-122"/>
                           <a:cs typeface="Calibri" pitchFamily="34" charset="-120"/>
                         </a:rPr>
-                        <a:t>Configured selective admission is data hungry</a:t>
+                        <a:t>The end-to-end contract can be certified</a:t>
                       </a:r>
                       <a:endParaRPr lang="en-US" sz="850" dirty="0">
                         <a:latin typeface="Calibri" charset="0"/>
@@ -26737,7 +25375,7 @@
                           <a:ea typeface="Calibri" pitchFamily="34" charset="-122"/>
                           <a:cs typeface="Calibri" pitchFamily="34" charset="-120"/>
                         </a:rPr>
-                        <a:t>NESTFUL max support 26 vs required 92</a:t>
+                        <a:t>0/132 post-cutoff misses; bound 0.0173</a:t>
                       </a:r>
                       <a:endParaRPr lang="en-US" sz="850" dirty="0">
                         <a:latin typeface="Calibri" charset="0"/>
@@ -26797,7 +25435,7 @@
                         <a:buNone/>
                       </a:pPr>
                       <a:r>
-                        <a:rPr lang="en-US" sz="850" b="1" dirty="0">
+                        <a:rPr lang="en-US" sz="850" dirty="0" b="1">
                           <a:solidFill>
                             <a:srgbClr val="B5821F"/>
                           </a:solidFill>
@@ -26805,7 +25443,7 @@
                           <a:ea typeface="Calibri" pitchFamily="34" charset="-122"/>
                           <a:cs typeface="Calibri" pitchFamily="34" charset="-120"/>
                         </a:rPr>
-                        <a:t>This grid / risk setting</a:t>
+                        <a:t>One family; open and merged PRs</a:t>
                       </a:r>
                       <a:endParaRPr lang="en-US" sz="850" dirty="0">
                         <a:latin typeface="Calibri" charset="0"/>
@@ -26948,7 +25586,7 @@
                           <a:ea typeface="Calibri" pitchFamily="34" charset="-122"/>
                           <a:cs typeface="Calibri" pitchFamily="34" charset="-120"/>
                         </a:rPr>
-                        <a:t>Compaction improves text determinism</a:t>
+                        <a:t>GAC helps on a public benchmark</a:t>
                       </a:r>
                       <a:endParaRPr lang="en-US" sz="850" dirty="0">
                         <a:latin typeface="Calibri" charset="0"/>
@@ -27016,7 +25654,7 @@
                           <a:ea typeface="Calibri" pitchFamily="34" charset="-122"/>
                           <a:cs typeface="Calibri" pitchFamily="34" charset="-120"/>
                         </a:rPr>
-                        <a:t>Exact-answer agreement 1/6 vs 0/6 (n = 6)</a:t>
+                        <a:t>BIRD: 26/31 compiled; −45.8% requests; 402 vs. 403 of 630</a:t>
                       </a:r>
                       <a:endParaRPr lang="en-US" sz="850" dirty="0">
                         <a:latin typeface="Calibri" charset="0"/>
@@ -27076,15 +25714,15 @@
                         <a:buNone/>
                       </a:pPr>
                       <a:r>
-                        <a:rPr lang="en-US" sz="850" b="1" dirty="0">
+                        <a:rPr lang="en-US" sz="850" dirty="0" b="1">
                           <a:solidFill>
-                            <a:srgbClr val="A93B2B"/>
+                            <a:srgbClr val="B5821F"/>
                           </a:solidFill>
                           <a:latin typeface="Calibri" pitchFamily="34" charset="0"/>
                           <a:ea typeface="Calibri" pitchFamily="34" charset="-122"/>
                           <a:cs typeface="Calibri" pitchFamily="34" charset="-120"/>
                         </a:rPr>
-                        <a:t>Not supported</a:t>
+                        <a:t>No loss detected; not equivalence</a:t>
                       </a:r>
                       <a:endParaRPr lang="en-US" sz="850" dirty="0">
                         <a:latin typeface="Calibri" charset="0"/>
@@ -27131,7 +25769,7 @@
                       <a:tailEnd type="none" w="med" len="med"/>
                     </a:lnB>
                     <a:solidFill>
-                      <a:srgbClr val="FBF0EC"/>
+                      <a:srgbClr val="FBF4E6"/>
                     </a:solidFill>
                   </a:tcPr>
                 </a:tc>
@@ -27227,7 +25865,7 @@
                           <a:ea typeface="Calibri" pitchFamily="34" charset="-122"/>
                           <a:cs typeface="Calibri" pitchFamily="34" charset="-120"/>
                         </a:rPr>
-                        <a:t>The artifact is production safe</a:t>
+                        <a:t>Admission refuses per-question choices</a:t>
                       </a:r>
                       <a:endParaRPr lang="en-US" sz="850" dirty="0">
                         <a:latin typeface="Calibri" charset="0"/>
@@ -27295,7 +25933,7 @@
                           <a:ea typeface="Calibri" pitchFamily="34" charset="-122"/>
                           <a:cs typeface="Calibri" pitchFamily="34" charset="-120"/>
                         </a:rPr>
-                        <a:t>No live GitHub service, canary, or multi-domain test</a:t>
+                        <a:t>BIRD standard agent 0/36; Claude Sonnet 0/10</a:t>
                       </a:r>
                       <a:endParaRPr lang="en-US" sz="850" dirty="0">
                         <a:latin typeface="Calibri" charset="0"/>
@@ -27355,15 +25993,15 @@
                         <a:buNone/>
                       </a:pPr>
                       <a:r>
-                        <a:rPr lang="en-US" sz="850" b="1" dirty="0">
+                        <a:rPr lang="en-US" sz="850" dirty="0" b="1">
                           <a:solidFill>
-                            <a:srgbClr val="A93B2B"/>
+                            <a:srgbClr val="B5821F"/>
                           </a:solidFill>
                           <a:latin typeface="Calibri" pitchFamily="34" charset="0"/>
                           <a:ea typeface="Calibri" pitchFamily="34" charset="-122"/>
                           <a:cs typeface="Calibri" pitchFamily="34" charset="-120"/>
                         </a:rPr>
-                        <a:t>Not supported</a:t>
+                        <a:t>Yes; two designs refused</a:t>
                       </a:r>
                       <a:endParaRPr lang="en-US" sz="850" dirty="0">
                         <a:latin typeface="Calibri" charset="0"/>
@@ -27410,7 +26048,7 @@
                       <a:tailEnd type="none" w="med" len="med"/>
                     </a:lnB>
                     <a:solidFill>
-                      <a:srgbClr val="FBF0EC"/>
+                      <a:srgbClr val="FBF4E6"/>
                     </a:solidFill>
                   </a:tcPr>
                 </a:tc>
@@ -27506,7 +26144,7 @@
                           <a:ea typeface="Calibri" pitchFamily="34" charset="-122"/>
                           <a:cs typeface="Calibri" pitchFamily="34" charset="-120"/>
                         </a:rPr>
-                        <a:t>The learned gate discriminates risky from safe inputs</a:t>
+                        <a:t>Programs re-derive on other models</a:t>
                       </a:r>
                       <a:endParaRPr lang="en-US" sz="850" dirty="0">
                         <a:latin typeface="Calibri" charset="0"/>
@@ -27574,7 +26212,7 @@
                           <a:ea typeface="Calibri" pitchFamily="34" charset="-122"/>
                           <a:cs typeface="Calibri" pitchFamily="34" charset="-120"/>
                         </a:rPr>
-                        <a:t>0 positive dev examples; gate admits none or all</a:t>
+                        <a:t>gpt-6-luna and claude-sonnet-5: 2 of 3 families</a:t>
                       </a:r>
                       <a:endParaRPr lang="en-US" sz="850" dirty="0">
                         <a:latin typeface="Calibri" charset="0"/>
@@ -27634,15 +26272,15 @@
                         <a:buNone/>
                       </a:pPr>
                       <a:r>
-                        <a:rPr lang="en-US" sz="850" b="1" dirty="0">
+                        <a:rPr lang="en-US" sz="850" dirty="0" b="1">
                           <a:solidFill>
-                            <a:srgbClr val="A93B2B"/>
+                            <a:srgbClr val="B5821F"/>
                           </a:solidFill>
                           <a:latin typeface="Calibri" pitchFamily="34" charset="0"/>
                           <a:ea typeface="Calibri" pitchFamily="34" charset="-122"/>
                           <a:cs typeface="Calibri" pitchFamily="34" charset="-120"/>
                         </a:rPr>
-                        <a:t>Not supported</a:t>
+                        <a:t>Yes; backlog refused</a:t>
                       </a:r>
                       <a:endParaRPr lang="en-US" sz="850" dirty="0">
                         <a:latin typeface="Calibri" charset="0"/>
@@ -27689,7 +26327,7 @@
                       <a:tailEnd type="none" w="med" len="med"/>
                     </a:lnB>
                     <a:solidFill>
-                      <a:srgbClr val="FBF0EC"/>
+                      <a:srgbClr val="FBF4E6"/>
                     </a:solidFill>
                   </a:tcPr>
                 </a:tc>
@@ -27785,7 +26423,7 @@
                           <a:ea typeface="Calibri" pitchFamily="34" charset="-122"/>
                           <a:cs typeface="Calibri" pitchFamily="34" charset="-120"/>
                         </a:rPr>
-                        <a:t>Factual summary quality is preserved</a:t>
+                        <a:t>Compiled programs beat hand-written code</a:t>
                       </a:r>
                       <a:endParaRPr lang="en-US" sz="850" dirty="0">
                         <a:latin typeface="Calibri" charset="0"/>
@@ -27853,7 +26491,7 @@
                           <a:ea typeface="Calibri" pitchFamily="34" charset="-122"/>
                           <a:cs typeface="Calibri" pitchFamily="34" charset="-120"/>
                         </a:rPr>
-                        <a:t>Oracle accepts fluent fabrication</a:t>
+                        <a:t>Manual 90/90; ties requests, wins tokens and cost</a:t>
                       </a:r>
                       <a:endParaRPr lang="en-US" sz="850" dirty="0">
                         <a:latin typeface="Calibri" charset="0"/>
@@ -27913,15 +26551,15 @@
                         <a:buNone/>
                       </a:pPr>
                       <a:r>
-                        <a:rPr lang="en-US" sz="850" b="1" dirty="0">
+                        <a:rPr lang="en-US" sz="850" dirty="0" b="1">
                           <a:solidFill>
-                            <a:srgbClr val="5A6B84"/>
+                            <a:srgbClr val="A93B2B"/>
                           </a:solidFill>
                           <a:latin typeface="Calibri" pitchFamily="34" charset="0"/>
                           <a:ea typeface="Calibri" pitchFamily="34" charset="-122"/>
                           <a:cs typeface="Calibri" pitchFamily="34" charset="-120"/>
                         </a:rPr>
-                        <a:t>Not evaluated</a:t>
+                        <a:t>Not supported</a:t>
                       </a:r>
                       <a:endParaRPr lang="en-US" sz="850" dirty="0">
                         <a:latin typeface="Calibri" charset="0"/>
@@ -27968,7 +26606,7 @@
                       <a:tailEnd type="none" w="med" len="med"/>
                     </a:lnB>
                     <a:solidFill>
-                      <a:srgbClr val="EFF1F4"/>
+                      <a:srgbClr val="FBF0EC"/>
                     </a:solidFill>
                   </a:tcPr>
                 </a:tc>
@@ -28064,7 +26702,7 @@
                           <a:ea typeface="Calibri" pitchFamily="34" charset="-122"/>
                           <a:cs typeface="Calibri" pitchFamily="34" charset="-120"/>
                         </a:rPr>
-                        <a:t>The learned compiler dominates a hand-written macro</a:t>
+                        <a:t>Public trace benchmarks can be certified</a:t>
                       </a:r>
                       <a:endParaRPr lang="en-US" sz="850" dirty="0">
                         <a:latin typeface="Calibri" charset="0"/>
@@ -28132,7 +26770,7 @@
                           <a:ea typeface="Calibri" pitchFamily="34" charset="-122"/>
                           <a:cs typeface="Calibri" pitchFamily="34" charset="-120"/>
                         </a:rPr>
-                        <a:t>Expanded live macro matches 30/30 and beats the compiler on tools, tokens, cost</a:t>
+                        <a:t>NESTFUL best family 26 &lt; 92; API-Bank 8; BFCL v4 15</a:t>
                       </a:r>
                       <a:endParaRPr lang="en-US" sz="850" dirty="0">
                         <a:latin typeface="Calibri" charset="0"/>
@@ -28192,7 +26830,7 @@
                         <a:buNone/>
                       </a:pPr>
                       <a:r>
-                        <a:rPr lang="en-US" sz="850" b="1" dirty="0">
+                        <a:rPr lang="en-US" sz="850" dirty="0" b="1">
                           <a:solidFill>
                             <a:srgbClr val="A93B2B"/>
                           </a:solidFill>
@@ -28343,7 +26981,7 @@
                           <a:ea typeface="Calibri" pitchFamily="34" charset="-122"/>
                           <a:cs typeface="Calibri" pitchFamily="34" charset="-120"/>
                         </a:rPr>
-                        <a:t>A continuation contract recovers the retained exact-source miss</a:t>
+                        <a:t>An admitted artifact is dispatchable</a:t>
                       </a:r>
                       <a:endParaRPr lang="en-US" sz="850" dirty="0">
                         <a:latin typeface="Calibri" charset="0"/>
@@ -28411,7 +27049,7 @@
                           <a:ea typeface="Calibri" pitchFamily="34" charset="-122"/>
                           <a:cs typeface="Calibri" pitchFamily="34" charset="-120"/>
                         </a:rPr>
-                        <a:t>Provider-free replay detects issue 6602 and checked-renders 1/18 cases</a:t>
+                        <a:t>AppWorld: 2,339/2,340 full-code vs. 1/4,680 ReAct runs</a:t>
                       </a:r>
                       <a:endParaRPr lang="en-US" sz="850" dirty="0">
                         <a:latin typeface="Calibri" charset="0"/>
@@ -28471,15 +27109,15 @@
                         <a:buNone/>
                       </a:pPr>
                       <a:r>
-                        <a:rPr lang="en-US" sz="850" b="1" dirty="0">
+                        <a:rPr lang="en-US" sz="850" dirty="0" b="1">
                           <a:solidFill>
-                            <a:srgbClr val="B5821F"/>
+                            <a:srgbClr val="5A6B84"/>
                           </a:solidFill>
                           <a:latin typeface="Calibri" pitchFamily="34" charset="0"/>
                           <a:ea typeface="Calibri" pitchFamily="34" charset="-122"/>
                           <a:cs typeface="Calibri" pitchFamily="34" charset="-120"/>
                         </a:rPr>
-                        <a:t>Verified counterfactual</a:t>
+                        <a:t>Rarely, by agent design</a:t>
                       </a:r>
                       <a:endParaRPr lang="en-US" sz="850" dirty="0">
                         <a:latin typeface="Calibri" charset="0"/>
@@ -28526,7 +27164,7 @@
                       <a:tailEnd type="none" w="med" len="med"/>
                     </a:lnB>
                     <a:solidFill>
-                      <a:srgbClr val="FBF4E6"/>
+                      <a:srgbClr val="EFF1F4"/>
                     </a:solidFill>
                   </a:tcPr>
                 </a:tc>
@@ -28622,7 +27260,7 @@
                           <a:ea typeface="Calibri" pitchFamily="34" charset="-122"/>
                           <a:cs typeface="Calibri" pitchFamily="34" charset="-120"/>
                         </a:rPr>
-                        <a:t>The portfolio recommends a measured macro</a:t>
+                        <a:t>The learned gate ranks dispatch risk</a:t>
                       </a:r>
                       <a:endParaRPr lang="en-US" sz="850" dirty="0">
                         <a:latin typeface="Calibri" charset="0"/>
@@ -28690,7 +27328,7 @@
                           <a:ea typeface="Calibri" pitchFamily="34" charset="-122"/>
                           <a:cs typeface="Calibri" pitchFamily="34" charset="-120"/>
                         </a:rPr>
-                        <a:t>30 frozen independent groups; 12 fresh paired issues</a:t>
+                        <a:t>Step at 0.14; amended 184-group gate retired</a:t>
                       </a:r>
                       <a:endParaRPr lang="en-US" sz="850" dirty="0">
                         <a:latin typeface="Calibri" charset="0"/>
@@ -28750,15 +27388,15 @@
                         <a:buNone/>
                       </a:pPr>
                       <a:r>
-                        <a:rPr lang="en-US" sz="850" b="1" dirty="0">
+                        <a:rPr lang="en-US" sz="850" dirty="0" b="1">
                           <a:solidFill>
-                            <a:srgbClr val="B5821F"/>
+                            <a:srgbClr val="A93B2B"/>
                           </a:solidFill>
                           <a:latin typeface="Calibri" pitchFamily="34" charset="0"/>
                           <a:ea typeface="Calibri" pitchFamily="34" charset="-122"/>
                           <a:cs typeface="Calibri" pitchFamily="34" charset="-120"/>
                         </a:rPr>
-                        <a:t>Verified, one family</a:t>
+                        <a:t>Not supported</a:t>
                       </a:r>
                       <a:endParaRPr lang="en-US" sz="850" dirty="0">
                         <a:latin typeface="Calibri" charset="0"/>
@@ -28805,7 +27443,7 @@
                       <a:tailEnd type="none" w="med" len="med"/>
                     </a:lnB>
                     <a:solidFill>
-                      <a:srgbClr val="FBF4E6"/>
+                      <a:srgbClr val="FBF0EC"/>
                     </a:solidFill>
                   </a:tcPr>
                 </a:tc>
@@ -28901,7 +27539,7 @@
                           <a:ea typeface="Calibri" pitchFamily="34" charset="-122"/>
                           <a:cs typeface="Calibri" pitchFamily="34" charset="-120"/>
                         </a:rPr>
-                        <a:t>The portfolio synthesizes a macro or evaluates a cache action</a:t>
+                        <a:t>Run-time guards protect under drift</a:t>
                       </a:r>
                       <a:endParaRPr lang="en-US" sz="850" dirty="0">
                         <a:latin typeface="Calibri" charset="0"/>
@@ -28969,7 +27607,7 @@
                           <a:ea typeface="Calibri" pitchFamily="34" charset="-122"/>
                           <a:cs typeface="Calibri" pitchFamily="34" charset="-120"/>
                         </a:rPr>
-                        <a:t>Public portfolio API accepts externally supplied measurements only</a:t>
+                        <a:t>Both arms wrong on 39 of 60; two studies null</a:t>
                       </a:r>
                       <a:endParaRPr lang="en-US" sz="850" dirty="0">
                         <a:latin typeface="Calibri" charset="0"/>
@@ -29029,15 +27667,15 @@
                         <a:buNone/>
                       </a:pPr>
                       <a:r>
-                        <a:rPr lang="en-US" sz="850" b="1" dirty="0">
+                        <a:rPr lang="en-US" sz="850" dirty="0" b="1">
                           <a:solidFill>
-                            <a:srgbClr val="5A6B84"/>
+                            <a:srgbClr val="A93B2B"/>
                           </a:solidFill>
                           <a:latin typeface="Calibri" pitchFamily="34" charset="0"/>
                           <a:ea typeface="Calibri" pitchFamily="34" charset="-122"/>
                           <a:cs typeface="Calibri" pitchFamily="34" charset="-120"/>
                         </a:rPr>
-                        <a:t>Not implemented</a:t>
+                        <a:t>Not supported</a:t>
                       </a:r>
                       <a:endParaRPr lang="en-US" sz="850" dirty="0">
                         <a:latin typeface="Calibri" charset="0"/>
@@ -29084,7 +27722,7 @@
                       <a:tailEnd type="none" w="med" len="med"/>
                     </a:lnB>
                     <a:solidFill>
-                      <a:srgbClr val="EFF1F4"/>
+                      <a:srgbClr val="FBF0EC"/>
                     </a:solidFill>
                   </a:tcPr>
                 </a:tc>
@@ -29180,7 +27818,7 @@
                           <a:ea typeface="Calibri" pitchFamily="34" charset="-122"/>
                           <a:cs typeface="Calibri" pitchFamily="34" charset="-120"/>
                         </a:rPr>
-                        <a:t>Portfolio selection beats an always-macro policy across workflows</a:t>
+                        <a:t>Certificates survive clustered units</a:t>
                       </a:r>
                       <a:endParaRPr lang="en-US" sz="850" dirty="0">
                         <a:latin typeface="Calibri" charset="0"/>
@@ -29248,7 +27886,7 @@
                           <a:ea typeface="Calibri" pitchFamily="34" charset="-122"/>
                           <a:cs typeface="Calibri" pitchFamily="34" charset="-120"/>
                         </a:rPr>
-                        <a:t>One family in which the measured macro is selected</a:t>
+                        <a:t>A day or author as one unit retires every family</a:t>
                       </a:r>
                       <a:endParaRPr lang="en-US" sz="850" dirty="0">
                         <a:latin typeface="Calibri" charset="0"/>
@@ -29308,7 +27946,7 @@
                         <a:buNone/>
                       </a:pPr>
                       <a:r>
-                        <a:rPr lang="en-US" sz="850" b="1" dirty="0">
+                        <a:rPr lang="en-US" sz="850" dirty="0" b="1">
                           <a:solidFill>
                             <a:srgbClr val="A93B2B"/>
                           </a:solidFill>
@@ -29410,7 +28048,7 @@
                 <a:ea typeface="Calibri" pitchFamily="34" charset="-122"/>
                 <a:cs typeface="Calibri" pitchFamily="34" charset="-120"/>
               </a:rPr>
-              <a:t>Five claims are not supported, one is not evaluated, and one is not implemented. None of the six that stand is an unqualified pass — each carries its scope inside the verdict cell. Unsupported claims are retained precisely so a later reading cannot quietly promote them.</a:t>
+              <a:t>Five claims are not supported, and every claim that stands carries its scope inside the verdict cell. Unsupported claims are retained so a later reading cannot quietly promote them.</a:t>
             </a:r>
             <a:endParaRPr lang="en-US" sz="1050" dirty="0"/>
           </a:p>
@@ -29483,7 +28121,7 @@
                 <a:ea typeface="Calibri" pitchFamily="34" charset="-122"/>
                 <a:cs typeface="Calibri" pitchFamily="34" charset="-120"/>
               </a:rPr>
-              <a:t>THE FOUR NEGATIVE RESULTS</a:t>
+              <a:t>WHAT IS NOT SHOWN</a:t>
             </a:r>
             <a:endParaRPr lang="en-US" sz="900" dirty="0"/>
           </a:p>
@@ -29525,7 +28163,7 @@
                 <a:ea typeface="Calibri" pitchFamily="34" charset="-122"/>
                 <a:cs typeface="Calibri" pitchFamily="34" charset="-120"/>
               </a:rPr>
-              <a:t>Efficiency gains establish no factual quality  ·  no superiority over hand-written code  ·  no portfolio superiority  ·  no admission safety</a:t>
+              <a:t>no runtime superiority over hand-written code  ·  no graded risk ranking  ·  no protection under drift  ·  no savings across snapshots</a:t>
             </a:r>
             <a:endParaRPr lang="en-US" sz="1050" dirty="0"/>
           </a:p>
@@ -29636,7 +28274,7 @@
                 <a:ea typeface="Calibri" pitchFamily="34" charset="-122"/>
                 <a:cs typeface="Calibri" pitchFamily="34" charset="-120"/>
               </a:rPr>
-              <a:t>25</a:t>
+              <a:t>26</a:t>
             </a:r>
             <a:endParaRPr lang="en-US" sz="900" dirty="0"/>
           </a:p>
@@ -29782,7 +28420,7 @@
                 <a:ea typeface="Cambria" pitchFamily="34" charset="-122"/>
                 <a:cs typeface="Cambria" pitchFamily="34" charset="-120"/>
               </a:rPr>
-              <a:t>An agent optimizer should be judged by whether it can explain and enforce when it must not compile</a:t>
+              <a:t>Judge an optimizer by its evidence, refusals, and fallback — not by turns removed</a:t>
             </a:r>
             <a:endParaRPr lang="en-US" sz="2500" dirty="0"/>
           </a:p>
@@ -29937,7 +28575,7 @@
                 <a:ea typeface="Calibri" pitchFamily="34" charset="-122"/>
                 <a:cs typeface="Calibri" pitchFamily="34" charset="-120"/>
               </a:rPr>
-              <a:t>Each element — typed value-level provenance, effect and position barriers, bounded readable synthesis, verifier and staging semantics, finite-sample selective admission — has predecessors. The contribution is that an agent guard needs all five at once.</a:t>
+              <a:t>Each element — typed provenance, effect and position barriers, bounded readable synthesis, run-time verification, finite-sample admission — has predecessors. The contribution is that an agent guard needs all of them at once, and that every stage can refuse.</a:t>
             </a:r>
             <a:endParaRPr lang="en-US" sz="1050" dirty="0"/>
           </a:p>
@@ -30050,7 +28688,7 @@
                 <a:ea typeface="Cambria" pitchFamily="34" charset="-122"/>
                 <a:cs typeface="Cambria" pitchFamily="34" charset="-120"/>
               </a:rPr>
-              <a:t>Certification, not recurrence, is the scarce resource</a:t>
+              <a:t>Compile what the agent does, not what it is asked</a:t>
             </a:r>
             <a:endParaRPr lang="en-US" sz="1400" dirty="0"/>
           </a:p>
@@ -30092,7 +28730,7 @@
                 <a:ea typeface="Calibri" pitchFamily="34" charset="-122"/>
                 <a:cs typeface="Calibri" pitchFamily="34" charset="-120"/>
               </a:rPr>
-              <a:t>Provenance places the true producer for 96.3% of 5,746 slots and resolves 80.7% uniquely, yet every recurrent family in 1,415 episodes retires at the configured gate. Refusal exposes the data requirement instead of hiding it.</a:t>
+              <a:t>On BIRD a schema-first agent compiles on 26 of 31 databases with 45–50% fewer model calls. An agent that chooses its tables per question, and Claude Sonnet told to read every table, are refused.</a:t>
             </a:r>
             <a:endParaRPr lang="en-US" sz="1050" dirty="0"/>
           </a:p>
@@ -30205,7 +28843,7 @@
                 <a:ea typeface="Cambria" pitchFamily="34" charset="-122"/>
                 <a:cs typeface="Cambria" pitchFamily="34" charset="-120"/>
               </a:rPr>
-              <a:t>Efficiency does not imply quality, superiority, or safety</a:t>
+              <a:t>Certification, not recurrence, is the scarce resource</a:t>
             </a:r>
             <a:endParaRPr lang="en-US" sz="1400" dirty="0"/>
           </a:p>
@@ -30247,7 +28885,7 @@
                 <a:ea typeface="Calibri" pitchFamily="34" charset="-122"/>
                 <a:cs typeface="Calibri" pitchFamily="34" charset="-120"/>
               </a:rPr>
-              <a:t>The two-read artifact holds 30/30 while halving requests; the deeper three-read artifact saves more and records a factual miss. A hand-written macro matches quality and wins on tokens and dollars. Preservation is not invariant to depth.</a:t>
+              <a:t>NESTFUL's best family reaches 26 of the 92 groups the gate needs, AppWorld's admitted program fits almost no ReAct run, and the GitHub certificates mostly confirm sample size. Refusal exposes the data requirement.</a:t>
             </a:r>
             <a:endParaRPr lang="en-US" sz="1050" dirty="0"/>
           </a:p>
@@ -30360,7 +28998,7 @@
                 <a:ea typeface="Cambria" pitchFamily="34" charset="-122"/>
                 <a:cs typeface="Cambria" pitchFamily="34" charset="-120"/>
               </a:rPr>
-              <a:t>Objectives must price cache prefixes, not just tokens</a:t>
+              <a:t>Efficiency is not superiority or protection</a:t>
             </a:r>
             <a:endParaRPr lang="en-US" sz="1400" dirty="0"/>
           </a:p>
@@ -30402,7 +29040,7 @@
                 <a:ea typeface="Calibri" pitchFamily="34" charset="-122"/>
                 <a:cs typeface="Calibri" pitchFamily="34" charset="-120"/>
               </a:rPr>
-              <a:t>A −16.8% token change billed +123%. Route specialization fragments the cache prefix a warm fleet shared. Equation (5) counts only tokens and calls, and §7.3 lists the two-tier price model as the fix.</a:t>
+              <a:t>Hand-written programs also reach 90/90 and use fewer tokens, savings hold within one snapshot, and under drift the run-time checks prevented no wrong answer. The claim is discovery and admission.</a:t>
             </a:r>
             <a:endParaRPr lang="en-US" sz="1050" dirty="0"/>
           </a:p>
@@ -30471,9 +29109,2749 @@
                 <a:ea typeface="Calibri" pitchFamily="34" charset="-122"/>
                 <a:cs typeface="Calibri" pitchFamily="34" charset="-120"/>
               </a:rPr>
-              <a:t>Next scientific threshold: a multi-family, time-forward comparison that includes cache economics, construction and maintenance effort, drift, and closer learned optimizers.</a:t>
+              <a:t>Next threshold: certify graded risk ranking, transfer across snapshots, and protection under drift — none is shown here.</a:t>
             </a:r>
             <a:endParaRPr lang="en-US" sz="1100" dirty="0"/>
+          </a:p>
+        </p:txBody>
+      </p:sp>
+    </p:spTree>
+  </p:cSld>
+  <p:clrMapOvr>
+    <a:masterClrMapping/>
+  </p:clrMapOvr>
+</p:sld>
+</file>
+
+<file path=ppt/slides/slide26.xml><?xml version="1.0" encoding="utf-8"?>
+<p:sld xmlns:a="http://schemas.openxmlformats.org/drawingml/2006/main" xmlns:r="http://schemas.openxmlformats.org/officeDocument/2006/relationships" xmlns:p="http://schemas.openxmlformats.org/presentationml/2006/main">
+  <p:cSld name="Slide 19">
+    <p:bg>
+      <p:bgPr>
+        <a:solidFill>
+          <a:srgbClr val="FFFFFF"/>
+        </a:solidFill>
+        <a:effectLst/>
+      </p:bgPr>
+    </p:bg>
+    <p:spTree>
+      <p:nvGrpSpPr>
+        <p:cNvPr id="1" name=""/>
+        <p:cNvGrpSpPr/>
+        <p:nvPr/>
+      </p:nvGrpSpPr>
+      <p:grpSpPr>
+        <a:xfrm>
+          <a:off x="0" y="0"/>
+          <a:ext cx="0" cy="0"/>
+          <a:chOff x="0" y="0"/>
+          <a:chExt cx="0" cy="0"/>
+        </a:xfrm>
+      </p:grpSpPr>
+      <p:sp>
+        <p:nvSpPr>
+          <p:cNvPr id="2" name="Text 0"/>
+          <p:cNvSpPr/>
+          <p:nvPr/>
+        </p:nvSpPr>
+        <p:spPr>
+          <a:xfrm>
+            <a:off x="640080" y="6345936"/>
+            <a:ext cx="5486400" cy="256032"/>
+          </a:xfrm>
+          <a:prstGeom prst="rect">
+            <a:avLst/>
+          </a:prstGeom>
+          <a:noFill/>
+          <a:ln/>
+        </p:spPr>
+        <p:txBody>
+          <a:bodyPr wrap="square" lIns="0" tIns="0" rIns="0" bIns="0" rtlCol="0" anchor="t"/>
+          <a:lstStyle/>
+          <a:p>
+            <a:pPr marL="0" indent="0">
+              <a:buNone/>
+            </a:pPr>
+            <a:r>
+              <a:rPr lang="en-US" sz="900" kern="0" spc="100" dirty="0">
+                <a:solidFill>
+                  <a:srgbClr val="A3B2C4"/>
+                </a:solidFill>
+                <a:latin typeface="Calibri" pitchFamily="34" charset="0"/>
+                <a:ea typeface="Calibri" pitchFamily="34" charset="-122"/>
+                <a:cs typeface="Calibri" pitchFamily="34" charset="-120"/>
+              </a:rPr>
+              <a:t>Guarded Agentic Compaction</a:t>
+            </a:r>
+            <a:endParaRPr lang="en-US" sz="900" dirty="0"/>
+          </a:p>
+        </p:txBody>
+      </p:sp>
+      <p:sp>
+        <p:nvSpPr>
+          <p:cNvPr id="3" name="Text 1"/>
+          <p:cNvSpPr/>
+          <p:nvPr/>
+        </p:nvSpPr>
+        <p:spPr>
+          <a:xfrm>
+            <a:off x="10637215" y="6345936"/>
+            <a:ext cx="914400" cy="256032"/>
+          </a:xfrm>
+          <a:prstGeom prst="rect">
+            <a:avLst/>
+          </a:prstGeom>
+          <a:noFill/>
+          <a:ln/>
+        </p:spPr>
+        <p:txBody>
+          <a:bodyPr wrap="square" lIns="0" tIns="0" rIns="0" bIns="0" rtlCol="0" anchor="t"/>
+          <a:lstStyle/>
+          <a:p>
+            <a:pPr marL="0" indent="0" algn="r">
+              <a:buNone/>
+            </a:pPr>
+            <a:r>
+              <a:rPr lang="en-US" sz="900" dirty="0">
+                <a:solidFill>
+                  <a:srgbClr val="A3B2C4"/>
+                </a:solidFill>
+                <a:latin typeface="Calibri" pitchFamily="34" charset="0"/>
+                <a:ea typeface="Calibri" pitchFamily="34" charset="-122"/>
+                <a:cs typeface="Calibri" pitchFamily="34" charset="-120"/>
+              </a:rPr>
+              <a:t>21</a:t>
+            </a:r>
+            <a:endParaRPr lang="en-US" sz="900" dirty="0"/>
+          </a:p>
+        </p:txBody>
+      </p:sp>
+      <p:sp>
+        <p:nvSpPr>
+          <p:cNvPr id="4" name="Text 2"/>
+          <p:cNvSpPr/>
+          <p:nvPr/>
+        </p:nvSpPr>
+        <p:spPr>
+          <a:xfrm>
+            <a:off x="640080" y="384048"/>
+            <a:ext cx="10911535" cy="237744"/>
+          </a:xfrm>
+          <a:prstGeom prst="rect">
+            <a:avLst/>
+          </a:prstGeom>
+          <a:noFill/>
+          <a:ln/>
+        </p:spPr>
+        <p:txBody>
+          <a:bodyPr wrap="square" lIns="0" tIns="0" rIns="0" bIns="0" rtlCol="0" anchor="t"/>
+          <a:lstStyle/>
+          <a:p>
+            <a:pPr marL="0" indent="0">
+              <a:buNone/>
+            </a:pPr>
+            <a:r>
+              <a:rPr lang="en-US" sz="1050" b="1" kern="0" spc="180" dirty="0">
+                <a:solidFill>
+                  <a:srgbClr val="1F8A99"/>
+                </a:solidFill>
+                <a:latin typeface="Calibri" pitchFamily="34" charset="0"/>
+                <a:ea typeface="Calibri" pitchFamily="34" charset="-122"/>
+                <a:cs typeface="Calibri" pitchFamily="34" charset="-120"/>
+              </a:rPr>
+              <a:t>RESULTS  ·  §5.3  ·  PUBLIC BENCHMARK  ·  TABLES 19–22</a:t>
+            </a:r>
+            <a:endParaRPr lang="en-US" sz="1050" dirty="0"/>
+          </a:p>
+        </p:txBody>
+      </p:sp>
+      <p:sp>
+        <p:nvSpPr>
+          <p:cNvPr id="5" name="Text 3"/>
+          <p:cNvSpPr/>
+          <p:nvPr/>
+        </p:nvSpPr>
+        <p:spPr>
+          <a:xfrm>
+            <a:off x="640080" y="658368"/>
+            <a:ext cx="10911535" cy="502920"/>
+          </a:xfrm>
+          <a:prstGeom prst="rect">
+            <a:avLst/>
+          </a:prstGeom>
+          <a:noFill/>
+          <a:ln/>
+        </p:spPr>
+        <p:txBody>
+          <a:bodyPr wrap="square" lIns="0" tIns="0" rIns="0" bIns="0" rtlCol="0" anchor="t"/>
+          <a:lstStyle/>
+          <a:p>
+            <a:pPr marL="0" indent="0">
+              <a:buNone/>
+            </a:pPr>
+            <a:r>
+              <a:rPr lang="en-US" sz="2600" b="1" dirty="0">
+                <a:solidFill>
+                  <a:srgbClr val="0E1E3A"/>
+                </a:solidFill>
+                <a:latin typeface="Cambria" pitchFamily="34" charset="0"/>
+                <a:ea typeface="Cambria" pitchFamily="34" charset="-122"/>
+                <a:cs typeface="Cambria" pitchFamily="34" charset="-120"/>
+              </a:rPr>
+              <a:t>BIRD: a public benchmark where GAC helps</a:t>
+            </a:r>
+            <a:endParaRPr lang="en-US" sz="2600" dirty="0"/>
+          </a:p>
+        </p:txBody>
+      </p:sp>
+      <p:sp>
+        <p:nvSpPr>
+          <p:cNvPr id="6" name="Shape 4"/>
+          <p:cNvSpPr/>
+          <p:nvPr/>
+        </p:nvSpPr>
+        <p:spPr>
+          <a:xfrm>
+            <a:off x="640080" y="1170432"/>
+            <a:ext cx="5272888" cy="2944368"/>
+          </a:xfrm>
+          <a:prstGeom prst="roundRect">
+            <a:avLst>
+              <a:gd name="adj" fmla="val 1553"/>
+            </a:avLst>
+          </a:prstGeom>
+          <a:solidFill>
+            <a:srgbClr val="E8F4F5"/>
+          </a:solidFill>
+          <a:ln w="9525">
+            <a:solidFill>
+              <a:srgbClr val="CFE4E7"/>
+            </a:solidFill>
+            <a:prstDash val="solid"/>
+          </a:ln>
+          <a:effectLst>
+            <a:outerShdw blurRad="114300" dist="17780" dir="5400000" algn="bl" rotWithShape="0">
+              <a:srgbClr val="94A6BC">
+                <a:alpha val="15000"/>
+              </a:srgbClr>
+            </a:outerShdw>
+          </a:effectLst>
+        </p:spPr>
+        <p:txBody>
+          <a:bodyPr/>
+          <a:lstStyle/>
+          <a:p>
+            <a:endParaRPr lang="en-US"/>
+          </a:p>
+        </p:txBody>
+      </p:sp>
+      <p:sp>
+        <p:nvSpPr>
+          <p:cNvPr id="7" name="Text 5"/>
+          <p:cNvSpPr/>
+          <p:nvPr/>
+        </p:nvSpPr>
+        <p:spPr>
+          <a:xfrm>
+            <a:off x="914400" y="1316736"/>
+            <a:ext cx="4724248" cy="329184"/>
+          </a:xfrm>
+          <a:prstGeom prst="rect">
+            <a:avLst/>
+          </a:prstGeom>
+          <a:noFill/>
+          <a:ln/>
+        </p:spPr>
+        <p:txBody>
+          <a:bodyPr wrap="square" lIns="0" tIns="0" rIns="0" bIns="0" rtlCol="0" anchor="t"/>
+          <a:lstStyle/>
+          <a:p>
+            <a:pPr marL="0" indent="0">
+              <a:buNone/>
+            </a:pPr>
+            <a:r>
+              <a:rPr lang="en-US" sz="1700" b="1" dirty="0">
+                <a:solidFill>
+                  <a:srgbClr val="0E1E3A"/>
+                </a:solidFill>
+                <a:latin typeface="Cambria" pitchFamily="34" charset="0"/>
+                <a:ea typeface="Cambria" pitchFamily="34" charset="-122"/>
+                <a:cs typeface="Cambria" pitchFamily="34" charset="-120"/>
+              </a:rPr>
+              <a:t>Schema-first agent</a:t>
+            </a:r>
+            <a:endParaRPr lang="en-US" sz="1700" dirty="0"/>
+          </a:p>
+        </p:txBody>
+      </p:sp>
+      <p:sp>
+        <p:nvSpPr>
+          <p:cNvPr id="8" name="Text 6"/>
+          <p:cNvSpPr/>
+          <p:nvPr/>
+        </p:nvSpPr>
+        <p:spPr>
+          <a:xfrm>
+            <a:off x="914400" y="1645920"/>
+            <a:ext cx="4724248" cy="237744"/>
+          </a:xfrm>
+          <a:prstGeom prst="rect">
+            <a:avLst/>
+          </a:prstGeom>
+          <a:noFill/>
+          <a:ln/>
+        </p:spPr>
+        <p:txBody>
+          <a:bodyPr wrap="square" lIns="0" tIns="0" rIns="0" bIns="0" rtlCol="0" anchor="t"/>
+          <a:lstStyle/>
+          <a:p>
+            <a:pPr marL="0" indent="0">
+              <a:buNone/>
+            </a:pPr>
+            <a:r>
+              <a:rPr lang="en-US" sz="1050" i="1" dirty="0">
+                <a:solidFill>
+                  <a:srgbClr val="5A6B84"/>
+                </a:solidFill>
+                <a:latin typeface="Calibri" pitchFamily="34" charset="0"/>
+                <a:ea typeface="Calibri" pitchFamily="34" charset="-122"/>
+                <a:cs typeface="Calibri" pitchFamily="34" charset="-120"/>
+              </a:rPr>
+              <a:t>reads every table first  ·  26 of 31 databases</a:t>
+            </a:r>
+            <a:endParaRPr lang="en-US" sz="1050" dirty="0"/>
+          </a:p>
+        </p:txBody>
+      </p:sp>
+      <p:sp>
+        <p:nvSpPr>
+          <p:cNvPr id="9" name="Text 7"/>
+          <p:cNvSpPr/>
+          <p:nvPr/>
+        </p:nvSpPr>
+        <p:spPr>
+          <a:xfrm>
+            <a:off x="914400" y="1975104"/>
+            <a:ext cx="1371600" cy="310896"/>
+          </a:xfrm>
+          <a:prstGeom prst="rect">
+            <a:avLst/>
+          </a:prstGeom>
+          <a:noFill/>
+          <a:ln/>
+        </p:spPr>
+        <p:txBody>
+          <a:bodyPr wrap="square" lIns="0" tIns="0" rIns="0" bIns="0" rtlCol="0" anchor="ctr"/>
+          <a:lstStyle/>
+          <a:p>
+            <a:pPr marL="0" indent="0">
+              <a:buNone/>
+            </a:pPr>
+            <a:r>
+              <a:rPr lang="en-US" sz="1500" b="1" dirty="0">
+                <a:solidFill>
+                  <a:srgbClr val="0E1E3A"/>
+                </a:solidFill>
+                <a:latin typeface="Cambria" pitchFamily="34" charset="0"/>
+                <a:ea typeface="Cambria" pitchFamily="34" charset="-122"/>
+                <a:cs typeface="Cambria" pitchFamily="34" charset="-120"/>
+              </a:rPr>
+              <a:t>−45.8%</a:t>
+            </a:r>
+            <a:endParaRPr lang="en-US" sz="1500" dirty="0"/>
+          </a:p>
+        </p:txBody>
+      </p:sp>
+      <p:sp>
+        <p:nvSpPr>
+          <p:cNvPr id="10" name="Text 8"/>
+          <p:cNvSpPr/>
+          <p:nvPr/>
+        </p:nvSpPr>
+        <p:spPr>
+          <a:xfrm>
+            <a:off x="2377440" y="1975104"/>
+            <a:ext cx="3261208" cy="310896"/>
+          </a:xfrm>
+          <a:prstGeom prst="rect">
+            <a:avLst/>
+          </a:prstGeom>
+          <a:noFill/>
+          <a:ln/>
+        </p:spPr>
+        <p:txBody>
+          <a:bodyPr wrap="square" lIns="0" tIns="0" rIns="0" bIns="0" rtlCol="0" anchor="ctr"/>
+          <a:lstStyle/>
+          <a:p>
+            <a:pPr marL="0" indent="0">
+              <a:buNone/>
+            </a:pPr>
+            <a:r>
+              <a:rPr lang="en-US" sz="1100" dirty="0">
+                <a:solidFill>
+                  <a:srgbClr val="24354F"/>
+                </a:solidFill>
+                <a:latin typeface="Calibri" pitchFamily="34" charset="0"/>
+                <a:ea typeface="Calibri" pitchFamily="34" charset="-122"/>
+                <a:cs typeface="Calibri" pitchFamily="34" charset="-120"/>
+              </a:rPr>
+              <a:t>requests, 629 completed training pairs</a:t>
+            </a:r>
+            <a:endParaRPr lang="en-US" sz="1100" dirty="0"/>
+          </a:p>
+        </p:txBody>
+      </p:sp>
+      <p:sp>
+        <p:nvSpPr>
+          <p:cNvPr id="11" name="Text 9"/>
+          <p:cNvSpPr/>
+          <p:nvPr/>
+        </p:nvSpPr>
+        <p:spPr>
+          <a:xfrm>
+            <a:off x="914400" y="2377440"/>
+            <a:ext cx="1371600" cy="310896"/>
+          </a:xfrm>
+          <a:prstGeom prst="rect">
+            <a:avLst/>
+          </a:prstGeom>
+          <a:noFill/>
+          <a:ln/>
+        </p:spPr>
+        <p:txBody>
+          <a:bodyPr wrap="square" lIns="0" tIns="0" rIns="0" bIns="0" rtlCol="0" anchor="ctr"/>
+          <a:lstStyle/>
+          <a:p>
+            <a:pPr marL="0" indent="0">
+              <a:buNone/>
+            </a:pPr>
+            <a:r>
+              <a:rPr lang="en-US" sz="1500" b="1" dirty="0">
+                <a:solidFill>
+                  <a:srgbClr val="0E1E3A"/>
+                </a:solidFill>
+                <a:latin typeface="Cambria" pitchFamily="34" charset="0"/>
+                <a:ea typeface="Cambria" pitchFamily="34" charset="-122"/>
+                <a:cs typeface="Cambria" pitchFamily="34" charset="-120"/>
+              </a:rPr>
+              <a:t>402 / 403</a:t>
+            </a:r>
+            <a:endParaRPr lang="en-US" sz="1500" dirty="0"/>
+          </a:p>
+        </p:txBody>
+      </p:sp>
+      <p:sp>
+        <p:nvSpPr>
+          <p:cNvPr id="12" name="Text 10"/>
+          <p:cNvSpPr/>
+          <p:nvPr/>
+        </p:nvSpPr>
+        <p:spPr>
+          <a:xfrm>
+            <a:off x="2377440" y="2377440"/>
+            <a:ext cx="3261208" cy="310896"/>
+          </a:xfrm>
+          <a:prstGeom prst="rect">
+            <a:avLst/>
+          </a:prstGeom>
+          <a:noFill/>
+          <a:ln/>
+        </p:spPr>
+        <p:txBody>
+          <a:bodyPr wrap="square" lIns="0" tIns="0" rIns="0" bIns="0" rtlCol="0" anchor="ctr"/>
+          <a:lstStyle/>
+          <a:p>
+            <a:pPr marL="0" indent="0">
+              <a:buNone/>
+            </a:pPr>
+            <a:r>
+              <a:rPr lang="en-US" sz="1100" dirty="0">
+                <a:solidFill>
+                  <a:srgbClr val="24354F"/>
+                </a:solidFill>
+                <a:latin typeface="Calibri" pitchFamily="34" charset="0"/>
+                <a:ea typeface="Calibri" pitchFamily="34" charset="-122"/>
+                <a:cs typeface="Calibri" pitchFamily="34" charset="-120"/>
+              </a:rPr>
+              <a:t>correct of 630, compiled vs. unchanged</a:t>
+            </a:r>
+            <a:endParaRPr lang="en-US" sz="1100" dirty="0"/>
+          </a:p>
+        </p:txBody>
+      </p:sp>
+      <p:sp>
+        <p:nvSpPr>
+          <p:cNvPr id="13" name="Text 11"/>
+          <p:cNvSpPr/>
+          <p:nvPr/>
+        </p:nvSpPr>
+        <p:spPr>
+          <a:xfrm>
+            <a:off x="914400" y="2779776"/>
+            <a:ext cx="1371600" cy="310896"/>
+          </a:xfrm>
+          <a:prstGeom prst="rect">
+            <a:avLst/>
+          </a:prstGeom>
+          <a:noFill/>
+          <a:ln/>
+        </p:spPr>
+        <p:txBody>
+          <a:bodyPr wrap="square" lIns="0" tIns="0" rIns="0" bIns="0" rtlCol="0" anchor="ctr"/>
+          <a:lstStyle/>
+          <a:p>
+            <a:pPr marL="0" indent="0">
+              <a:buNone/>
+            </a:pPr>
+            <a:r>
+              <a:rPr lang="en-US" sz="1500" b="1" dirty="0">
+                <a:solidFill>
+                  <a:srgbClr val="0E1E3A"/>
+                </a:solidFill>
+                <a:latin typeface="Cambria" pitchFamily="34" charset="0"/>
+                <a:ea typeface="Cambria" pitchFamily="34" charset="-122"/>
+                <a:cs typeface="Cambria" pitchFamily="34" charset="-120"/>
+              </a:rPr>
+              <a:t>[−3.3, +3.0]</a:t>
+            </a:r>
+            <a:endParaRPr lang="en-US" sz="1500" dirty="0"/>
+          </a:p>
+        </p:txBody>
+      </p:sp>
+      <p:sp>
+        <p:nvSpPr>
+          <p:cNvPr id="14" name="Text 12"/>
+          <p:cNvSpPr/>
+          <p:nvPr/>
+        </p:nvSpPr>
+        <p:spPr>
+          <a:xfrm>
+            <a:off x="2377440" y="2779776"/>
+            <a:ext cx="3261208" cy="310896"/>
+          </a:xfrm>
+          <a:prstGeom prst="rect">
+            <a:avLst/>
+          </a:prstGeom>
+          <a:noFill/>
+          <a:ln/>
+        </p:spPr>
+        <p:txBody>
+          <a:bodyPr wrap="square" lIns="0" tIns="0" rIns="0" bIns="0" rtlCol="0" anchor="ctr"/>
+          <a:lstStyle/>
+          <a:p>
+            <a:pPr marL="0" indent="0">
+              <a:buNone/>
+            </a:pPr>
+            <a:r>
+              <a:rPr lang="en-US" sz="1100" dirty="0">
+                <a:solidFill>
+                  <a:srgbClr val="24354F"/>
+                </a:solidFill>
+                <a:latin typeface="Calibri" pitchFamily="34" charset="0"/>
+                <a:ea typeface="Calibri" pitchFamily="34" charset="-122"/>
+                <a:cs typeface="Calibri" pitchFamily="34" charset="-120"/>
+              </a:rPr>
+              <a:t>accuracy difference, 95% interval (points)</a:t>
+            </a:r>
+            <a:endParaRPr lang="en-US" sz="1100" dirty="0"/>
+          </a:p>
+        </p:txBody>
+      </p:sp>
+      <p:sp>
+        <p:nvSpPr>
+          <p:cNvPr id="15" name="Text 13"/>
+          <p:cNvSpPr/>
+          <p:nvPr/>
+        </p:nvSpPr>
+        <p:spPr>
+          <a:xfrm>
+            <a:off x="914400" y="3182112"/>
+            <a:ext cx="1371600" cy="310896"/>
+          </a:xfrm>
+          <a:prstGeom prst="rect">
+            <a:avLst/>
+          </a:prstGeom>
+          <a:noFill/>
+          <a:ln/>
+        </p:spPr>
+        <p:txBody>
+          <a:bodyPr wrap="square" lIns="0" tIns="0" rIns="0" bIns="0" rtlCol="0" anchor="ctr"/>
+          <a:lstStyle/>
+          <a:p>
+            <a:pPr marL="0" indent="0">
+              <a:buNone/>
+            </a:pPr>
+            <a:r>
+              <a:rPr lang="en-US" sz="1500" b="1" dirty="0">
+                <a:solidFill>
+                  <a:srgbClr val="0E1E3A"/>
+                </a:solidFill>
+                <a:latin typeface="Cambria" pitchFamily="34" charset="0"/>
+                <a:ea typeface="Cambria" pitchFamily="34" charset="-122"/>
+                <a:cs typeface="Cambria" pitchFamily="34" charset="-120"/>
+              </a:rPr>
+              <a:t>−49.6%</a:t>
+            </a:r>
+            <a:endParaRPr lang="en-US" sz="1500" dirty="0"/>
+          </a:p>
+        </p:txBody>
+      </p:sp>
+      <p:sp>
+        <p:nvSpPr>
+          <p:cNvPr id="16" name="Text 14"/>
+          <p:cNvSpPr/>
+          <p:nvPr/>
+        </p:nvSpPr>
+        <p:spPr>
+          <a:xfrm>
+            <a:off x="2377440" y="3182112"/>
+            <a:ext cx="3261208" cy="310896"/>
+          </a:xfrm>
+          <a:prstGeom prst="rect">
+            <a:avLst/>
+          </a:prstGeom>
+          <a:noFill/>
+          <a:ln/>
+        </p:spPr>
+        <p:txBody>
+          <a:bodyPr wrap="square" lIns="0" tIns="0" rIns="0" bIns="0" rtlCol="0" anchor="ctr"/>
+          <a:lstStyle/>
+          <a:p>
+            <a:pPr marL="0" indent="0">
+              <a:buNone/>
+            </a:pPr>
+            <a:r>
+              <a:rPr lang="en-US" sz="1100" dirty="0">
+                <a:solidFill>
+                  <a:srgbClr val="24354F"/>
+                </a:solidFill>
+                <a:latin typeface="Calibri" pitchFamily="34" charset="0"/>
+                <a:ea typeface="Calibri" pitchFamily="34" charset="-122"/>
+                <a:cs typeface="Calibri" pitchFamily="34" charset="-120"/>
+              </a:rPr>
+              <a:t>requests on gpt-6-luna; 93 vs. 91 of 150</a:t>
+            </a:r>
+            <a:endParaRPr lang="en-US" sz="1100" dirty="0"/>
+          </a:p>
+        </p:txBody>
+      </p:sp>
+      <p:sp>
+        <p:nvSpPr>
+          <p:cNvPr id="17" name="Text 15"/>
+          <p:cNvSpPr/>
+          <p:nvPr/>
+        </p:nvSpPr>
+        <p:spPr>
+          <a:xfrm>
+            <a:off x="914400" y="3621024"/>
+            <a:ext cx="4724248" cy="402336"/>
+          </a:xfrm>
+          <a:prstGeom prst="rect">
+            <a:avLst/>
+          </a:prstGeom>
+          <a:noFill/>
+          <a:ln/>
+        </p:spPr>
+        <p:txBody>
+          <a:bodyPr wrap="square" lIns="0" tIns="0" rIns="0" bIns="0" rtlCol="0" anchor="t"/>
+          <a:lstStyle/>
+          <a:p>
+            <a:pPr marL="0" indent="0">
+              <a:lnSpc>
+                <a:spcPct val="105000"/>
+              </a:lnSpc>
+              <a:buNone/>
+            </a:pPr>
+            <a:r>
+              <a:rPr lang="en-US" sz="1000" dirty="0">
+                <a:solidFill>
+                  <a:srgbClr val="5A6B84"/>
+                </a:solidFill>
+                <a:latin typeface="Calibri" pitchFamily="34" charset="0"/>
+                <a:ea typeface="Calibri" pitchFamily="34" charset="-122"/>
+                <a:cs typeface="Calibri" pitchFamily="34" charset="-120"/>
+              </a:rPr>
+              <a:t>On the five dev databases the compiled agent dispatched on every question and answered 97 against 94 of 150 (McNemar p = 0.45).</a:t>
+            </a:r>
+            <a:endParaRPr lang="en-US" sz="1000" dirty="0"/>
+          </a:p>
+        </p:txBody>
+      </p:sp>
+      <p:sp>
+        <p:nvSpPr>
+          <p:cNvPr id="18" name="Shape 16"/>
+          <p:cNvSpPr/>
+          <p:nvPr/>
+        </p:nvSpPr>
+        <p:spPr>
+          <a:xfrm>
+            <a:off x="6278728" y="1170432"/>
+            <a:ext cx="5272888" cy="2944368"/>
+          </a:xfrm>
+          <a:prstGeom prst="roundRect">
+            <a:avLst>
+              <a:gd name="adj" fmla="val 1553"/>
+            </a:avLst>
+          </a:prstGeom>
+          <a:solidFill>
+            <a:srgbClr val="FBF0EC"/>
+          </a:solidFill>
+          <a:ln w="9525">
+            <a:solidFill>
+              <a:srgbClr val="EFDCD4"/>
+            </a:solidFill>
+            <a:prstDash val="solid"/>
+          </a:ln>
+          <a:effectLst>
+            <a:outerShdw blurRad="114300" dist="17780" dir="5400000" algn="bl" rotWithShape="0">
+              <a:srgbClr val="94A6BC">
+                <a:alpha val="15000"/>
+              </a:srgbClr>
+            </a:outerShdw>
+          </a:effectLst>
+        </p:spPr>
+        <p:txBody>
+          <a:bodyPr/>
+          <a:lstStyle/>
+          <a:p>
+            <a:endParaRPr lang="en-US"/>
+          </a:p>
+        </p:txBody>
+      </p:sp>
+      <p:sp>
+        <p:nvSpPr>
+          <p:cNvPr id="19" name="Text 17"/>
+          <p:cNvSpPr/>
+          <p:nvPr/>
+        </p:nvSpPr>
+        <p:spPr>
+          <a:xfrm>
+            <a:off x="6553048" y="1316736"/>
+            <a:ext cx="4724248" cy="329184"/>
+          </a:xfrm>
+          <a:prstGeom prst="rect">
+            <a:avLst/>
+          </a:prstGeom>
+          <a:noFill/>
+          <a:ln/>
+        </p:spPr>
+        <p:txBody>
+          <a:bodyPr wrap="square" lIns="0" tIns="0" rIns="0" bIns="0" rtlCol="0" anchor="t"/>
+          <a:lstStyle/>
+          <a:p>
+            <a:pPr marL="0" indent="0">
+              <a:buNone/>
+            </a:pPr>
+            <a:r>
+              <a:rPr lang="en-US" sz="1700" b="1" dirty="0">
+                <a:solidFill>
+                  <a:srgbClr val="A93B2B"/>
+                </a:solidFill>
+                <a:latin typeface="Cambria" pitchFamily="34" charset="0"/>
+                <a:ea typeface="Cambria" pitchFamily="34" charset="-122"/>
+                <a:cs typeface="Cambria" pitchFamily="34" charset="-120"/>
+              </a:rPr>
+              <a:t>Standard agent</a:t>
+            </a:r>
+            <a:endParaRPr lang="en-US" sz="1700" dirty="0"/>
+          </a:p>
+        </p:txBody>
+      </p:sp>
+      <p:sp>
+        <p:nvSpPr>
+          <p:cNvPr id="20" name="Text 18"/>
+          <p:cNvSpPr/>
+          <p:nvPr/>
+        </p:nvSpPr>
+        <p:spPr>
+          <a:xfrm>
+            <a:off x="6553048" y="1645920"/>
+            <a:ext cx="4724248" cy="237744"/>
+          </a:xfrm>
+          <a:prstGeom prst="rect">
+            <a:avLst/>
+          </a:prstGeom>
+          <a:noFill/>
+          <a:ln/>
+        </p:spPr>
+        <p:txBody>
+          <a:bodyPr wrap="square" lIns="0" tIns="0" rIns="0" bIns="0" rtlCol="0" anchor="t"/>
+          <a:lstStyle/>
+          <a:p>
+            <a:pPr marL="0" indent="0">
+              <a:buNone/>
+            </a:pPr>
+            <a:r>
+              <a:rPr lang="en-US" sz="1050" i="1" dirty="0">
+                <a:solidFill>
+                  <a:srgbClr val="5A6B84"/>
+                </a:solidFill>
+                <a:latin typeface="Calibri" pitchFamily="34" charset="0"/>
+                <a:ea typeface="Calibri" pitchFamily="34" charset="-122"/>
+                <a:cs typeface="Calibri" pitchFamily="34" charset="-120"/>
+              </a:rPr>
+              <a:t>picks its tables for each question</a:t>
+            </a:r>
+            <a:endParaRPr lang="en-US" sz="1050" dirty="0"/>
+          </a:p>
+        </p:txBody>
+      </p:sp>
+      <p:sp>
+        <p:nvSpPr>
+          <p:cNvPr id="21" name="Text 19"/>
+          <p:cNvSpPr/>
+          <p:nvPr/>
+        </p:nvSpPr>
+        <p:spPr>
+          <a:xfrm>
+            <a:off x="6553048" y="1975104"/>
+            <a:ext cx="1371600" cy="310896"/>
+          </a:xfrm>
+          <a:prstGeom prst="rect">
+            <a:avLst/>
+          </a:prstGeom>
+          <a:noFill/>
+          <a:ln/>
+        </p:spPr>
+        <p:txBody>
+          <a:bodyPr wrap="square" lIns="0" tIns="0" rIns="0" bIns="0" rtlCol="0" anchor="ctr"/>
+          <a:lstStyle/>
+          <a:p>
+            <a:pPr marL="0" indent="0">
+              <a:buNone/>
+            </a:pPr>
+            <a:r>
+              <a:rPr lang="en-US" sz="1500" b="1" dirty="0">
+                <a:solidFill>
+                  <a:srgbClr val="A93B2B"/>
+                </a:solidFill>
+                <a:latin typeface="Cambria" pitchFamily="34" charset="0"/>
+                <a:ea typeface="Cambria" pitchFamily="34" charset="-122"/>
+                <a:cs typeface="Cambria" pitchFamily="34" charset="-120"/>
+              </a:rPr>
+              <a:t>0 / 36</a:t>
+            </a:r>
+            <a:endParaRPr lang="en-US" sz="1500" dirty="0"/>
+          </a:p>
+        </p:txBody>
+      </p:sp>
+      <p:sp>
+        <p:nvSpPr>
+          <p:cNvPr id="22" name="Text 20"/>
+          <p:cNvSpPr/>
+          <p:nvPr/>
+        </p:nvSpPr>
+        <p:spPr>
+          <a:xfrm>
+            <a:off x="8016088" y="1975104"/>
+            <a:ext cx="3261208" cy="310896"/>
+          </a:xfrm>
+          <a:prstGeom prst="rect">
+            <a:avLst/>
+          </a:prstGeom>
+          <a:noFill/>
+          <a:ln/>
+        </p:spPr>
+        <p:txBody>
+          <a:bodyPr wrap="square" lIns="0" tIns="0" rIns="0" bIns="0" rtlCol="0" anchor="ctr"/>
+          <a:lstStyle/>
+          <a:p>
+            <a:pPr marL="0" indent="0">
+              <a:buNone/>
+            </a:pPr>
+            <a:r>
+              <a:rPr lang="en-US" sz="1100" dirty="0">
+                <a:solidFill>
+                  <a:srgbClr val="24354F"/>
+                </a:solidFill>
+                <a:latin typeface="Calibri" pitchFamily="34" charset="0"/>
+                <a:ea typeface="Calibri" pitchFamily="34" charset="-122"/>
+                <a:cs typeface="Calibri" pitchFamily="34" charset="-120"/>
+              </a:rPr>
+              <a:t>database runs compiled, two OpenAI models</a:t>
+            </a:r>
+            <a:endParaRPr lang="en-US" sz="1100" dirty="0"/>
+          </a:p>
+        </p:txBody>
+      </p:sp>
+      <p:sp>
+        <p:nvSpPr>
+          <p:cNvPr id="23" name="Text 21"/>
+          <p:cNvSpPr/>
+          <p:nvPr/>
+        </p:nvSpPr>
+        <p:spPr>
+          <a:xfrm>
+            <a:off x="6553048" y="2377440"/>
+            <a:ext cx="1371600" cy="310896"/>
+          </a:xfrm>
+          <a:prstGeom prst="rect">
+            <a:avLst/>
+          </a:prstGeom>
+          <a:noFill/>
+          <a:ln/>
+        </p:spPr>
+        <p:txBody>
+          <a:bodyPr wrap="square" lIns="0" tIns="0" rIns="0" bIns="0" rtlCol="0" anchor="ctr"/>
+          <a:lstStyle/>
+          <a:p>
+            <a:pPr marL="0" indent="0">
+              <a:buNone/>
+            </a:pPr>
+            <a:r>
+              <a:rPr lang="en-US" sz="1500" b="1" dirty="0">
+                <a:solidFill>
+                  <a:srgbClr val="A93B2B"/>
+                </a:solidFill>
+                <a:latin typeface="Cambria" pitchFamily="34" charset="0"/>
+                <a:ea typeface="Cambria" pitchFamily="34" charset="-122"/>
+                <a:cs typeface="Cambria" pitchFamily="34" charset="-120"/>
+              </a:rPr>
+              <a:t>7–39</a:t>
+            </a:r>
+            <a:endParaRPr lang="en-US" sz="1500" dirty="0"/>
+          </a:p>
+        </p:txBody>
+      </p:sp>
+      <p:sp>
+        <p:nvSpPr>
+          <p:cNvPr id="24" name="Text 22"/>
+          <p:cNvSpPr/>
+          <p:nvPr/>
+        </p:nvSpPr>
+        <p:spPr>
+          <a:xfrm>
+            <a:off x="8016088" y="2377440"/>
+            <a:ext cx="3261208" cy="310896"/>
+          </a:xfrm>
+          <a:prstGeom prst="rect">
+            <a:avLst/>
+          </a:prstGeom>
+          <a:noFill/>
+          <a:ln/>
+        </p:spPr>
+        <p:txBody>
+          <a:bodyPr wrap="square" lIns="0" tIns="0" rIns="0" bIns="0" rtlCol="0" anchor="ctr"/>
+          <a:lstStyle/>
+          <a:p>
+            <a:pPr marL="0" indent="0">
+              <a:buNone/>
+            </a:pPr>
+            <a:r>
+              <a:rPr lang="en-US" sz="1100" dirty="0">
+                <a:solidFill>
+                  <a:srgbClr val="24354F"/>
+                </a:solidFill>
+                <a:latin typeface="Calibri" pitchFamily="34" charset="0"/>
+                <a:ea typeface="Calibri" pitchFamily="34" charset="-122"/>
+                <a:cs typeface="Calibri" pitchFamily="34" charset="-120"/>
+              </a:rPr>
+              <a:t>distinct table lists per dev database</a:t>
+            </a:r>
+            <a:endParaRPr lang="en-US" sz="1100" dirty="0"/>
+          </a:p>
+        </p:txBody>
+      </p:sp>
+      <p:sp>
+        <p:nvSpPr>
+          <p:cNvPr id="25" name="Text 23"/>
+          <p:cNvSpPr/>
+          <p:nvPr/>
+        </p:nvSpPr>
+        <p:spPr>
+          <a:xfrm>
+            <a:off x="6553048" y="2779776"/>
+            <a:ext cx="1371600" cy="310896"/>
+          </a:xfrm>
+          <a:prstGeom prst="rect">
+            <a:avLst/>
+          </a:prstGeom>
+          <a:noFill/>
+          <a:ln/>
+        </p:spPr>
+        <p:txBody>
+          <a:bodyPr wrap="square" lIns="0" tIns="0" rIns="0" bIns="0" rtlCol="0" anchor="ctr"/>
+          <a:lstStyle/>
+          <a:p>
+            <a:pPr marL="0" indent="0">
+              <a:buNone/>
+            </a:pPr>
+            <a:r>
+              <a:rPr lang="en-US" sz="1500" b="1" dirty="0">
+                <a:solidFill>
+                  <a:srgbClr val="A93B2B"/>
+                </a:solidFill>
+                <a:latin typeface="Cambria" pitchFamily="34" charset="0"/>
+                <a:ea typeface="Cambria" pitchFamily="34" charset="-122"/>
+                <a:cs typeface="Cambria" pitchFamily="34" charset="-120"/>
+              </a:rPr>
+              <a:t>0 / 10</a:t>
+            </a:r>
+            <a:endParaRPr lang="en-US" sz="1500" dirty="0"/>
+          </a:p>
+        </p:txBody>
+      </p:sp>
+      <p:sp>
+        <p:nvSpPr>
+          <p:cNvPr id="26" name="Text 24"/>
+          <p:cNvSpPr/>
+          <p:nvPr/>
+        </p:nvSpPr>
+        <p:spPr>
+          <a:xfrm>
+            <a:off x="8016088" y="2779776"/>
+            <a:ext cx="3261208" cy="310896"/>
+          </a:xfrm>
+          <a:prstGeom prst="rect">
+            <a:avLst/>
+          </a:prstGeom>
+          <a:noFill/>
+          <a:ln/>
+        </p:spPr>
+        <p:txBody>
+          <a:bodyPr wrap="square" lIns="0" tIns="0" rIns="0" bIns="0" rtlCol="0" anchor="ctr"/>
+          <a:lstStyle/>
+          <a:p>
+            <a:pPr marL="0" indent="0">
+              <a:buNone/>
+            </a:pPr>
+            <a:r>
+              <a:rPr lang="en-US" sz="1100" dirty="0">
+                <a:solidFill>
+                  <a:srgbClr val="24354F"/>
+                </a:solidFill>
+                <a:latin typeface="Calibri" pitchFamily="34" charset="0"/>
+                <a:ea typeface="Calibri" pitchFamily="34" charset="-122"/>
+                <a:cs typeface="Calibri" pitchFamily="34" charset="-120"/>
+              </a:rPr>
+              <a:t>database-design pairs on Claude Sonnet</a:t>
+            </a:r>
+            <a:endParaRPr lang="en-US" sz="1100" dirty="0"/>
+          </a:p>
+        </p:txBody>
+      </p:sp>
+      <p:sp>
+        <p:nvSpPr>
+          <p:cNvPr id="27" name="Text 25"/>
+          <p:cNvSpPr/>
+          <p:nvPr/>
+        </p:nvSpPr>
+        <p:spPr>
+          <a:xfrm>
+            <a:off x="6553048" y="3182112"/>
+            <a:ext cx="1371600" cy="310896"/>
+          </a:xfrm>
+          <a:prstGeom prst="rect">
+            <a:avLst/>
+          </a:prstGeom>
+          <a:noFill/>
+          <a:ln/>
+        </p:spPr>
+        <p:txBody>
+          <a:bodyPr wrap="square" lIns="0" tIns="0" rIns="0" bIns="0" rtlCol="0" anchor="ctr"/>
+          <a:lstStyle/>
+          <a:p>
+            <a:pPr marL="0" indent="0">
+              <a:buNone/>
+            </a:pPr>
+            <a:r>
+              <a:rPr lang="en-US" sz="1500" b="1" dirty="0">
+                <a:solidFill>
+                  <a:srgbClr val="A93B2B"/>
+                </a:solidFill>
+                <a:latin typeface="Cambria" pitchFamily="34" charset="0"/>
+                <a:ea typeface="Cambria" pitchFamily="34" charset="-122"/>
+                <a:cs typeface="Cambria" pitchFamily="34" charset="-120"/>
+              </a:rPr>
+              <a:t>26 / 655</a:t>
+            </a:r>
+            <a:endParaRPr lang="en-US" sz="1500" dirty="0"/>
+          </a:p>
+        </p:txBody>
+      </p:sp>
+      <p:sp>
+        <p:nvSpPr>
+          <p:cNvPr id="28" name="Text 26"/>
+          <p:cNvSpPr/>
+          <p:nvPr/>
+        </p:nvSpPr>
+        <p:spPr>
+          <a:xfrm>
+            <a:off x="8016088" y="3182112"/>
+            <a:ext cx="3261208" cy="310896"/>
+          </a:xfrm>
+          <a:prstGeom prst="rect">
+            <a:avLst/>
+          </a:prstGeom>
+          <a:noFill/>
+          <a:ln/>
+        </p:spPr>
+        <p:txBody>
+          <a:bodyPr wrap="square" lIns="0" tIns="0" rIns="0" bIns="0" rtlCol="0" anchor="ctr"/>
+          <a:lstStyle/>
+          <a:p>
+            <a:pPr marL="0" indent="0">
+              <a:buNone/>
+            </a:pPr>
+            <a:r>
+              <a:rPr lang="en-US" sz="1100" dirty="0">
+                <a:solidFill>
+                  <a:srgbClr val="24354F"/>
+                </a:solidFill>
+                <a:latin typeface="Calibri" pitchFamily="34" charset="0"/>
+                <a:ea typeface="Calibri" pitchFamily="34" charset="-122"/>
+                <a:cs typeface="Calibri" pitchFamily="34" charset="-120"/>
+              </a:rPr>
+              <a:t>Sonnet runs that passed every table</a:t>
+            </a:r>
+            <a:endParaRPr lang="en-US" sz="1100" dirty="0"/>
+          </a:p>
+        </p:txBody>
+      </p:sp>
+      <p:sp>
+        <p:nvSpPr>
+          <p:cNvPr id="29" name="Text 27"/>
+          <p:cNvSpPr/>
+          <p:nvPr/>
+        </p:nvSpPr>
+        <p:spPr>
+          <a:xfrm>
+            <a:off x="6553048" y="3621024"/>
+            <a:ext cx="4724248" cy="402336"/>
+          </a:xfrm>
+          <a:prstGeom prst="rect">
+            <a:avLst/>
+          </a:prstGeom>
+          <a:noFill/>
+          <a:ln/>
+        </p:spPr>
+        <p:txBody>
+          <a:bodyPr wrap="square" lIns="0" tIns="0" rIns="0" bIns="0" rtlCol="0" anchor="t"/>
+          <a:lstStyle/>
+          <a:p>
+            <a:pPr marL="0" indent="0">
+              <a:lnSpc>
+                <a:spcPct val="105000"/>
+              </a:lnSpc>
+              <a:buNone/>
+            </a:pPr>
+            <a:r>
+              <a:rPr lang="en-US" sz="1000" dirty="0">
+                <a:solidFill>
+                  <a:srgbClr val="5C4034"/>
+                </a:solidFill>
+                <a:latin typeface="Calibri" pitchFamily="34" charset="0"/>
+                <a:ea typeface="Calibri" pitchFamily="34" charset="-122"/>
+                <a:cs typeface="Calibri" pitchFamily="34" charset="-120"/>
+              </a:rPr>
+              <a:t>The table list is a per-question model decision, so there is nothing fixed to compile.</a:t>
+            </a:r>
+            <a:endParaRPr lang="en-US" sz="1000" dirty="0"/>
+          </a:p>
+        </p:txBody>
+      </p:sp>
+      <p:sp>
+        <p:nvSpPr>
+          <p:cNvPr id="30" name="Shape 28"/>
+          <p:cNvSpPr/>
+          <p:nvPr/>
+        </p:nvSpPr>
+        <p:spPr>
+          <a:xfrm>
+            <a:off x="640080" y="4261104"/>
+            <a:ext cx="10911535" cy="1207008"/>
+          </a:xfrm>
+          <a:prstGeom prst="roundRect">
+            <a:avLst>
+              <a:gd name="adj" fmla="val 3788"/>
+            </a:avLst>
+          </a:prstGeom>
+          <a:solidFill>
+            <a:srgbClr val="EAF1F7"/>
+          </a:solidFill>
+          <a:ln w="9525">
+            <a:solidFill>
+              <a:srgbClr val="D5E0EB"/>
+            </a:solidFill>
+            <a:prstDash val="solid"/>
+          </a:ln>
+          <a:effectLst>
+            <a:outerShdw blurRad="114300" dist="17780" dir="5400000" algn="bl" rotWithShape="0">
+              <a:srgbClr val="94A6BC">
+                <a:alpha val="15000"/>
+              </a:srgbClr>
+            </a:outerShdw>
+          </a:effectLst>
+        </p:spPr>
+        <p:txBody>
+          <a:bodyPr/>
+          <a:lstStyle/>
+          <a:p>
+            <a:endParaRPr lang="en-US"/>
+          </a:p>
+        </p:txBody>
+      </p:sp>
+      <p:sp>
+        <p:nvSpPr>
+          <p:cNvPr id="31" name="Shape 29"/>
+          <p:cNvSpPr/>
+          <p:nvPr/>
+        </p:nvSpPr>
+        <p:spPr>
+          <a:xfrm>
+            <a:off x="896112" y="4443984"/>
+            <a:ext cx="329184" cy="329184"/>
+          </a:xfrm>
+          <a:prstGeom prst="ellipse">
+            <a:avLst/>
+          </a:prstGeom>
+          <a:solidFill>
+            <a:srgbClr val="1F8A99"/>
+          </a:solidFill>
+          <a:ln w="6350">
+            <a:solidFill>
+              <a:srgbClr val="1F8A99"/>
+            </a:solidFill>
+            <a:prstDash val="solid"/>
+          </a:ln>
+        </p:spPr>
+        <p:txBody>
+          <a:bodyPr/>
+          <a:lstStyle/>
+          <a:p>
+            <a:endParaRPr lang="en-US"/>
+          </a:p>
+        </p:txBody>
+      </p:sp>
+      <p:sp>
+        <p:nvSpPr>
+          <p:cNvPr id="32" name="Text 30"/>
+          <p:cNvSpPr/>
+          <p:nvPr/>
+        </p:nvSpPr>
+        <p:spPr>
+          <a:xfrm>
+            <a:off x="896112" y="4443984"/>
+            <a:ext cx="329184" cy="329184"/>
+          </a:xfrm>
+          <a:prstGeom prst="rect">
+            <a:avLst/>
+          </a:prstGeom>
+          <a:noFill/>
+          <a:ln/>
+        </p:spPr>
+        <p:txBody>
+          <a:bodyPr wrap="square" lIns="0" tIns="0" rIns="0" bIns="0" rtlCol="0" anchor="ctr"/>
+          <a:lstStyle/>
+          <a:p>
+            <a:pPr marL="0" indent="0" algn="ctr">
+              <a:buNone/>
+            </a:pPr>
+            <a:r>
+              <a:rPr lang="en-US" sz="1200" b="1" dirty="0">
+                <a:solidFill>
+                  <a:srgbClr val="FFFFFF"/>
+                </a:solidFill>
+                <a:latin typeface="Calibri" pitchFamily="34" charset="0"/>
+                <a:ea typeface="Calibri" pitchFamily="34" charset="-122"/>
+                <a:cs typeface="Calibri" pitchFamily="34" charset="-120"/>
+              </a:rPr>
+              <a:t>✓</a:t>
+            </a:r>
+            <a:endParaRPr lang="en-US" sz="1200" dirty="0"/>
+          </a:p>
+        </p:txBody>
+      </p:sp>
+      <p:sp>
+        <p:nvSpPr>
+          <p:cNvPr id="33" name="Text 31"/>
+          <p:cNvSpPr/>
+          <p:nvPr/>
+        </p:nvSpPr>
+        <p:spPr>
+          <a:xfrm>
+            <a:off x="1335024" y="4407408"/>
+            <a:ext cx="9905695" cy="274320"/>
+          </a:xfrm>
+          <a:prstGeom prst="rect">
+            <a:avLst/>
+          </a:prstGeom>
+          <a:noFill/>
+          <a:ln/>
+        </p:spPr>
+        <p:txBody>
+          <a:bodyPr wrap="square" lIns="0" tIns="0" rIns="0" bIns="0" rtlCol="0" anchor="ctr"/>
+          <a:lstStyle/>
+          <a:p>
+            <a:pPr marL="0" indent="0">
+              <a:buNone/>
+            </a:pPr>
+            <a:r>
+              <a:rPr lang="en-US" sz="1300" b="1" dirty="0">
+                <a:solidFill>
+                  <a:srgbClr val="0E1E3A"/>
+                </a:solidFill>
+                <a:latin typeface="Cambria" pitchFamily="34" charset="0"/>
+                <a:ea typeface="Cambria" pitchFamily="34" charset="-122"/>
+                <a:cs typeface="Cambria" pitchFamily="34" charset="-120"/>
+              </a:rPr>
+              <a:t>GAC compiles what an agent does, not what its prompt asks for</a:t>
+            </a:r>
+            <a:endParaRPr lang="en-US" sz="1300" dirty="0"/>
+          </a:p>
+        </p:txBody>
+      </p:sp>
+      <p:sp>
+        <p:nvSpPr>
+          <p:cNvPr id="34" name="Text 32"/>
+          <p:cNvSpPr/>
+          <p:nvPr/>
+        </p:nvSpPr>
+        <p:spPr>
+          <a:xfrm>
+            <a:off x="1335024" y="4700016"/>
+            <a:ext cx="9905695" cy="694944"/>
+          </a:xfrm>
+          <a:prstGeom prst="rect">
+            <a:avLst/>
+          </a:prstGeom>
+          <a:noFill/>
+          <a:ln/>
+        </p:spPr>
+        <p:txBody>
+          <a:bodyPr wrap="square" lIns="0" tIns="0" rIns="0" bIns="0" rtlCol="0" anchor="t"/>
+          <a:lstStyle/>
+          <a:p>
+            <a:pPr marL="0" indent="0">
+              <a:lnSpc>
+                <a:spcPct val="106000"/>
+              </a:lnSpc>
+              <a:buNone/>
+            </a:pPr>
+            <a:r>
+              <a:rPr lang="en-US" sz="1050" dirty="0">
+                <a:solidFill>
+                  <a:srgbClr val="24354F"/>
+                </a:solidFill>
+                <a:latin typeface="Calibri" pitchFamily="34" charset="0"/>
+                <a:ea typeface="Calibri" pitchFamily="34" charset="-122"/>
+                <a:cs typeface="Calibri" pitchFamily="34" charset="-120"/>
+              </a:rPr>
+              <a:t>On 930 scheduled held-out questions with a compiled agent (26 databases, two model families), no run showed a detected accuracy loss, though equivalence is not established. Requests fell 45–50%, latency 29–38%, and cost 11–18% at uncached prices. A hand-written schema prefetch matches the compiled program.</a:t>
+            </a:r>
+            <a:endParaRPr lang="en-US" sz="1050" dirty="0"/>
+          </a:p>
+        </p:txBody>
+      </p:sp>
+      <p:sp>
+        <p:nvSpPr>
+          <p:cNvPr id="35" name="Text 33"/>
+          <p:cNvSpPr/>
+          <p:nvPr/>
+        </p:nvSpPr>
+        <p:spPr>
+          <a:xfrm>
+            <a:off x="640080" y="5596128"/>
+            <a:ext cx="10911535" cy="603504"/>
+          </a:xfrm>
+          <a:prstGeom prst="rect">
+            <a:avLst/>
+          </a:prstGeom>
+          <a:noFill/>
+          <a:ln/>
+        </p:spPr>
+        <p:txBody>
+          <a:bodyPr wrap="square" lIns="0" tIns="0" rIns="0" bIns="0" rtlCol="0" anchor="t"/>
+          <a:lstStyle/>
+          <a:p>
+            <a:pPr marL="0" indent="0">
+              <a:lnSpc>
+                <a:spcPct val="105000"/>
+              </a:lnSpc>
+              <a:buNone/>
+            </a:pPr>
+            <a:r>
+              <a:rPr lang="en-US" sz="1000" i="1" dirty="0">
+                <a:solidFill>
+                  <a:srgbClr val="5A6B84"/>
+                </a:solidFill>
+                <a:latin typeface="Calibri" pitchFamily="34" charset="0"/>
+                <a:ea typeface="Calibri" pitchFamily="34" charset="-122"/>
+                <a:cs typeface="Calibri" pitchFamily="34" charset="-120"/>
+              </a:rPr>
+              <a:t>All-scheduled counts treat a missing run as incorrect in its own arm. The training comparison covers 21 of 26 compiled databases, and Table 22 reports database sensitivity. A second provider's agent never ran a fixed opening and was refused.</a:t>
+            </a:r>
+            <a:endParaRPr lang="en-US" sz="1000" dirty="0"/>
+          </a:p>
+        </p:txBody>
+      </p:sp>
+    </p:spTree>
+  </p:cSld>
+  <p:clrMapOvr>
+    <a:masterClrMapping/>
+  </p:clrMapOvr>
+</p:sld>
+</file>
+
+<file path=ppt/slides/slide27.xml><?xml version="1.0" encoding="utf-8"?>
+<p:sld xmlns:a="http://schemas.openxmlformats.org/drawingml/2006/main" xmlns:r="http://schemas.openxmlformats.org/officeDocument/2006/relationships" xmlns:p="http://schemas.openxmlformats.org/presentationml/2006/main">
+  <p:cSld name="Slide 19">
+    <p:bg>
+      <p:bgPr>
+        <a:solidFill>
+          <a:srgbClr val="FFFFFF"/>
+        </a:solidFill>
+        <a:effectLst/>
+      </p:bgPr>
+    </p:bg>
+    <p:spTree>
+      <p:nvGrpSpPr>
+        <p:cNvPr id="1" name=""/>
+        <p:cNvGrpSpPr/>
+        <p:nvPr/>
+      </p:nvGrpSpPr>
+      <p:grpSpPr>
+        <a:xfrm>
+          <a:off x="0" y="0"/>
+          <a:ext cx="0" cy="0"/>
+          <a:chOff x="0" y="0"/>
+          <a:chExt cx="0" cy="0"/>
+        </a:xfrm>
+      </p:grpSpPr>
+      <p:sp>
+        <p:nvSpPr>
+          <p:cNvPr id="2" name="Text 0"/>
+          <p:cNvSpPr/>
+          <p:nvPr/>
+        </p:nvSpPr>
+        <p:spPr>
+          <a:xfrm>
+            <a:off x="640080" y="6345936"/>
+            <a:ext cx="5486400" cy="256032"/>
+          </a:xfrm>
+          <a:prstGeom prst="rect">
+            <a:avLst/>
+          </a:prstGeom>
+          <a:noFill/>
+          <a:ln/>
+        </p:spPr>
+        <p:txBody>
+          <a:bodyPr wrap="square" lIns="0" tIns="0" rIns="0" bIns="0" rtlCol="0" anchor="t"/>
+          <a:lstStyle/>
+          <a:p>
+            <a:pPr marL="0" indent="0">
+              <a:buNone/>
+            </a:pPr>
+            <a:r>
+              <a:rPr lang="en-US" sz="900" kern="0" spc="100" dirty="0">
+                <a:solidFill>
+                  <a:srgbClr val="A3B2C4"/>
+                </a:solidFill>
+                <a:latin typeface="Calibri" pitchFamily="34" charset="0"/>
+                <a:ea typeface="Calibri" pitchFamily="34" charset="-122"/>
+                <a:cs typeface="Calibri" pitchFamily="34" charset="-120"/>
+              </a:rPr>
+              <a:t>Guarded Agentic Compaction</a:t>
+            </a:r>
+            <a:endParaRPr lang="en-US" sz="900" dirty="0"/>
+          </a:p>
+        </p:txBody>
+      </p:sp>
+      <p:sp>
+        <p:nvSpPr>
+          <p:cNvPr id="3" name="Text 1"/>
+          <p:cNvSpPr/>
+          <p:nvPr/>
+        </p:nvSpPr>
+        <p:spPr>
+          <a:xfrm>
+            <a:off x="10637215" y="6345936"/>
+            <a:ext cx="914400" cy="256032"/>
+          </a:xfrm>
+          <a:prstGeom prst="rect">
+            <a:avLst/>
+          </a:prstGeom>
+          <a:noFill/>
+          <a:ln/>
+        </p:spPr>
+        <p:txBody>
+          <a:bodyPr wrap="square" lIns="0" tIns="0" rIns="0" bIns="0" rtlCol="0" anchor="t"/>
+          <a:lstStyle/>
+          <a:p>
+            <a:pPr marL="0" indent="0" algn="r">
+              <a:buNone/>
+            </a:pPr>
+            <a:r>
+              <a:rPr lang="en-US" sz="900" dirty="0">
+                <a:solidFill>
+                  <a:srgbClr val="A3B2C4"/>
+                </a:solidFill>
+                <a:latin typeface="Calibri" pitchFamily="34" charset="0"/>
+                <a:ea typeface="Calibri" pitchFamily="34" charset="-122"/>
+                <a:cs typeface="Calibri" pitchFamily="34" charset="-120"/>
+              </a:rPr>
+              <a:t>23</a:t>
+            </a:r>
+            <a:endParaRPr lang="en-US" sz="900" dirty="0"/>
+          </a:p>
+        </p:txBody>
+      </p:sp>
+      <p:sp>
+        <p:nvSpPr>
+          <p:cNvPr id="4" name="Text 2"/>
+          <p:cNvSpPr/>
+          <p:nvPr/>
+        </p:nvSpPr>
+        <p:spPr>
+          <a:xfrm>
+            <a:off x="640080" y="384048"/>
+            <a:ext cx="10911535" cy="237744"/>
+          </a:xfrm>
+          <a:prstGeom prst="rect">
+            <a:avLst/>
+          </a:prstGeom>
+          <a:noFill/>
+          <a:ln/>
+        </p:spPr>
+        <p:txBody>
+          <a:bodyPr wrap="square" lIns="0" tIns="0" rIns="0" bIns="0" rtlCol="0" anchor="t"/>
+          <a:lstStyle/>
+          <a:p>
+            <a:pPr marL="0" indent="0">
+              <a:buNone/>
+            </a:pPr>
+            <a:r>
+              <a:rPr lang="en-US" sz="1050" b="1" kern="0" spc="180" dirty="0">
+                <a:solidFill>
+                  <a:srgbClr val="1F8A99"/>
+                </a:solidFill>
+                <a:latin typeface="Calibri" pitchFamily="34" charset="0"/>
+                <a:ea typeface="Calibri" pitchFamily="34" charset="-122"/>
+                <a:cs typeface="Calibri" pitchFamily="34" charset="-120"/>
+              </a:rPr>
+              <a:t>DISCUSSION  ·  §5.1 AND §7  ·  WHAT THE CERTIFICATES CERTIFY</a:t>
+            </a:r>
+            <a:endParaRPr lang="en-US" sz="1050" dirty="0"/>
+          </a:p>
+        </p:txBody>
+      </p:sp>
+      <p:sp>
+        <p:nvSpPr>
+          <p:cNvPr id="5" name="Text 3"/>
+          <p:cNvSpPr/>
+          <p:nvPr/>
+        </p:nvSpPr>
+        <p:spPr>
+          <a:xfrm>
+            <a:off x="640080" y="658368"/>
+            <a:ext cx="10911535" cy="502920"/>
+          </a:xfrm>
+          <a:prstGeom prst="rect">
+            <a:avLst/>
+          </a:prstGeom>
+          <a:noFill/>
+          <a:ln/>
+        </p:spPr>
+        <p:txBody>
+          <a:bodyPr wrap="square" lIns="0" tIns="0" rIns="0" bIns="0" rtlCol="0" anchor="t"/>
+          <a:lstStyle/>
+          <a:p>
+            <a:pPr marL="0" indent="0">
+              <a:buNone/>
+            </a:pPr>
+            <a:r>
+              <a:rPr lang="en-US" sz="2600" b="1" dirty="0">
+                <a:solidFill>
+                  <a:srgbClr val="0E1E3A"/>
+                </a:solidFill>
+                <a:latin typeface="Cambria" pitchFamily="34" charset="0"/>
+                <a:ea typeface="Cambria" pitchFamily="34" charset="-122"/>
+                <a:cs typeface="Cambria" pitchFamily="34" charset="-120"/>
+              </a:rPr>
+              <a:t>What the certificates certify</a:t>
+            </a:r>
+            <a:endParaRPr lang="en-US" sz="2600" dirty="0"/>
+          </a:p>
+        </p:txBody>
+      </p:sp>
+      <p:sp>
+        <p:nvSpPr>
+          <p:cNvPr id="6" name="Shape 4"/>
+          <p:cNvSpPr/>
+          <p:nvPr/>
+        </p:nvSpPr>
+        <p:spPr>
+          <a:xfrm>
+            <a:off x="640080" y="1170432"/>
+            <a:ext cx="5272888" cy="2944368"/>
+          </a:xfrm>
+          <a:prstGeom prst="roundRect">
+            <a:avLst>
+              <a:gd name="adj" fmla="val 1553"/>
+            </a:avLst>
+          </a:prstGeom>
+          <a:solidFill>
+            <a:srgbClr val="E8F4F5"/>
+          </a:solidFill>
+          <a:ln w="9525">
+            <a:solidFill>
+              <a:srgbClr val="CFE4E7"/>
+            </a:solidFill>
+            <a:prstDash val="solid"/>
+          </a:ln>
+          <a:effectLst>
+            <a:outerShdw blurRad="114300" dist="17780" dir="5400000" algn="bl" rotWithShape="0">
+              <a:srgbClr val="94A6BC">
+                <a:alpha val="15000"/>
+              </a:srgbClr>
+            </a:outerShdw>
+          </a:effectLst>
+        </p:spPr>
+        <p:txBody>
+          <a:bodyPr/>
+          <a:lstStyle/>
+          <a:p>
+            <a:endParaRPr lang="en-US"/>
+          </a:p>
+        </p:txBody>
+      </p:sp>
+      <p:sp>
+        <p:nvSpPr>
+          <p:cNvPr id="7" name="Text 5"/>
+          <p:cNvSpPr/>
+          <p:nvPr/>
+        </p:nvSpPr>
+        <p:spPr>
+          <a:xfrm>
+            <a:off x="914400" y="1316736"/>
+            <a:ext cx="4724248" cy="329184"/>
+          </a:xfrm>
+          <a:prstGeom prst="rect">
+            <a:avLst/>
+          </a:prstGeom>
+          <a:noFill/>
+          <a:ln/>
+        </p:spPr>
+        <p:txBody>
+          <a:bodyPr wrap="square" lIns="0" tIns="0" rIns="0" bIns="0" rtlCol="0" anchor="t"/>
+          <a:lstStyle/>
+          <a:p>
+            <a:pPr marL="0" indent="0">
+              <a:buNone/>
+            </a:pPr>
+            <a:r>
+              <a:rPr lang="en-US" sz="1700" b="1" dirty="0">
+                <a:solidFill>
+                  <a:srgbClr val="0E1E3A"/>
+                </a:solidFill>
+                <a:latin typeface="Cambria" pitchFamily="34" charset="0"/>
+                <a:ea typeface="Cambria" pitchFamily="34" charset="-122"/>
+                <a:cs typeface="Cambria" pitchFamily="34" charset="-120"/>
+              </a:rPr>
+              <a:t>End-to-end certificate</a:t>
+            </a:r>
+            <a:endParaRPr lang="en-US" sz="1700" dirty="0"/>
+          </a:p>
+        </p:txBody>
+      </p:sp>
+      <p:sp>
+        <p:nvSpPr>
+          <p:cNvPr id="8" name="Text 6"/>
+          <p:cNvSpPr/>
+          <p:nvPr/>
+        </p:nvSpPr>
+        <p:spPr>
+          <a:xfrm>
+            <a:off x="914400" y="1645920"/>
+            <a:ext cx="4724248" cy="237744"/>
+          </a:xfrm>
+          <a:prstGeom prst="rect">
+            <a:avLst/>
+          </a:prstGeom>
+          <a:noFill/>
+          <a:ln/>
+        </p:spPr>
+        <p:txBody>
+          <a:bodyPr wrap="square" lIns="0" tIns="0" rIns="0" bIns="0" rtlCol="0" anchor="t"/>
+          <a:lstStyle/>
+          <a:p>
+            <a:pPr marL="0" indent="0">
+              <a:buNone/>
+            </a:pPr>
+            <a:r>
+              <a:rPr lang="en-US" sz="1050" i="1" dirty="0">
+                <a:solidFill>
+                  <a:srgbClr val="5A6B84"/>
+                </a:solidFill>
+                <a:latin typeface="Calibri" pitchFamily="34" charset="0"/>
+                <a:ea typeface="Calibri" pitchFamily="34" charset="-122"/>
+                <a:cs typeface="Calibri" pitchFamily="34" charset="-120"/>
+              </a:rPr>
+              <a:t>132 fresh post-cutoff pull requests  ·  one family</a:t>
+            </a:r>
+            <a:endParaRPr lang="en-US" sz="1050" dirty="0"/>
+          </a:p>
+        </p:txBody>
+      </p:sp>
+      <p:sp>
+        <p:nvSpPr>
+          <p:cNvPr id="9" name="Text 7"/>
+          <p:cNvSpPr/>
+          <p:nvPr/>
+        </p:nvSpPr>
+        <p:spPr>
+          <a:xfrm>
+            <a:off x="914400" y="1975104"/>
+            <a:ext cx="1371600" cy="310896"/>
+          </a:xfrm>
+          <a:prstGeom prst="rect">
+            <a:avLst/>
+          </a:prstGeom>
+          <a:noFill/>
+          <a:ln/>
+        </p:spPr>
+        <p:txBody>
+          <a:bodyPr wrap="square" lIns="0" tIns="0" rIns="0" bIns="0" rtlCol="0" anchor="ctr"/>
+          <a:lstStyle/>
+          <a:p>
+            <a:pPr marL="0" indent="0">
+              <a:buNone/>
+            </a:pPr>
+            <a:r>
+              <a:rPr lang="en-US" sz="1500" b="1" dirty="0">
+                <a:solidFill>
+                  <a:srgbClr val="0E1E3A"/>
+                </a:solidFill>
+                <a:latin typeface="Cambria" pitchFamily="34" charset="0"/>
+                <a:ea typeface="Cambria" pitchFamily="34" charset="-122"/>
+                <a:cs typeface="Cambria" pitchFamily="34" charset="-120"/>
+              </a:rPr>
+              <a:t>0 / 132</a:t>
+            </a:r>
+            <a:endParaRPr lang="en-US" sz="1500" dirty="0"/>
+          </a:p>
+        </p:txBody>
+      </p:sp>
+      <p:sp>
+        <p:nvSpPr>
+          <p:cNvPr id="10" name="Text 8"/>
+          <p:cNvSpPr/>
+          <p:nvPr/>
+        </p:nvSpPr>
+        <p:spPr>
+          <a:xfrm>
+            <a:off x="2377440" y="1975104"/>
+            <a:ext cx="3261208" cy="310896"/>
+          </a:xfrm>
+          <a:prstGeom prst="rect">
+            <a:avLst/>
+          </a:prstGeom>
+          <a:noFill/>
+          <a:ln/>
+        </p:spPr>
+        <p:txBody>
+          <a:bodyPr wrap="square" lIns="0" tIns="0" rIns="0" bIns="0" rtlCol="0" anchor="ctr"/>
+          <a:lstStyle/>
+          <a:p>
+            <a:pPr marL="0" indent="0">
+              <a:buNone/>
+            </a:pPr>
+            <a:r>
+              <a:rPr lang="en-US" sz="1100" dirty="0">
+                <a:solidFill>
+                  <a:srgbClr val="24354F"/>
+                </a:solidFill>
+                <a:latin typeface="Calibri" pitchFamily="34" charset="0"/>
+                <a:ea typeface="Calibri" pitchFamily="34" charset="-122"/>
+                <a:cs typeface="Calibri" pitchFamily="34" charset="-120"/>
+              </a:rPr>
+              <a:t>end-to-end contract misses</a:t>
+            </a:r>
+            <a:endParaRPr lang="en-US" sz="1100" dirty="0"/>
+          </a:p>
+        </p:txBody>
+      </p:sp>
+      <p:sp>
+        <p:nvSpPr>
+          <p:cNvPr id="11" name="Text 9"/>
+          <p:cNvSpPr/>
+          <p:nvPr/>
+        </p:nvSpPr>
+        <p:spPr>
+          <a:xfrm>
+            <a:off x="914400" y="2377440"/>
+            <a:ext cx="1371600" cy="310896"/>
+          </a:xfrm>
+          <a:prstGeom prst="rect">
+            <a:avLst/>
+          </a:prstGeom>
+          <a:noFill/>
+          <a:ln/>
+        </p:spPr>
+        <p:txBody>
+          <a:bodyPr wrap="square" lIns="0" tIns="0" rIns="0" bIns="0" rtlCol="0" anchor="ctr"/>
+          <a:lstStyle/>
+          <a:p>
+            <a:pPr marL="0" indent="0">
+              <a:buNone/>
+            </a:pPr>
+            <a:r>
+              <a:rPr lang="en-US" sz="1500" b="1" dirty="0">
+                <a:solidFill>
+                  <a:srgbClr val="0E1E3A"/>
+                </a:solidFill>
+                <a:latin typeface="Cambria" pitchFamily="34" charset="0"/>
+                <a:ea typeface="Cambria" pitchFamily="34" charset="-122"/>
+                <a:cs typeface="Cambria" pitchFamily="34" charset="-120"/>
+              </a:rPr>
+              <a:t>0.0173</a:t>
+            </a:r>
+            <a:endParaRPr lang="en-US" sz="1500" dirty="0"/>
+          </a:p>
+        </p:txBody>
+      </p:sp>
+      <p:sp>
+        <p:nvSpPr>
+          <p:cNvPr id="12" name="Text 10"/>
+          <p:cNvSpPr/>
+          <p:nvPr/>
+        </p:nvSpPr>
+        <p:spPr>
+          <a:xfrm>
+            <a:off x="2377440" y="2377440"/>
+            <a:ext cx="3261208" cy="310896"/>
+          </a:xfrm>
+          <a:prstGeom prst="rect">
+            <a:avLst/>
+          </a:prstGeom>
+          <a:noFill/>
+          <a:ln/>
+        </p:spPr>
+        <p:txBody>
+          <a:bodyPr wrap="square" lIns="0" tIns="0" rIns="0" bIns="0" rtlCol="0" anchor="ctr"/>
+          <a:lstStyle/>
+          <a:p>
+            <a:pPr marL="0" indent="0">
+              <a:buNone/>
+            </a:pPr>
+            <a:r>
+              <a:rPr lang="en-US" sz="1100" dirty="0">
+                <a:solidFill>
+                  <a:srgbClr val="24354F"/>
+                </a:solidFill>
+                <a:latin typeface="Calibri" pitchFamily="34" charset="0"/>
+                <a:ea typeface="Calibri" pitchFamily="34" charset="-122"/>
+                <a:cs typeface="Calibri" pitchFamily="34" charset="-120"/>
+              </a:rPr>
+              <a:t>upper bound, 90% confidence (0.035, grid)</a:t>
+            </a:r>
+            <a:endParaRPr lang="en-US" sz="1100" dirty="0"/>
+          </a:p>
+        </p:txBody>
+      </p:sp>
+      <p:sp>
+        <p:nvSpPr>
+          <p:cNvPr id="13" name="Text 11"/>
+          <p:cNvSpPr/>
+          <p:nvPr/>
+        </p:nvSpPr>
+        <p:spPr>
+          <a:xfrm>
+            <a:off x="914400" y="2779776"/>
+            <a:ext cx="1371600" cy="310896"/>
+          </a:xfrm>
+          <a:prstGeom prst="rect">
+            <a:avLst/>
+          </a:prstGeom>
+          <a:noFill/>
+          <a:ln/>
+        </p:spPr>
+        <p:txBody>
+          <a:bodyPr wrap="square" lIns="0" tIns="0" rIns="0" bIns="0" rtlCol="0" anchor="ctr"/>
+          <a:lstStyle/>
+          <a:p>
+            <a:pPr marL="0" indent="0">
+              <a:buNone/>
+            </a:pPr>
+            <a:r>
+              <a:rPr lang="en-US" sz="1500" b="1" dirty="0">
+                <a:solidFill>
+                  <a:srgbClr val="0E1E3A"/>
+                </a:solidFill>
+                <a:latin typeface="Cambria" pitchFamily="34" charset="0"/>
+                <a:ea typeface="Cambria" pitchFamily="34" charset="-122"/>
+                <a:cs typeface="Cambria" pitchFamily="34" charset="-120"/>
+              </a:rPr>
+              <a:t>60 / 60</a:t>
+            </a:r>
+            <a:endParaRPr lang="en-US" sz="1500" dirty="0"/>
+          </a:p>
+        </p:txBody>
+      </p:sp>
+      <p:sp>
+        <p:nvSpPr>
+          <p:cNvPr id="14" name="Text 12"/>
+          <p:cNvSpPr/>
+          <p:nvPr/>
+        </p:nvSpPr>
+        <p:spPr>
+          <a:xfrm>
+            <a:off x="2377440" y="2779776"/>
+            <a:ext cx="3261208" cy="310896"/>
+          </a:xfrm>
+          <a:prstGeom prst="rect">
+            <a:avLst/>
+          </a:prstGeom>
+          <a:noFill/>
+          <a:ln/>
+        </p:spPr>
+        <p:txBody>
+          <a:bodyPr wrap="square" lIns="0" tIns="0" rIns="0" bIns="0" rtlCol="0" anchor="ctr"/>
+          <a:lstStyle/>
+          <a:p>
+            <a:pPr marL="0" indent="0">
+              <a:buNone/>
+            </a:pPr>
+            <a:r>
+              <a:rPr lang="en-US" sz="1100" dirty="0">
+                <a:solidFill>
+                  <a:srgbClr val="24354F"/>
+                </a:solidFill>
+                <a:latin typeface="Calibri" pitchFamily="34" charset="0"/>
+                <a:ea typeface="Calibri" pitchFamily="34" charset="-122"/>
+                <a:cs typeface="Calibri" pitchFamily="34" charset="-120"/>
+              </a:rPr>
+              <a:t>fresh test records, every condition</a:t>
+            </a:r>
+            <a:endParaRPr lang="en-US" sz="1100" dirty="0"/>
+          </a:p>
+        </p:txBody>
+      </p:sp>
+      <p:sp>
+        <p:nvSpPr>
+          <p:cNvPr id="15" name="Text 13"/>
+          <p:cNvSpPr/>
+          <p:nvPr/>
+        </p:nvSpPr>
+        <p:spPr>
+          <a:xfrm>
+            <a:off x="914400" y="3182112"/>
+            <a:ext cx="1371600" cy="310896"/>
+          </a:xfrm>
+          <a:prstGeom prst="rect">
+            <a:avLst/>
+          </a:prstGeom>
+          <a:noFill/>
+          <a:ln/>
+        </p:spPr>
+        <p:txBody>
+          <a:bodyPr wrap="square" lIns="0" tIns="0" rIns="0" bIns="0" rtlCol="0" anchor="ctr"/>
+          <a:lstStyle/>
+          <a:p>
+            <a:pPr marL="0" indent="0">
+              <a:buNone/>
+            </a:pPr>
+            <a:r>
+              <a:rPr lang="en-US" sz="1500" b="1" dirty="0">
+                <a:solidFill>
+                  <a:srgbClr val="0E1E3A"/>
+                </a:solidFill>
+                <a:latin typeface="Cambria" pitchFamily="34" charset="0"/>
+                <a:ea typeface="Cambria" pitchFamily="34" charset="-122"/>
+                <a:cs typeface="Cambria" pitchFamily="34" charset="-120"/>
+              </a:rPr>
+              <a:t>84 / 48</a:t>
+            </a:r>
+            <a:endParaRPr lang="en-US" sz="1500" dirty="0"/>
+          </a:p>
+        </p:txBody>
+      </p:sp>
+      <p:sp>
+        <p:nvSpPr>
+          <p:cNvPr id="16" name="Text 14"/>
+          <p:cNvSpPr/>
+          <p:nvPr/>
+        </p:nvSpPr>
+        <p:spPr>
+          <a:xfrm>
+            <a:off x="2377440" y="3182112"/>
+            <a:ext cx="3261208" cy="310896"/>
+          </a:xfrm>
+          <a:prstGeom prst="rect">
+            <a:avLst/>
+          </a:prstGeom>
+          <a:noFill/>
+          <a:ln/>
+        </p:spPr>
+        <p:txBody>
+          <a:bodyPr wrap="square" lIns="0" tIns="0" rIns="0" bIns="0" rtlCol="0" anchor="ctr"/>
+          <a:lstStyle/>
+          <a:p>
+            <a:pPr marL="0" indent="0">
+              <a:buNone/>
+            </a:pPr>
+            <a:r>
+              <a:rPr lang="en-US" sz="1100" dirty="0">
+                <a:solidFill>
+                  <a:srgbClr val="24354F"/>
+                </a:solidFill>
+                <a:latin typeface="Calibri" pitchFamily="34" charset="0"/>
+                <a:ea typeface="Calibri" pitchFamily="34" charset="-122"/>
+                <a:cs typeface="Calibri" pitchFamily="34" charset="-120"/>
+              </a:rPr>
+              <a:t>open / merged; none closed-unmerged</a:t>
+            </a:r>
+            <a:endParaRPr lang="en-US" sz="1100" dirty="0"/>
+          </a:p>
+        </p:txBody>
+      </p:sp>
+      <p:sp>
+        <p:nvSpPr>
+          <p:cNvPr id="17" name="Text 15"/>
+          <p:cNvSpPr/>
+          <p:nvPr/>
+        </p:nvSpPr>
+        <p:spPr>
+          <a:xfrm>
+            <a:off x="914400" y="3621024"/>
+            <a:ext cx="4724248" cy="402336"/>
+          </a:xfrm>
+          <a:prstGeom prst="rect">
+            <a:avLst/>
+          </a:prstGeom>
+          <a:noFill/>
+          <a:ln/>
+        </p:spPr>
+        <p:txBody>
+          <a:bodyPr wrap="square" lIns="0" tIns="0" rIns="0" bIns="0" rtlCol="0" anchor="t"/>
+          <a:lstStyle/>
+          <a:p>
+            <a:pPr marL="0" indent="0">
+              <a:lnSpc>
+                <a:spcPct val="105000"/>
+              </a:lnSpc>
+              <a:buNone/>
+            </a:pPr>
+            <a:r>
+              <a:rPr lang="en-US" sz="1000" dirty="0">
+                <a:solidFill>
+                  <a:srgbClr val="5A6B84"/>
+                </a:solidFill>
+                <a:latin typeface="Calibri" pitchFamily="34" charset="0"/>
+                <a:ea typeface="Calibri" pitchFamily="34" charset="-122"/>
+                <a:cs typeface="Calibri" pitchFamily="34" charset="-120"/>
+              </a:rPr>
+              <a:t>The first certificate whose event includes the model's answer. Counting days or authors as units gives 0.0228 and 0.0267; independence of those clusters is unverified.</a:t>
+            </a:r>
+            <a:endParaRPr lang="en-US" sz="1000" dirty="0"/>
+          </a:p>
+        </p:txBody>
+      </p:sp>
+      <p:sp>
+        <p:nvSpPr>
+          <p:cNvPr id="18" name="Shape 16"/>
+          <p:cNvSpPr/>
+          <p:nvPr/>
+        </p:nvSpPr>
+        <p:spPr>
+          <a:xfrm>
+            <a:off x="6278728" y="1170432"/>
+            <a:ext cx="5272888" cy="2944368"/>
+          </a:xfrm>
+          <a:prstGeom prst="roundRect">
+            <a:avLst>
+              <a:gd name="adj" fmla="val 1553"/>
+            </a:avLst>
+          </a:prstGeom>
+          <a:solidFill>
+            <a:srgbClr val="FBF0EC"/>
+          </a:solidFill>
+          <a:ln w="9525">
+            <a:solidFill>
+              <a:srgbClr val="EFDCD4"/>
+            </a:solidFill>
+            <a:prstDash val="solid"/>
+          </a:ln>
+          <a:effectLst>
+            <a:outerShdw blurRad="114300" dist="17780" dir="5400000" algn="bl" rotWithShape="0">
+              <a:srgbClr val="94A6BC">
+                <a:alpha val="15000"/>
+              </a:srgbClr>
+            </a:outerShdw>
+          </a:effectLst>
+        </p:spPr>
+        <p:txBody>
+          <a:bodyPr/>
+          <a:lstStyle/>
+          <a:p>
+            <a:endParaRPr lang="en-US"/>
+          </a:p>
+        </p:txBody>
+      </p:sp>
+      <p:sp>
+        <p:nvSpPr>
+          <p:cNvPr id="19" name="Text 17"/>
+          <p:cNvSpPr/>
+          <p:nvPr/>
+        </p:nvSpPr>
+        <p:spPr>
+          <a:xfrm>
+            <a:off x="6553048" y="1316736"/>
+            <a:ext cx="4724248" cy="329184"/>
+          </a:xfrm>
+          <a:prstGeom prst="rect">
+            <a:avLst/>
+          </a:prstGeom>
+          <a:noFill/>
+          <a:ln/>
+        </p:spPr>
+        <p:txBody>
+          <a:bodyPr wrap="square" lIns="0" tIns="0" rIns="0" bIns="0" rtlCol="0" anchor="t"/>
+          <a:lstStyle/>
+          <a:p>
+            <a:pPr marL="0" indent="0">
+              <a:buNone/>
+            </a:pPr>
+            <a:r>
+              <a:rPr lang="en-US" sz="1700" b="1" dirty="0">
+                <a:solidFill>
+                  <a:srgbClr val="A93B2B"/>
+                </a:solidFill>
+                <a:latin typeface="Cambria" pitchFamily="34" charset="0"/>
+                <a:ea typeface="Cambria" pitchFamily="34" charset="-122"/>
+                <a:cs typeface="Cambria" pitchFamily="34" charset="-120"/>
+              </a:rPr>
+              <a:t>Primary certificates</a:t>
+            </a:r>
+            <a:endParaRPr lang="en-US" sz="1700" dirty="0"/>
+          </a:p>
+        </p:txBody>
+      </p:sp>
+      <p:sp>
+        <p:nvSpPr>
+          <p:cNvPr id="20" name="Text 18"/>
+          <p:cNvSpPr/>
+          <p:nvPr/>
+        </p:nvSpPr>
+        <p:spPr>
+          <a:xfrm>
+            <a:off x="6553048" y="1645920"/>
+            <a:ext cx="4724248" cy="237744"/>
+          </a:xfrm>
+          <a:prstGeom prst="rect">
+            <a:avLst/>
+          </a:prstGeom>
+          <a:noFill/>
+          <a:ln/>
+        </p:spPr>
+        <p:txBody>
+          <a:bodyPr wrap="square" lIns="0" tIns="0" rIns="0" bIns="0" rtlCol="0" anchor="t"/>
+          <a:lstStyle/>
+          <a:p>
+            <a:pPr marL="0" indent="0">
+              <a:buNone/>
+            </a:pPr>
+            <a:r>
+              <a:rPr lang="en-US" sz="1050" i="1" dirty="0">
+                <a:solidFill>
+                  <a:srgbClr val="5A6B84"/>
+                </a:solidFill>
+                <a:latin typeface="Calibri" pitchFamily="34" charset="0"/>
+                <a:ea typeface="Calibri" pitchFamily="34" charset="-122"/>
+                <a:cs typeface="Calibri" pitchFamily="34" charset="-120"/>
+              </a:rPr>
+              <a:t>three GitHub families  ·  92 calibration groups each</a:t>
+            </a:r>
+            <a:endParaRPr lang="en-US" sz="1050" dirty="0"/>
+          </a:p>
+        </p:txBody>
+      </p:sp>
+      <p:sp>
+        <p:nvSpPr>
+          <p:cNvPr id="21" name="Text 19"/>
+          <p:cNvSpPr/>
+          <p:nvPr/>
+        </p:nvSpPr>
+        <p:spPr>
+          <a:xfrm>
+            <a:off x="6553048" y="1975104"/>
+            <a:ext cx="1371600" cy="310896"/>
+          </a:xfrm>
+          <a:prstGeom prst="rect">
+            <a:avLst/>
+          </a:prstGeom>
+          <a:noFill/>
+          <a:ln/>
+        </p:spPr>
+        <p:txBody>
+          <a:bodyPr wrap="square" lIns="0" tIns="0" rIns="0" bIns="0" rtlCol="0" anchor="ctr"/>
+          <a:lstStyle/>
+          <a:p>
+            <a:pPr marL="0" indent="0">
+              <a:buNone/>
+            </a:pPr>
+            <a:r>
+              <a:rPr lang="en-US" sz="1500" b="1" dirty="0">
+                <a:solidFill>
+                  <a:srgbClr val="A93B2B"/>
+                </a:solidFill>
+                <a:latin typeface="Cambria" pitchFamily="34" charset="0"/>
+                <a:ea typeface="Cambria" pitchFamily="34" charset="-122"/>
+                <a:cs typeface="Cambria" pitchFamily="34" charset="-120"/>
+              </a:rPr>
+              <a:t>92 / 92</a:t>
+            </a:r>
+            <a:endParaRPr lang="en-US" sz="1500" dirty="0"/>
+          </a:p>
+        </p:txBody>
+      </p:sp>
+      <p:sp>
+        <p:nvSpPr>
+          <p:cNvPr id="22" name="Text 20"/>
+          <p:cNvSpPr/>
+          <p:nvPr/>
+        </p:nvSpPr>
+        <p:spPr>
+          <a:xfrm>
+            <a:off x="8016088" y="1975104"/>
+            <a:ext cx="3261208" cy="310896"/>
+          </a:xfrm>
+          <a:prstGeom prst="rect">
+            <a:avLst/>
+          </a:prstGeom>
+          <a:noFill/>
+          <a:ln/>
+        </p:spPr>
+        <p:txBody>
+          <a:bodyPr wrap="square" lIns="0" tIns="0" rIns="0" bIns="0" rtlCol="0" anchor="ctr"/>
+          <a:lstStyle/>
+          <a:p>
+            <a:pPr marL="0" indent="0">
+              <a:buNone/>
+            </a:pPr>
+            <a:r>
+              <a:rPr lang="en-US" sz="1100" dirty="0">
+                <a:solidFill>
+                  <a:srgbClr val="24354F"/>
+                </a:solidFill>
+                <a:latin typeface="Calibri" pitchFamily="34" charset="0"/>
+                <a:ea typeface="Calibri" pitchFamily="34" charset="-122"/>
+                <a:cs typeface="Calibri" pitchFamily="34" charset="-120"/>
+              </a:rPr>
+              <a:t>zero-violation calibration groups</a:t>
+            </a:r>
+            <a:endParaRPr lang="en-US" sz="1100" dirty="0"/>
+          </a:p>
+        </p:txBody>
+      </p:sp>
+      <p:sp>
+        <p:nvSpPr>
+          <p:cNvPr id="23" name="Text 21"/>
+          <p:cNvSpPr/>
+          <p:nvPr/>
+        </p:nvSpPr>
+        <p:spPr>
+          <a:xfrm>
+            <a:off x="6553048" y="2377440"/>
+            <a:ext cx="1371600" cy="310896"/>
+          </a:xfrm>
+          <a:prstGeom prst="rect">
+            <a:avLst/>
+          </a:prstGeom>
+          <a:noFill/>
+          <a:ln/>
+        </p:spPr>
+        <p:txBody>
+          <a:bodyPr wrap="square" lIns="0" tIns="0" rIns="0" bIns="0" rtlCol="0" anchor="ctr"/>
+          <a:lstStyle/>
+          <a:p>
+            <a:pPr marL="0" indent="0">
+              <a:buNone/>
+            </a:pPr>
+            <a:r>
+              <a:rPr lang="en-US" sz="1500" b="1" dirty="0">
+                <a:solidFill>
+                  <a:srgbClr val="A93B2B"/>
+                </a:solidFill>
+                <a:latin typeface="Cambria" pitchFamily="34" charset="0"/>
+                <a:ea typeface="Cambria" pitchFamily="34" charset="-122"/>
+                <a:cs typeface="Cambria" pitchFamily="34" charset="-120"/>
+              </a:rPr>
+              <a:t>0.0498</a:t>
+            </a:r>
+            <a:endParaRPr lang="en-US" sz="1500" dirty="0"/>
+          </a:p>
+        </p:txBody>
+      </p:sp>
+      <p:sp>
+        <p:nvSpPr>
+          <p:cNvPr id="24" name="Text 22"/>
+          <p:cNvSpPr/>
+          <p:nvPr/>
+        </p:nvSpPr>
+        <p:spPr>
+          <a:xfrm>
+            <a:off x="8016088" y="2377440"/>
+            <a:ext cx="3261208" cy="310896"/>
+          </a:xfrm>
+          <a:prstGeom prst="rect">
+            <a:avLst/>
+          </a:prstGeom>
+          <a:noFill/>
+          <a:ln/>
+        </p:spPr>
+        <p:txBody>
+          <a:bodyPr wrap="square" lIns="0" tIns="0" rIns="0" bIns="0" rtlCol="0" anchor="ctr"/>
+          <a:lstStyle/>
+          <a:p>
+            <a:pPr marL="0" indent="0">
+              <a:buNone/>
+            </a:pPr>
+            <a:r>
+              <a:rPr lang="en-US" sz="1100" dirty="0">
+                <a:solidFill>
+                  <a:srgbClr val="24354F"/>
+                </a:solidFill>
+                <a:latin typeface="Calibri" pitchFamily="34" charset="0"/>
+                <a:ea typeface="Calibri" pitchFamily="34" charset="-122"/>
+                <a:cs typeface="Calibri" pitchFamily="34" charset="-120"/>
+              </a:rPr>
+              <a:t>upper bound against α = 0.05</a:t>
+            </a:r>
+            <a:endParaRPr lang="en-US" sz="1100" dirty="0"/>
+          </a:p>
+        </p:txBody>
+      </p:sp>
+      <p:sp>
+        <p:nvSpPr>
+          <p:cNvPr id="25" name="Text 23"/>
+          <p:cNvSpPr/>
+          <p:nvPr/>
+        </p:nvSpPr>
+        <p:spPr>
+          <a:xfrm>
+            <a:off x="6553048" y="2779776"/>
+            <a:ext cx="1371600" cy="310896"/>
+          </a:xfrm>
+          <a:prstGeom prst="rect">
+            <a:avLst/>
+          </a:prstGeom>
+          <a:noFill/>
+          <a:ln/>
+        </p:spPr>
+        <p:txBody>
+          <a:bodyPr wrap="square" lIns="0" tIns="0" rIns="0" bIns="0" rtlCol="0" anchor="ctr"/>
+          <a:lstStyle/>
+          <a:p>
+            <a:pPr marL="0" indent="0">
+              <a:buNone/>
+            </a:pPr>
+            <a:r>
+              <a:rPr lang="en-US" sz="1500" b="1" dirty="0">
+                <a:solidFill>
+                  <a:srgbClr val="A93B2B"/>
+                </a:solidFill>
+                <a:latin typeface="Cambria" pitchFamily="34" charset="0"/>
+                <a:ea typeface="Cambria" pitchFamily="34" charset="-122"/>
+                <a:cs typeface="Cambria" pitchFamily="34" charset="-120"/>
+              </a:rPr>
+              <a:t>0 or 1</a:t>
+            </a:r>
+            <a:endParaRPr lang="en-US" sz="1500" dirty="0"/>
+          </a:p>
+        </p:txBody>
+      </p:sp>
+      <p:sp>
+        <p:nvSpPr>
+          <p:cNvPr id="26" name="Text 24"/>
+          <p:cNvSpPr/>
+          <p:nvPr/>
+        </p:nvSpPr>
+        <p:spPr>
+          <a:xfrm>
+            <a:off x="8016088" y="2779776"/>
+            <a:ext cx="3261208" cy="310896"/>
+          </a:xfrm>
+          <a:prstGeom prst="rect">
+            <a:avLst/>
+          </a:prstGeom>
+          <a:noFill/>
+          <a:ln/>
+        </p:spPr>
+        <p:txBody>
+          <a:bodyPr wrap="square" lIns="0" tIns="0" rIns="0" bIns="0" rtlCol="0" anchor="ctr"/>
+          <a:lstStyle/>
+          <a:p>
+            <a:pPr marL="0" indent="0">
+              <a:buNone/>
+            </a:pPr>
+            <a:r>
+              <a:rPr lang="en-US" sz="1100" dirty="0">
+                <a:solidFill>
+                  <a:srgbClr val="24354F"/>
+                </a:solidFill>
+                <a:latin typeface="Calibri" pitchFamily="34" charset="0"/>
+                <a:ea typeface="Calibri" pitchFamily="34" charset="-122"/>
+                <a:cs typeface="Calibri" pitchFamily="34" charset="-120"/>
+              </a:rPr>
+              <a:t>the only certifiable coverages</a:t>
+            </a:r>
+            <a:endParaRPr lang="en-US" sz="1100" dirty="0"/>
+          </a:p>
+        </p:txBody>
+      </p:sp>
+      <p:sp>
+        <p:nvSpPr>
+          <p:cNvPr id="27" name="Text 25"/>
+          <p:cNvSpPr/>
+          <p:nvPr/>
+        </p:nvSpPr>
+        <p:spPr>
+          <a:xfrm>
+            <a:off x="6553048" y="3182112"/>
+            <a:ext cx="1371600" cy="310896"/>
+          </a:xfrm>
+          <a:prstGeom prst="rect">
+            <a:avLst/>
+          </a:prstGeom>
+          <a:noFill/>
+          <a:ln/>
+        </p:spPr>
+        <p:txBody>
+          <a:bodyPr wrap="square" lIns="0" tIns="0" rIns="0" bIns="0" rtlCol="0" anchor="ctr"/>
+          <a:lstStyle/>
+          <a:p>
+            <a:pPr marL="0" indent="0">
+              <a:buNone/>
+            </a:pPr>
+            <a:r>
+              <a:rPr lang="en-US" sz="1500" b="1" dirty="0">
+                <a:solidFill>
+                  <a:srgbClr val="A93B2B"/>
+                </a:solidFill>
+                <a:latin typeface="Cambria" pitchFamily="34" charset="0"/>
+                <a:ea typeface="Cambria" pitchFamily="34" charset="-122"/>
+                <a:cs typeface="Cambria" pitchFamily="34" charset="-120"/>
+              </a:rPr>
+              <a:t>2 errors</a:t>
+            </a:r>
+            <a:endParaRPr lang="en-US" sz="1500" dirty="0"/>
+          </a:p>
+        </p:txBody>
+      </p:sp>
+      <p:sp>
+        <p:nvSpPr>
+          <p:cNvPr id="28" name="Text 26"/>
+          <p:cNvSpPr/>
+          <p:nvPr/>
+        </p:nvSpPr>
+        <p:spPr>
+          <a:xfrm>
+            <a:off x="8016088" y="3182112"/>
+            <a:ext cx="3261208" cy="310896"/>
+          </a:xfrm>
+          <a:prstGeom prst="rect">
+            <a:avLst/>
+          </a:prstGeom>
+          <a:noFill/>
+          <a:ln/>
+        </p:spPr>
+        <p:txBody>
+          <a:bodyPr wrap="square" lIns="0" tIns="0" rIns="0" bIns="0" rtlCol="0" anchor="ctr"/>
+          <a:lstStyle/>
+          <a:p>
+            <a:pPr marL="0" indent="0">
+              <a:buNone/>
+            </a:pPr>
+            <a:r>
+              <a:rPr lang="en-US" sz="1100" dirty="0">
+                <a:solidFill>
+                  <a:srgbClr val="24354F"/>
+                </a:solidFill>
+                <a:latin typeface="Calibri" pitchFamily="34" charset="0"/>
+                <a:ea typeface="Calibri" pitchFamily="34" charset="-122"/>
+                <a:cs typeface="Calibri" pitchFamily="34" charset="-120"/>
+              </a:rPr>
+              <a:t>amended 184-group issue gate: retired</a:t>
+            </a:r>
+            <a:endParaRPr lang="en-US" sz="1100" dirty="0"/>
+          </a:p>
+        </p:txBody>
+      </p:sp>
+      <p:sp>
+        <p:nvSpPr>
+          <p:cNvPr id="29" name="Text 27"/>
+          <p:cNvSpPr/>
+          <p:nvPr/>
+        </p:nvSpPr>
+        <p:spPr>
+          <a:xfrm>
+            <a:off x="6553048" y="3621024"/>
+            <a:ext cx="4724248" cy="402336"/>
+          </a:xfrm>
+          <a:prstGeom prst="rect">
+            <a:avLst/>
+          </a:prstGeom>
+          <a:noFill/>
+          <a:ln/>
+        </p:spPr>
+        <p:txBody>
+          <a:bodyPr wrap="square" lIns="0" tIns="0" rIns="0" bIns="0" rtlCol="0" anchor="t"/>
+          <a:lstStyle/>
+          <a:p>
+            <a:pPr marL="0" indent="0">
+              <a:lnSpc>
+                <a:spcPct val="105000"/>
+              </a:lnSpc>
+              <a:buNone/>
+            </a:pPr>
+            <a:r>
+              <a:rPr lang="en-US" sz="1000" dirty="0">
+                <a:solidFill>
+                  <a:srgbClr val="5C4034"/>
+                </a:solidFill>
+                <a:latin typeface="Calibri" pitchFamily="34" charset="0"/>
+                <a:ea typeface="Calibri" pitchFamily="34" charset="-122"/>
+                <a:cs typeface="Calibri" pitchFamily="34" charset="-120"/>
+              </a:rPr>
+              <a:t>The replay-contract event has no support on these cohorts, so the bound confirms enough examples, not an observed risk.</a:t>
+            </a:r>
+            <a:endParaRPr lang="en-US" sz="1000" dirty="0"/>
+          </a:p>
+        </p:txBody>
+      </p:sp>
+      <p:sp>
+        <p:nvSpPr>
+          <p:cNvPr id="30" name="Shape 28"/>
+          <p:cNvSpPr/>
+          <p:nvPr/>
+        </p:nvSpPr>
+        <p:spPr>
+          <a:xfrm>
+            <a:off x="640080" y="4261104"/>
+            <a:ext cx="10911535" cy="1207008"/>
+          </a:xfrm>
+          <a:prstGeom prst="roundRect">
+            <a:avLst>
+              <a:gd name="adj" fmla="val 3788"/>
+            </a:avLst>
+          </a:prstGeom>
+          <a:solidFill>
+            <a:srgbClr val="EAF1F7"/>
+          </a:solidFill>
+          <a:ln w="9525">
+            <a:solidFill>
+              <a:srgbClr val="D5E0EB"/>
+            </a:solidFill>
+            <a:prstDash val="solid"/>
+          </a:ln>
+          <a:effectLst>
+            <a:outerShdw blurRad="114300" dist="17780" dir="5400000" algn="bl" rotWithShape="0">
+              <a:srgbClr val="94A6BC">
+                <a:alpha val="15000"/>
+              </a:srgbClr>
+            </a:outerShdw>
+          </a:effectLst>
+        </p:spPr>
+        <p:txBody>
+          <a:bodyPr/>
+          <a:lstStyle/>
+          <a:p>
+            <a:endParaRPr lang="en-US"/>
+          </a:p>
+        </p:txBody>
+      </p:sp>
+      <p:sp>
+        <p:nvSpPr>
+          <p:cNvPr id="31" name="Shape 29"/>
+          <p:cNvSpPr/>
+          <p:nvPr/>
+        </p:nvSpPr>
+        <p:spPr>
+          <a:xfrm>
+            <a:off x="896112" y="4443984"/>
+            <a:ext cx="329184" cy="329184"/>
+          </a:xfrm>
+          <a:prstGeom prst="ellipse">
+            <a:avLst/>
+          </a:prstGeom>
+          <a:solidFill>
+            <a:srgbClr val="1F8A99"/>
+          </a:solidFill>
+          <a:ln w="6350">
+            <a:solidFill>
+              <a:srgbClr val="1F8A99"/>
+            </a:solidFill>
+            <a:prstDash val="solid"/>
+          </a:ln>
+        </p:spPr>
+        <p:txBody>
+          <a:bodyPr/>
+          <a:lstStyle/>
+          <a:p>
+            <a:endParaRPr lang="en-US"/>
+          </a:p>
+        </p:txBody>
+      </p:sp>
+      <p:sp>
+        <p:nvSpPr>
+          <p:cNvPr id="32" name="Text 30"/>
+          <p:cNvSpPr/>
+          <p:nvPr/>
+        </p:nvSpPr>
+        <p:spPr>
+          <a:xfrm>
+            <a:off x="896112" y="4443984"/>
+            <a:ext cx="329184" cy="329184"/>
+          </a:xfrm>
+          <a:prstGeom prst="rect">
+            <a:avLst/>
+          </a:prstGeom>
+          <a:noFill/>
+          <a:ln/>
+        </p:spPr>
+        <p:txBody>
+          <a:bodyPr wrap="square" lIns="0" tIns="0" rIns="0" bIns="0" rtlCol="0" anchor="ctr"/>
+          <a:lstStyle/>
+          <a:p>
+            <a:pPr marL="0" indent="0" algn="ctr">
+              <a:buNone/>
+            </a:pPr>
+            <a:r>
+              <a:rPr lang="en-US" sz="1200" b="1" dirty="0">
+                <a:solidFill>
+                  <a:srgbClr val="FFFFFF"/>
+                </a:solidFill>
+                <a:latin typeface="Calibri" pitchFamily="34" charset="0"/>
+                <a:ea typeface="Calibri" pitchFamily="34" charset="-122"/>
+                <a:cs typeface="Calibri" pitchFamily="34" charset="-120"/>
+              </a:rPr>
+              <a:t>!</a:t>
+            </a:r>
+            <a:endParaRPr lang="en-US" sz="1200" dirty="0"/>
+          </a:p>
+        </p:txBody>
+      </p:sp>
+      <p:sp>
+        <p:nvSpPr>
+          <p:cNvPr id="33" name="Text 31"/>
+          <p:cNvSpPr/>
+          <p:nvPr/>
+        </p:nvSpPr>
+        <p:spPr>
+          <a:xfrm>
+            <a:off x="1335024" y="4407408"/>
+            <a:ext cx="9905695" cy="274320"/>
+          </a:xfrm>
+          <a:prstGeom prst="rect">
+            <a:avLst/>
+          </a:prstGeom>
+          <a:noFill/>
+          <a:ln/>
+        </p:spPr>
+        <p:txBody>
+          <a:bodyPr wrap="square" lIns="0" tIns="0" rIns="0" bIns="0" rtlCol="0" anchor="ctr"/>
+          <a:lstStyle/>
+          <a:p>
+            <a:pPr marL="0" indent="0">
+              <a:buNone/>
+            </a:pPr>
+            <a:r>
+              <a:rPr lang="en-US" sz="1300" b="1" dirty="0">
+                <a:solidFill>
+                  <a:srgbClr val="0E1E3A"/>
+                </a:solidFill>
+                <a:latin typeface="Cambria" pitchFamily="34" charset="0"/>
+                <a:ea typeface="Cambria" pitchFamily="34" charset="-122"/>
+                <a:cs typeface="Cambria" pitchFamily="34" charset="-120"/>
+              </a:rPr>
+              <a:t>Same programs on a second model and provider; no protection under drift</a:t>
+            </a:r>
+            <a:endParaRPr lang="en-US" sz="1300" dirty="0"/>
+          </a:p>
+        </p:txBody>
+      </p:sp>
+      <p:sp>
+        <p:nvSpPr>
+          <p:cNvPr id="34" name="Text 32"/>
+          <p:cNvSpPr/>
+          <p:nvPr/>
+        </p:nvSpPr>
+        <p:spPr>
+          <a:xfrm>
+            <a:off x="1335024" y="4700016"/>
+            <a:ext cx="9905695" cy="694944"/>
+          </a:xfrm>
+          <a:prstGeom prst="rect">
+            <a:avLst/>
+          </a:prstGeom>
+          <a:noFill/>
+          <a:ln/>
+        </p:spPr>
+        <p:txBody>
+          <a:bodyPr wrap="square" lIns="0" tIns="0" rIns="0" bIns="0" rtlCol="0" anchor="t"/>
+          <a:lstStyle/>
+          <a:p>
+            <a:pPr marL="0" indent="0">
+              <a:lnSpc>
+                <a:spcPct val="106000"/>
+              </a:lnSpc>
+              <a:buNone/>
+            </a:pPr>
+            <a:r>
+              <a:rPr lang="en-US" sz="1050" dirty="0">
+                <a:solidFill>
+                  <a:srgbClr val="24354F"/>
+                </a:solidFill>
+                <a:latin typeface="Calibri" pitchFamily="34" charset="0"/>
+                <a:ea typeface="Calibri" pitchFamily="34" charset="-122"/>
+                <a:cs typeface="Calibri" pitchFamily="34" charset="-120"/>
+              </a:rPr>
+              <a:t>Re-discovery on gpt-6-luna and claude-sonnet-5 re-derives the identical programs on two of three GitHub families and refuses backlog routing (on Sonnet at 91 and 90 of 92 groups). Under tool-layer drift the run-time checks prevented no wrong answer: both arms answered wrongly on 39 of 60 records.</a:t>
+            </a:r>
+            <a:endParaRPr lang="en-US" sz="1050" dirty="0"/>
+          </a:p>
+        </p:txBody>
+      </p:sp>
+      <p:sp>
+        <p:nvSpPr>
+          <p:cNvPr id="35" name="Text 33"/>
+          <p:cNvSpPr/>
+          <p:nvPr/>
+        </p:nvSpPr>
+        <p:spPr>
+          <a:xfrm>
+            <a:off x="640080" y="5596128"/>
+            <a:ext cx="10911535" cy="603504"/>
+          </a:xfrm>
+          <a:prstGeom prst="rect">
+            <a:avLst/>
+          </a:prstGeom>
+          <a:noFill/>
+          <a:ln/>
+        </p:spPr>
+        <p:txBody>
+          <a:bodyPr wrap="square" lIns="0" tIns="0" rIns="0" bIns="0" rtlCol="0" anchor="t"/>
+          <a:lstStyle/>
+          <a:p>
+            <a:pPr marL="0" indent="0">
+              <a:lnSpc>
+                <a:spcPct val="105000"/>
+              </a:lnSpc>
+              <a:buNone/>
+            </a:pPr>
+            <a:r>
+              <a:rPr lang="en-US" sz="1000" i="1" dirty="0">
+                <a:solidFill>
+                  <a:srgbClr val="5A6B84"/>
+                </a:solidFill>
+                <a:latin typeface="Calibri" pitchFamily="34" charset="0"/>
+                <a:ea typeface="Calibri" pitchFamily="34" charset="-122"/>
+                <a:cs typeface="Calibri" pitchFamily="34" charset="-120"/>
+              </a:rPr>
+              <a:t>Across 810 held-out GitHub episodes in six studies, one compiled-only contract failure occurred: 1 of 270 on excerpt-bearing contracts (one-sided bound 1.7%) and 0 of 540 on the outcome-only cross-repository contract.</a:t>
+            </a:r>
+            <a:endParaRPr lang="en-US" sz="1000" dirty="0"/>
           </a:p>
         </p:txBody>
       </p:sp>
@@ -30621,7 +31999,7 @@
                 <a:ea typeface="Calibri" pitchFamily="34" charset="-122"/>
                 <a:cs typeface="Calibri" pitchFamily="34" charset="-120"/>
               </a:rPr>
-              <a:t>RELATED WORK  ·  §6 AND §7.1  ·  TABLE 8</a:t>
+              <a:t>RELATED WORK  ·  §6</a:t>
             </a:r>
             <a:endParaRPr lang="en-US" sz="1050" dirty="0"/>
           </a:p>
@@ -35095,7 +36473,7 @@
                 <a:ea typeface="Calibri" pitchFamily="34" charset="-122"/>
                 <a:cs typeface="Calibri" pitchFamily="34" charset="-120"/>
               </a:rPr>
-              <a:t>RESEARCH QUESTIONS</a:t>
+              <a:t>QUESTIONS THIS TALK ANSWERS</a:t>
             </a:r>
             <a:endParaRPr lang="en-US" sz="1050" dirty="0"/>
           </a:p>
@@ -35166,7 +36544,7 @@
                 <a:ea typeface="Calibri" pitchFamily="34" charset="-122"/>
                 <a:cs typeface="Calibri" pitchFamily="34" charset="-120"/>
               </a:rPr>
-              <a:t>RQ1</a:t>
+              <a:t>Q1</a:t>
             </a:r>
             <a:endParaRPr lang="en-US" sz="900" dirty="0"/>
           </a:p>
@@ -35208,7 +36586,7 @@
                 <a:ea typeface="Calibri" pitchFamily="34" charset="-122"/>
                 <a:cs typeface="Calibri" pitchFamily="34" charset="-120"/>
               </a:rPr>
-              <a:t>Can typed trace provenance reconstruct the dependencies needed to synthesize recurrent tool programs?</a:t>
+              <a:t>When may a recurring read-only opening be compiled into a deterministic program, and when must it be refused?</a:t>
             </a:r>
             <a:endParaRPr lang="en-US" sz="1150" dirty="0"/>
           </a:p>
@@ -35279,7 +36657,7 @@
                 <a:ea typeface="Calibri" pitchFamily="34" charset="-122"/>
                 <a:cs typeface="Calibri" pitchFamily="34" charset="-120"/>
               </a:rPr>
-              <a:t>RQ2</a:t>
+              <a:t>Q2</a:t>
             </a:r>
             <a:endParaRPr lang="en-US" sz="900" dirty="0"/>
           </a:p>
@@ -35321,7 +36699,7 @@
                 <a:ea typeface="Calibri" pitchFamily="34" charset="-122"/>
                 <a:cs typeface="Calibri" pitchFamily="34" charset="-120"/>
               </a:rPr>
-              <a:t>On an unseen real-record workload, how does a learned compiled prefix trade factual quality against requests, tokens, latency, and cost — relative to an unchanged agent and a hand-written composite tool?</a:t>
+              <a:t>On real GitHub workflows, do guarded programs keep held-out contracts while cutting requests, tokens, latency, and cost, against the unchanged agent and a hand-written program?</a:t>
             </a:r>
             <a:endParaRPr lang="en-US" sz="1150" dirty="0"/>
           </a:p>
@@ -35392,7 +36770,7 @@
                 <a:ea typeface="Calibri" pitchFamily="34" charset="-122"/>
                 <a:cs typeface="Calibri" pitchFamily="34" charset="-120"/>
               </a:rPr>
-              <a:t>RQ3</a:t>
+              <a:t>Q3</a:t>
             </a:r>
             <a:endParaRPr lang="en-US" sz="900" dirty="0"/>
           </a:p>
@@ -35434,7 +36812,7 @@
                 <a:ea typeface="Calibri" pitchFamily="34" charset="-122"/>
                 <a:cs typeface="Calibri" pitchFamily="34" charset="-120"/>
               </a:rPr>
-              <a:t>Does exact selective admission reject recurrent families when calibration support is inadequate?</a:t>
+              <a:t>Does the result reach a public benchmark, newer records, a second model family, and a second provider?</a:t>
             </a:r>
             <a:endParaRPr lang="en-US" sz="1150" dirty="0"/>
           </a:p>
@@ -35505,7 +36883,7 @@
                 <a:ea typeface="Calibri" pitchFamily="34" charset="-122"/>
                 <a:cs typeface="Calibri" pitchFamily="34" charset="-120"/>
               </a:rPr>
-              <a:t>RQ4</a:t>
+              <a:t>Q4</a:t>
             </a:r>
             <a:endParaRPr lang="en-US" sz="900" dirty="0"/>
           </a:p>
@@ -35547,7 +36925,7 @@
                 <a:ea typeface="Calibri" pitchFamily="34" charset="-122"/>
                 <a:cs typeface="Calibri" pitchFamily="34" charset="-120"/>
               </a:rPr>
-              <a:t>Which failure modes remain after structural compilation, and what does compaction not improve?</a:t>
+              <a:t>Where does admission refuse, and why: thin evidence, per-question choices, or rarely dispatchable programs?</a:t>
             </a:r>
             <a:endParaRPr lang="en-US" sz="1150" dirty="0"/>
           </a:p>
@@ -35618,7 +36996,7 @@
                 <a:ea typeface="Calibri" pitchFamily="34" charset="-122"/>
                 <a:cs typeface="Calibri" pitchFamily="34" charset="-120"/>
               </a:rPr>
-              <a:t>RQ5</a:t>
+              <a:t>Q5</a:t>
             </a:r>
             <a:endParaRPr lang="en-US" sz="900" dirty="0"/>
           </a:p>
@@ -35660,7 +37038,7 @@
                 <a:ea typeface="Calibri" pitchFamily="34" charset="-122"/>
                 <a:cs typeface="Calibri" pitchFamily="34" charset="-120"/>
               </a:rPr>
-              <a:t>Can group-level paired evidence select a risk-bounded action before a fresh cohort?</a:t>
+              <a:t>What do the certificates certify, and do the run-time guards protect under drift?</a:t>
             </a:r>
             <a:endParaRPr lang="en-US" sz="1150" dirty="0"/>
           </a:p>
@@ -35786,7 +37164,7 @@
                 <a:ea typeface="Calibri" pitchFamily="34" charset="-122"/>
                 <a:cs typeface="Calibri" pitchFamily="34" charset="-120"/>
               </a:rPr>
-              <a:t>A trace-to-program formulation combining typed value provenance, effect-aware barriers, a closed synthesis language, empirical contracts, and runtime fallback</a:t>
+              <a:t>A guarded specialization pipeline: typed provenance, effect and position barriers, bounded synthesis, run-time verification, and finite-sample compile-or-retire admission, where every stage can refuse</a:t>
             </a:r>
             <a:endParaRPr lang="en-US" sz="1050" dirty="0"/>
           </a:p>
@@ -35810,7 +37188,7 @@
                 <a:ea typeface="Calibri" pitchFamily="34" charset="-122"/>
                 <a:cs typeface="Calibri" pitchFamily="34" charset="-120"/>
               </a:rPr>
-              <a:t>A dispatch protocol whose score is frozen before calibration and whose fixed threshold grid receives a simultaneous one-sided exact binomial bound</a:t>
+              <a:t>A live evaluation on three GitHub workflow families, newer records across five repositories, a post-cutoff cohort with an end-to-end certificate, BIRD, drift ablations, and replications</a:t>
             </a:r>
             <a:endParaRPr lang="en-US" sz="1050" dirty="0"/>
           </a:p>
@@ -35834,55 +37212,7 @@
                 <a:ea typeface="Calibri" pitchFamily="34" charset="-122"/>
                 <a:cs typeface="Calibri" pitchFamily="34" charset="-120"/>
               </a:rPr>
-              <a:t>A real-provider, real-public-record study in which the agent chooses tool order and quality is graded independently of execution conformance</a:t>
-            </a:r>
-            <a:endParaRPr lang="en-US" sz="1050" dirty="0"/>
-          </a:p>
-          <a:p>
-            <a:pPr marL="342900" indent="-342900">
-              <a:lnSpc>
-                <a:spcPct val="105000"/>
-              </a:lnSpc>
-              <a:spcAft>
-                <a:spcPts val="500"/>
-              </a:spcAft>
-              <a:buSzPct val="100000"/>
-              <a:buChar char="•"/>
-            </a:pPr>
-            <a:r>
-              <a:rPr lang="en-US" sz="1050" dirty="0">
-                <a:solidFill>
-                  <a:srgbClr val="24354F"/>
-                </a:solidFill>
-                <a:latin typeface="Calibri" pitchFamily="34" charset="0"/>
-                <a:ea typeface="Calibri" pitchFamily="34" charset="-122"/>
-                <a:cs typeface="Calibri" pitchFamily="34" charset="-120"/>
-              </a:rPr>
-              <a:t>An external NESTFUL study reporting provenance success, synthesis abstention, and a useful negative result</a:t>
-            </a:r>
-            <a:endParaRPr lang="en-US" sz="1050" dirty="0"/>
-          </a:p>
-          <a:p>
-            <a:pPr marL="342900" indent="-342900">
-              <a:lnSpc>
-                <a:spcPct val="105000"/>
-              </a:lnSpc>
-              <a:spcAft>
-                <a:spcPts val="500"/>
-              </a:spcAft>
-              <a:buSzPct val="100000"/>
-              <a:buChar char="•"/>
-            </a:pPr>
-            <a:r>
-              <a:rPr lang="en-US" sz="1050" dirty="0">
-                <a:solidFill>
-                  <a:srgbClr val="24354F"/>
-                </a:solidFill>
-                <a:latin typeface="Calibri" pitchFamily="34" charset="0"/>
-                <a:ea typeface="Calibri" pitchFamily="34" charset="-122"/>
-                <a:cs typeface="Calibri" pitchFamily="34" charset="-120"/>
-              </a:rPr>
-              <a:t>A framework-neutral transformation portfolio over measured actions only</a:t>
+              <a:t>Calibrated refusal on public trace benchmarks: NESTFUL retires below the sample floor, and AppWorld separates admissible from dispatchable</a:t>
             </a:r>
             <a:endParaRPr lang="en-US" sz="1050" dirty="0"/>
           </a:p>
@@ -36004,7 +37334,7 @@
                 <a:ea typeface="Calibri" pitchFamily="34" charset="-122"/>
                 <a:cs typeface="Calibri" pitchFamily="34" charset="-120"/>
               </a:rPr>
-              <a:t>universal semantic equivalence  ·  production certification  ·  cross-domain generalization  ·  fewer necessary tool calls  ·  deterministic natural-language generation</a:t>
+              <a:t>universal semantic equivalence  ·  production certification  ·  savings across snapshots  ·  graded risk ranking  ·  protection under drift  ·  runtime superiority over hand-written code</a:t>
             </a:r>
             <a:endParaRPr lang="en-US" sz="1050" dirty="0"/>
           </a:p>
@@ -36453,7 +37783,7 @@
                 <a:ea typeface="Calibri" pitchFamily="34" charset="-122"/>
                 <a:cs typeface="Calibri" pitchFamily="34" charset="-120"/>
               </a:rPr>
-              <a:t>FORMULATION  ·  §2.1</a:t>
+              <a:t>FORMULATION  ·  §2</a:t>
             </a:r>
             <a:endParaRPr lang="en-US" sz="1050" dirty="0"/>
           </a:p>
@@ -36631,7 +37961,7 @@
       </p:sp>
       <p:pic>
         <p:nvPicPr>
-          <p:cNvPr id="10" name="Image 1" descr="/home/claude/deck/eq/eq1.png"/>
+          <p:cNvPr id="10" name="Image 1"/>
           <p:cNvPicPr>
             <a:picLocks noChangeAspect="1"/>
           </p:cNvPicPr>
@@ -36645,8 +37975,8 @@
         </p:blipFill>
         <p:spPr>
           <a:xfrm>
-            <a:off x="877824" y="1975104"/>
-            <a:ext cx="7303477" cy="384048"/>
+            <a:off x="877824" y="1986423"/>
+            <a:ext cx="9875520" cy="361410"/>
           </a:xfrm>
           <a:prstGeom prst="rect">
             <a:avLst/>
@@ -36689,7 +38019,7 @@
                 <a:ea typeface="Calibri" pitchFamily="34" charset="-122"/>
                 <a:cs typeface="Calibri" pitchFamily="34" charset="-120"/>
               </a:rPr>
-              <a:t>GROUNDABLE — every call argument in the region has an expression over entry state or prior results, drawn from a closed, bounded transform library ℒ. A slot with no such expression is a genuine model decision.</a:t>
+              <a:t>GROUNDABLE — every call argument in the region is a literal invariant across the supporting traces or an expression over entry state or prior results, drawn from a closed, bounded transform library ℒ. Any other slot is a genuine model decision.</a:t>
             </a:r>
             <a:endParaRPr lang="en-US" sz="1000" dirty="0"/>
           </a:p>
@@ -36982,7 +38312,7 @@
                 <a:ea typeface="Calibri" pitchFamily="34" charset="-122"/>
                 <a:cs typeface="Calibri" pitchFamily="34" charset="-120"/>
               </a:rPr>
-              <a:t>POSITION INVARIANT — the deployed runtime resolves artifacts at the initial model boundary, so a region must be a prefix. This restriction is not aesthetic: a suffix program dispatched at entry may reorder or duplicate earlier calls, and §5.6 demonstrates that failure empirically.</a:t>
+              <a:t>POSITION INVARIANT — the deployed runtime resolves artifacts at the initial model boundary, so a region must be a prefix. A suffix program dispatched at entry can reorder or duplicate calls the agent has already made; an archived pilot produced exactly that fault.</a:t>
             </a:r>
             <a:endParaRPr lang="en-US" sz="1000" dirty="0"/>
           </a:p>
@@ -37722,7 +39052,7 @@
                 <a:ea typeface="Calibri" pitchFamily="34" charset="-122"/>
                 <a:cs typeface="Calibri" pitchFamily="34" charset="-120"/>
               </a:rPr>
-              <a:t>FORMULATION  ·  §2.2</a:t>
+              <a:t>FORMULATION  ·  §2</a:t>
             </a:r>
             <a:endParaRPr lang="en-US" sz="1050" dirty="0"/>
           </a:p>
@@ -38604,7 +39934,7 @@
       </p:sp>
       <p:pic>
         <p:nvPicPr>
-          <p:cNvPr id="26" name="Image 6" descr="/home/claude/deck/eq/eq3.png"/>
+          <p:cNvPr id="26" name="Image 6"/>
           <p:cNvPicPr>
             <a:picLocks noChangeAspect="1"/>
           </p:cNvPicPr>
@@ -38618,8 +39948,8 @@
         </p:blipFill>
         <p:spPr>
           <a:xfrm>
-            <a:off x="877824" y="2681103"/>
-            <a:ext cx="4248760" cy="252209"/>
+            <a:off x="877824" y="2688464"/>
+            <a:ext cx="4297680" cy="237487"/>
           </a:xfrm>
           <a:prstGeom prst="rect">
             <a:avLst/>
@@ -38743,7 +40073,7 @@
       </p:sp>
       <p:pic>
         <p:nvPicPr>
-          <p:cNvPr id="30" name="Image 7" descr="/home/claude/deck/eq/eq45.png"/>
+          <p:cNvPr id="30" name="Image 7"/>
           <p:cNvPicPr>
             <a:picLocks noChangeAspect="1"/>
           </p:cNvPicPr>
@@ -38758,7 +40088,7 @@
         <p:spPr>
           <a:xfrm>
             <a:off x="6498184" y="2633472"/>
-            <a:ext cx="2558230" cy="621792"/>
+            <a:ext cx="3265350" cy="621792"/>
           </a:xfrm>
           <a:prstGeom prst="rect">
             <a:avLst/>
@@ -38801,7 +40131,7 @@
                 <a:ea typeface="Calibri" pitchFamily="34" charset="-122"/>
                 <a:cs typeface="Calibri" pitchFamily="34" charset="-120"/>
               </a:rPr>
-              <a:t>CONSTRAINED OBJECTIVE — maximize coverage-weighted saving against the unchanged agent B, subject to bounded selective risk. Returning no artifact (Retire) is a valid solution.</a:t>
+              <a:t>CONSTRAINED OBJECTIVE — maximize the dispatched saving over the unchanged agent B, subject to group-level selective risk ≤ α. Retire is a valid solution.</a:t>
             </a:r>
             <a:endParaRPr lang="en-US" sz="1000" dirty="0"/>
           </a:p>
@@ -38840,7 +40170,7 @@
                 <a:ea typeface="Calibri" pitchFamily="34" charset="-122"/>
                 <a:cs typeface="Calibri" pitchFamily="34" charset="-120"/>
               </a:rPr>
-              <a:t>(4) (5)</a:t>
+              <a:t>(4)</a:t>
             </a:r>
             <a:endParaRPr lang="en-US" sz="1000" dirty="0"/>
           </a:p>
@@ -38923,7 +40253,7 @@
                 <a:ea typeface="Calibri" pitchFamily="34" charset="-122"/>
                 <a:cs typeface="Calibri" pitchFamily="34" charset="-120"/>
               </a:rPr>
-              <a:t>Honest reading of the objective. </a:t>
+              <a:t>Honest reading of the objective.</a:t>
             </a:r>
             <a:r>
               <a:rPr lang="en-US" sz="1150" dirty="0">
@@ -38934,7 +40264,7 @@
                 <a:ea typeface="Calibri" pitchFamily="34" charset="-122"/>
                 <a:cs typeface="Calibri" pitchFamily="34" charset="-120"/>
               </a:rPr>
-              <a:t>Equation (5) is a design target, not a problem the implementation solves. Algorithm 1 ranks families and returns the first that survives synthesis, contracts, and calibration — it neither enumerates all admissible families nor bounds the gap to the best one. Because the first admissible family ships, the ranking is load-bearing after all.</a:t>
+              <a:t> Equation (4) is a design target, not a solved program: the implementation calibrates a bounded ranked set and keeps nondominated survivors, without an optimality guarantee. Every certificate but one counts a replay-contract violation of the compiled region, so the model's continuation is measured, not certified.</a:t>
             </a:r>
             <a:endParaRPr lang="en-US" sz="1150" dirty="0"/>
           </a:p>
@@ -38973,7 +40303,7 @@
                 <a:ea typeface="Calibri" pitchFamily="34" charset="-122"/>
                 <a:cs typeface="Calibri" pitchFamily="34" charset="-120"/>
               </a:rPr>
-              <a:t>TWO DECISION LAYERS, DELIBERATELY SEPARATED</a:t>
+              <a:t>TWO EVENTS A CERTIFICATE CAN BOUND</a:t>
             </a:r>
             <a:endParaRPr lang="en-US" sz="1050" dirty="0"/>
           </a:p>
@@ -39053,7 +40383,7 @@
                 <a:ea typeface="Cambria" pitchFamily="34" charset="-122"/>
                 <a:cs typeface="Cambria" pitchFamily="34" charset="-120"/>
               </a:rPr>
-              <a:t>Compiler layer</a:t>
+              <a:t>Replay contract</a:t>
             </a:r>
             <a:endParaRPr lang="en-US" sz="1250" dirty="0"/>
           </a:p>
@@ -39095,7 +40425,7 @@
                 <a:ea typeface="Calibri" pitchFamily="34" charset="-122"/>
                 <a:cs typeface="Calibri" pitchFamily="34" charset="-120"/>
               </a:rPr>
-              <a:t>Action set is exactly {B, A}: retain the baseline, or admit one compiled artifact. Binary by construction.</a:t>
+              <a:t>The compiled region breaks its own registered contract. Every primary certificate uses this event, which has no support on the GitHub cohorts.</a:t>
             </a:r>
             <a:endParaRPr lang="en-US" sz="1050" dirty="0"/>
           </a:p>
@@ -39175,7 +40505,7 @@
                 <a:ea typeface="Cambria" pitchFamily="34" charset="-122"/>
                 <a:cs typeface="Cambria" pitchFamily="34" charset="-120"/>
               </a:rPr>
-              <a:t>Portfolio layer</a:t>
+              <a:t>End-to-end contract</a:t>
             </a:r>
             <a:endParaRPr lang="en-US" sz="1250" dirty="0"/>
           </a:p>
@@ -39217,7 +40547,7 @@
                 <a:ea typeface="Calibri" pitchFamily="34" charset="-122"/>
                 <a:cs typeface="Calibri" pitchFamily="34" charset="-120"/>
               </a:rPr>
-              <a:t>Defined in section 3.4. Consumes paired measurements for arbitrary named actions. Cannot weaken compiler admission, and cannot turn an unevaluated macro into deployable code.</a:t>
+              <a:t>The graded task contract, including the model's answer. Certified once: 0 misses on 132 post-cutoff pull requests, bound 0.0173.</a:t>
             </a:r>
             <a:endParaRPr lang="en-US" sz="1050" dirty="0"/>
           </a:p>
@@ -39666,7 +40996,7 @@
                 <a:ea typeface="Calibri" pitchFamily="34" charset="-122"/>
                 <a:cs typeface="Calibri" pitchFamily="34" charset="-120"/>
               </a:rPr>
-              <a:t>METHOD  ·  ALGORITHM 1</a:t>
+              <a:t>METHOD  ·  FIGURE 1  ·  ALGORITHM 2</a:t>
             </a:r>
             <a:endParaRPr lang="en-US" sz="1050" dirty="0"/>
           </a:p>
